--- a/teco/HT/東元HT_AI_Agent導入規劃簡報.pptx
+++ b/teco/HT/東元HT_AI_Agent導入規劃簡報.pptx
@@ -4,6 +4,9 @@
   <p:sldMasterIdLst>
     <p:sldMasterId id="2147483648" r:id="rId1"/>
   </p:sldMasterIdLst>
+  <p:notesMasterIdLst>
+    <p:notesMasterId r:id="rId17"/>
+  </p:notesMasterIdLst>
   <p:sldIdLst>
     <p:sldId id="256" r:id="rId2"/>
     <p:sldId id="257" r:id="rId3"/>
@@ -21,9 +24,6 @@
     <p:sldId id="269" r:id="rId15"/>
     <p:sldId id="270" r:id="rId16"/>
   </p:sldIdLst>
-  <p:notesMasterIdLst>
-    <p:notesMasterId r:id="rId17"/>
-  </p:notesMasterIdLst>
   <p:sldSz cx="12192000" cy="6858000"/>
   <p:notesSz cx="6858000" cy="12192000"/>
   <p:defaultTextStyle>
@@ -118,6 +118,11 @@
       </a:defRPr>
     </a:lvl9pPr>
   </p:defaultTextStyle>
+  <p:extLst>
+    <p:ext uri="{EFAFB233-063F-42B5-8137-9DF3F51BA10A}">
+      <p15:sldGuideLst xmlns:p15="http://schemas.microsoft.com/office/powerpoint/2012/main"/>
+    </p:ext>
+  </p:extLst>
 </p:presentation>
 </file>
 
@@ -143,234 +148,10 @@
           <a:chExt cx="0" cy="0"/>
         </a:xfrm>
       </p:grpSpPr>
-      <p:sp>
-        <p:nvSpPr>
-          <p:cNvPr id="2" name="Header Placeholder 1"/>
-          <p:cNvSpPr>
-            <a:spLocks noGrp="1"/>
-          </p:cNvSpPr>
-          <p:nvPr>
-            <p:ph type="hdr" sz="quarter"/>
-          </p:nvPr>
-        </p:nvSpPr>
-        <p:spPr>
-          <a:xfrm>
-            <a:off x="0" y="0"/>
-            <a:ext cx="2971800" cy="458788"/>
-          </a:xfrm>
-          <a:prstGeom prst="rect">
-            <a:avLst/>
-          </a:prstGeom>
-        </p:spPr>
-        <p:txBody>
-          <a:bodyPr vert="horz" lIns="91440" tIns="45720" rIns="91440" bIns="45720" rtlCol="0"/>
-          <a:lstStyle>
-            <a:lvl1pPr algn="l">
-              <a:defRPr sz="1200"/>
-            </a:lvl1pPr>
-          </a:lstStyle>
-          <a:p>
-            <a:endParaRPr lang="en-US"/>
-          </a:p>
-        </p:txBody>
-      </p:sp>
-      <p:sp>
-        <p:nvSpPr>
-          <p:cNvPr id="3" name="Date Placeholder 2"/>
-          <p:cNvSpPr>
-            <a:spLocks noGrp="1"/>
-          </p:cNvSpPr>
-          <p:nvPr>
-            <p:ph type="dt" idx="1"/>
-          </p:nvPr>
-        </p:nvSpPr>
-        <p:spPr>
-          <a:xfrm>
-            <a:off x="3884613" y="0"/>
-            <a:ext cx="2971800" cy="458788"/>
-          </a:xfrm>
-          <a:prstGeom prst="rect">
-            <a:avLst/>
-          </a:prstGeom>
-        </p:spPr>
-        <p:txBody>
-          <a:bodyPr vert="horz" lIns="91440" tIns="45720" rIns="91440" bIns="45720" rtlCol="0"/>
-          <a:lstStyle>
-            <a:lvl1pPr algn="r">
-              <a:defRPr sz="1200"/>
-            </a:lvl1pPr>
-          </a:lstStyle>
-          <a:p>
-            <a:fld id="{5282F153-3F37-0F45-9E97-73ACFA13230C}" type="datetimeFigureOut">
-              <a:rPr lang="en-US"/>
-              <a:t>7/23/19</a:t>
-            </a:fld>
-            <a:endParaRPr lang="en-US"/>
-          </a:p>
-        </p:txBody>
-      </p:sp>
-      <p:sp>
-        <p:nvSpPr>
-          <p:cNvPr id="4" name="Slide Image Placeholder 3"/>
-          <p:cNvSpPr>
-            <a:spLocks noGrp="1" noRot="1" noChangeAspect="1"/>
-          </p:cNvSpPr>
-          <p:nvPr>
-            <p:ph type="sldImg" idx="2"/>
-          </p:nvPr>
-        </p:nvSpPr>
-        <p:spPr>
-          <a:xfrm>
-            <a:off x="685800" y="1143000"/>
-            <a:ext cx="5486400" cy="3086100"/>
-          </a:xfrm>
-          <a:prstGeom prst="rect">
-            <a:avLst/>
-          </a:prstGeom>
-          <a:noFill/>
-          <a:ln w="12700">
-            <a:solidFill>
-              <a:prstClr val="black"/>
-            </a:solidFill>
-          </a:ln>
-        </p:spPr>
-        <p:txBody>
-          <a:bodyPr vert="horz" lIns="91440" tIns="45720" rIns="91440" bIns="45720" rtlCol="0" anchor="ctr"/>
-          <a:lstStyle/>
-          <a:p>
-            <a:endParaRPr lang="en-US"/>
-          </a:p>
-        </p:txBody>
-      </p:sp>
-      <p:sp>
-        <p:nvSpPr>
-          <p:cNvPr id="5" name="Notes Placeholder 4"/>
-          <p:cNvSpPr>
-            <a:spLocks noGrp="1"/>
-          </p:cNvSpPr>
-          <p:nvPr>
-            <p:ph type="body" sz="quarter" idx="3"/>
-          </p:nvPr>
-        </p:nvSpPr>
-        <p:spPr>
-          <a:xfrm>
-            <a:off x="685800" y="4400550"/>
-            <a:ext cx="5486400" cy="3600450"/>
-          </a:xfrm>
-          <a:prstGeom prst="rect">
-            <a:avLst/>
-          </a:prstGeom>
-        </p:spPr>
-        <p:txBody>
-          <a:bodyPr vert="horz" lIns="91440" tIns="45720" rIns="91440" bIns="45720" rtlCol="0"/>
-          <a:lstStyle/>
-          <a:p>
-            <a:pPr lvl="0"/>
-            <a:r>
-              <a:rPr lang="en-US"/>
-              <a:t>Click to edit Master text styles</a:t>
-            </a:r>
-          </a:p>
-          <a:p>
-            <a:pPr lvl="1"/>
-            <a:r>
-              <a:rPr lang="en-US"/>
-              <a:t>Second level</a:t>
-            </a:r>
-          </a:p>
-          <a:p>
-            <a:pPr lvl="2"/>
-            <a:r>
-              <a:rPr lang="en-US"/>
-              <a:t>Third level</a:t>
-            </a:r>
-          </a:p>
-          <a:p>
-            <a:pPr lvl="3"/>
-            <a:r>
-              <a:rPr lang="en-US"/>
-              <a:t>Fourth level</a:t>
-            </a:r>
-          </a:p>
-          <a:p>
-            <a:pPr lvl="4"/>
-            <a:r>
-              <a:rPr lang="en-US"/>
-              <a:t>Fifth level</a:t>
-            </a:r>
-          </a:p>
-        </p:txBody>
-      </p:sp>
-      <p:sp>
-        <p:nvSpPr>
-          <p:cNvPr id="6" name="Footer Placeholder 5"/>
-          <p:cNvSpPr>
-            <a:spLocks noGrp="1"/>
-          </p:cNvSpPr>
-          <p:nvPr>
-            <p:ph type="ftr" sz="quarter" idx="4"/>
-          </p:nvPr>
-        </p:nvSpPr>
-        <p:spPr>
-          <a:xfrm>
-            <a:off x="0" y="8685213"/>
-            <a:ext cx="2971800" cy="458787"/>
-          </a:xfrm>
-          <a:prstGeom prst="rect">
-            <a:avLst/>
-          </a:prstGeom>
-        </p:spPr>
-        <p:txBody>
-          <a:bodyPr vert="horz" lIns="91440" tIns="45720" rIns="91440" bIns="45720" rtlCol="0" anchor="b"/>
-          <a:lstStyle>
-            <a:lvl1pPr algn="l">
-              <a:defRPr sz="1200"/>
-            </a:lvl1pPr>
-          </a:lstStyle>
-          <a:p>
-            <a:endParaRPr lang="en-US"/>
-          </a:p>
-        </p:txBody>
-      </p:sp>
-      <p:sp>
-        <p:nvSpPr>
-          <p:cNvPr id="7" name="Slide Number Placeholder 6"/>
-          <p:cNvSpPr>
-            <a:spLocks noGrp="1"/>
-          </p:cNvSpPr>
-          <p:nvPr>
-            <p:ph type="sldNum" sz="quarter" idx="5"/>
-          </p:nvPr>
-        </p:nvSpPr>
-        <p:spPr>
-          <a:xfrm>
-            <a:off x="3884613" y="8685213"/>
-            <a:ext cx="2971800" cy="458787"/>
-          </a:xfrm>
-          <a:prstGeom prst="rect">
-            <a:avLst/>
-          </a:prstGeom>
-        </p:spPr>
-        <p:txBody>
-          <a:bodyPr vert="horz" lIns="91440" tIns="45720" rIns="91440" bIns="45720" rtlCol="0" anchor="b"/>
-          <a:lstStyle>
-            <a:lvl1pPr algn="r">
-              <a:defRPr sz="1200"/>
-            </a:lvl1pPr>
-          </a:lstStyle>
-          <a:p>
-            <a:fld id="{CE5E9CC1-C706-0F49-92D6-E571CC5EEA8F}" type="slidenum">
-              <a:rPr lang="en-US"/>
-              <a:t>‹#›</a:t>
-            </a:fld>
-            <a:endParaRPr lang="en-US"/>
-          </a:p>
-        </p:txBody>
-      </p:sp>
     </p:spTree>
     <p:extLst>
       <p:ext uri="{BB962C8B-B14F-4D97-AF65-F5344CB8AC3E}">
-        <p14:creationId xmlns:p14="http://schemas.microsoft.com/office/powerpoint/2010/main" val="1024086991"/>
+        <p14:creationId xmlns:p14="http://schemas.microsoft.com/office/powerpoint/2010/main" val="537654647"/>
       </p:ext>
     </p:extLst>
   </p:cSld>
@@ -514,10 +295,6 @@
           <a:bodyPr/>
           <a:lstStyle/>
           <a:p>
-            <a:r>
-              <a:rPr lang="en-US" dirty="0"/>
-              <a:t/>
-            </a:r>
             <a:endParaRPr lang="en-US" dirty="0"/>
           </a:p>
         </p:txBody>
@@ -602,10 +379,6 @@
           <a:bodyPr/>
           <a:lstStyle/>
           <a:p>
-            <a:r>
-              <a:rPr lang="en-US" dirty="0"/>
-              <a:t/>
-            </a:r>
             <a:endParaRPr lang="en-US" dirty="0"/>
           </a:p>
         </p:txBody>
@@ -690,10 +463,6 @@
           <a:bodyPr/>
           <a:lstStyle/>
           <a:p>
-            <a:r>
-              <a:rPr lang="en-US" dirty="0"/>
-              <a:t/>
-            </a:r>
             <a:endParaRPr lang="en-US" dirty="0"/>
           </a:p>
         </p:txBody>
@@ -778,10 +547,6 @@
           <a:bodyPr/>
           <a:lstStyle/>
           <a:p>
-            <a:r>
-              <a:rPr lang="en-US" dirty="0"/>
-              <a:t/>
-            </a:r>
             <a:endParaRPr lang="en-US" dirty="0"/>
           </a:p>
         </p:txBody>
@@ -866,10 +631,6 @@
           <a:bodyPr/>
           <a:lstStyle/>
           <a:p>
-            <a:r>
-              <a:rPr lang="en-US" dirty="0"/>
-              <a:t/>
-            </a:r>
             <a:endParaRPr lang="en-US" dirty="0"/>
           </a:p>
         </p:txBody>
@@ -954,10 +715,6 @@
           <a:bodyPr/>
           <a:lstStyle/>
           <a:p>
-            <a:r>
-              <a:rPr lang="en-US" dirty="0"/>
-              <a:t/>
-            </a:r>
             <a:endParaRPr lang="en-US" dirty="0"/>
           </a:p>
         </p:txBody>
@@ -1042,10 +799,6 @@
           <a:bodyPr/>
           <a:lstStyle/>
           <a:p>
-            <a:r>
-              <a:rPr lang="en-US" dirty="0"/>
-              <a:t/>
-            </a:r>
             <a:endParaRPr lang="en-US" dirty="0"/>
           </a:p>
         </p:txBody>
@@ -1130,10 +883,6 @@
           <a:bodyPr/>
           <a:lstStyle/>
           <a:p>
-            <a:r>
-              <a:rPr lang="en-US" dirty="0"/>
-              <a:t/>
-            </a:r>
             <a:endParaRPr lang="en-US" dirty="0"/>
           </a:p>
         </p:txBody>
@@ -1218,10 +967,6 @@
           <a:bodyPr/>
           <a:lstStyle/>
           <a:p>
-            <a:r>
-              <a:rPr lang="en-US" dirty="0"/>
-              <a:t/>
-            </a:r>
             <a:endParaRPr lang="en-US" dirty="0"/>
           </a:p>
         </p:txBody>
@@ -1306,10 +1051,6 @@
           <a:bodyPr/>
           <a:lstStyle/>
           <a:p>
-            <a:r>
-              <a:rPr lang="en-US" dirty="0"/>
-              <a:t/>
-            </a:r>
             <a:endParaRPr lang="en-US" dirty="0"/>
           </a:p>
         </p:txBody>
@@ -1394,10 +1135,6 @@
           <a:bodyPr/>
           <a:lstStyle/>
           <a:p>
-            <a:r>
-              <a:rPr lang="en-US" dirty="0"/>
-              <a:t/>
-            </a:r>
             <a:endParaRPr lang="en-US" dirty="0"/>
           </a:p>
         </p:txBody>
@@ -1482,10 +1219,6 @@
           <a:bodyPr/>
           <a:lstStyle/>
           <a:p>
-            <a:r>
-              <a:rPr lang="en-US" dirty="0"/>
-              <a:t/>
-            </a:r>
             <a:endParaRPr lang="en-US" dirty="0"/>
           </a:p>
         </p:txBody>
@@ -1570,10 +1303,6 @@
           <a:bodyPr/>
           <a:lstStyle/>
           <a:p>
-            <a:r>
-              <a:rPr lang="en-US" dirty="0"/>
-              <a:t/>
-            </a:r>
             <a:endParaRPr lang="en-US" dirty="0"/>
           </a:p>
         </p:txBody>
@@ -1658,10 +1387,6 @@
           <a:bodyPr/>
           <a:lstStyle/>
           <a:p>
-            <a:r>
-              <a:rPr lang="en-US" dirty="0"/>
-              <a:t/>
-            </a:r>
             <a:endParaRPr lang="en-US" dirty="0"/>
           </a:p>
         </p:txBody>
@@ -1746,10 +1471,6 @@
           <a:bodyPr/>
           <a:lstStyle/>
           <a:p>
-            <a:r>
-              <a:rPr lang="en-US" dirty="0"/>
-              <a:t/>
-            </a:r>
             <a:endParaRPr lang="en-US" dirty="0"/>
           </a:p>
         </p:txBody>
@@ -1823,6 +1544,11 @@
 <file path=ppt/slideMasters/slideMaster1.xml><?xml version="1.0" encoding="utf-8"?>
 <p:sldMaster xmlns:a="http://schemas.openxmlformats.org/drawingml/2006/main" xmlns:r="http://schemas.openxmlformats.org/officeDocument/2006/relationships" xmlns:p="http://schemas.openxmlformats.org/presentationml/2006/main">
   <p:cSld>
+    <p:bg>
+      <p:bgRef idx="1001">
+        <a:schemeClr val="bg1"/>
+      </p:bgRef>
+    </p:bg>
     <p:spTree>
       <p:nvGrpSpPr>
         <p:cNvPr id="1" name=""/>
@@ -2105,6 +1831,7 @@
         <a:solidFill>
           <a:srgbClr val="8A7AD2"/>
         </a:solidFill>
+        <a:effectLst/>
       </p:bgPr>
     </p:bg>
     <p:spTree>
@@ -2145,6 +1872,13 @@
             <a:prstDash val="solid"/>
           </a:ln>
         </p:spPr>
+        <p:txBody>
+          <a:bodyPr/>
+          <a:lstStyle/>
+          <a:p>
+            <a:endParaRPr lang="zh-TW" altLang="en-US"/>
+          </a:p>
+        </p:txBody>
       </p:sp>
       <p:sp>
         <p:nvSpPr>
@@ -2167,7 +1901,7 @@
           <a:bodyPr wrap="square" lIns="0" tIns="0" rIns="0" bIns="0" rtlCol="0" anchor="ctr"/>
           <a:lstStyle/>
           <a:p>
-            <a:pPr indent="0" marL="0">
+            <a:pPr marL="0" indent="0">
               <a:buNone/>
             </a:pPr>
             <a:r>
@@ -2206,7 +1940,7 @@
           <a:bodyPr wrap="square" lIns="0" tIns="0" rIns="0" bIns="0" rtlCol="0" anchor="ctr"/>
           <a:lstStyle/>
           <a:p>
-            <a:pPr indent="0" marL="0">
+            <a:pPr marL="0" indent="0">
               <a:buNone/>
             </a:pPr>
             <a:r>
@@ -2245,7 +1979,7 @@
           <a:bodyPr wrap="square" lIns="0" tIns="0" rIns="0" bIns="0" rtlCol="0" anchor="ctr"/>
           <a:lstStyle/>
           <a:p>
-            <a:pPr indent="0" marL="0">
+            <a:pPr marL="0" indent="0">
               <a:buNone/>
             </a:pPr>
             <a:r>
@@ -2284,7 +2018,7 @@
           <a:bodyPr wrap="square" lIns="0" tIns="0" rIns="0" bIns="0" rtlCol="0" anchor="ctr"/>
           <a:lstStyle/>
           <a:p>
-            <a:pPr indent="0" marL="0">
+            <a:pPr marL="0" indent="0">
               <a:buNone/>
             </a:pPr>
             <a:r>
@@ -2324,6 +2058,13 @@
             <a:prstDash val="solid"/>
           </a:ln>
         </p:spPr>
+        <p:txBody>
+          <a:bodyPr/>
+          <a:lstStyle/>
+          <a:p>
+            <a:endParaRPr lang="zh-TW" altLang="en-US"/>
+          </a:p>
+        </p:txBody>
       </p:sp>
       <p:sp>
         <p:nvSpPr>
@@ -2346,7 +2087,7 @@
           <a:bodyPr wrap="square" lIns="0" tIns="0" rIns="0" bIns="0" rtlCol="0" anchor="ctr"/>
           <a:lstStyle/>
           <a:p>
-            <a:pPr indent="0" marL="0">
+            <a:pPr marL="0" indent="0">
               <a:buNone/>
             </a:pPr>
             <a:r>
@@ -2385,7 +2126,7 @@
           <a:bodyPr wrap="square" lIns="0" tIns="0" rIns="0" bIns="0" rtlCol="0" anchor="ctr"/>
           <a:lstStyle/>
           <a:p>
-            <a:pPr indent="0" marL="0">
+            <a:pPr marL="0" indent="0">
               <a:buNone/>
             </a:pPr>
             <a:r>
@@ -2424,7 +2165,7 @@
           <a:bodyPr wrap="square" lIns="0" tIns="0" rIns="0" bIns="0" rtlCol="0" anchor="ctr"/>
           <a:lstStyle/>
           <a:p>
-            <a:pPr indent="0" marL="0">
+            <a:pPr marL="0" indent="0">
               <a:buNone/>
             </a:pPr>
             <a:r>
@@ -2458,6 +2199,7 @@
         <a:solidFill>
           <a:srgbClr val="FFFFFF"/>
         </a:solidFill>
+        <a:effectLst/>
       </p:bgPr>
     </p:bg>
     <p:spTree>
@@ -2498,6 +2240,13 @@
             <a:prstDash val="solid"/>
           </a:ln>
         </p:spPr>
+        <p:txBody>
+          <a:bodyPr/>
+          <a:lstStyle/>
+          <a:p>
+            <a:endParaRPr lang="zh-TW" altLang="en-US"/>
+          </a:p>
+        </p:txBody>
       </p:sp>
       <p:sp>
         <p:nvSpPr>
@@ -2520,9 +2269,20 @@
           <a:bodyPr wrap="square" lIns="0" tIns="0" rIns="0" bIns="0" rtlCol="0" anchor="t"/>
           <a:lstStyle/>
           <a:p>
-            <a:pPr indent="0" marL="0">
-              <a:buNone/>
-            </a:pPr>
+            <a:pPr marL="0" indent="0">
+              <a:buNone/>
+            </a:pPr>
+            <a:r>
+              <a:rPr lang="en-US" sz="2800" b="1" dirty="0" err="1">
+                <a:solidFill>
+                  <a:srgbClr val="8A7AD2"/>
+                </a:solidFill>
+                <a:latin typeface="Microsoft JhengHei" pitchFamily="34" charset="0"/>
+                <a:ea typeface="Microsoft JhengHei" pitchFamily="34" charset="-122"/>
+                <a:cs typeface="Microsoft JhengHei" pitchFamily="34" charset="-120"/>
+              </a:rPr>
+              <a:t>門市銷售預測與巡店建議</a:t>
+            </a:r>
             <a:r>
               <a:rPr lang="en-US" sz="2800" b="1" dirty="0">
                 <a:solidFill>
@@ -2532,7 +2292,7 @@
                 <a:ea typeface="Microsoft JhengHei" pitchFamily="34" charset="-122"/>
                 <a:cs typeface="Microsoft JhengHei" pitchFamily="34" charset="-120"/>
               </a:rPr>
-              <a:t>題目 22  門市銷售預測與巡店建議  ｜  知識庫需求 與 雙 Agent 架構</a:t>
+              <a:t>  ｜  知識庫需求 與 雙 Agent 架構</a:t>
             </a:r>
             <a:endParaRPr lang="en-US" sz="2800" dirty="0"/>
           </a:p>
@@ -2559,7 +2319,7 @@
           <a:bodyPr wrap="square" lIns="0" tIns="0" rIns="0" bIns="0" rtlCol="0" anchor="ctr"/>
           <a:lstStyle/>
           <a:p>
-            <a:pPr indent="0" marL="0">
+            <a:pPr marL="0" indent="0">
               <a:buNone/>
             </a:pPr>
             <a:r>
@@ -2598,7 +2358,7 @@
           <a:bodyPr wrap="square" lIns="0" tIns="0" rIns="0" bIns="0" rtlCol="0" anchor="ctr"/>
           <a:lstStyle/>
           <a:p>
-            <a:pPr algn="r" indent="0" marL="0">
+            <a:pPr marL="0" indent="0" algn="r">
               <a:buNone/>
             </a:pPr>
             <a:r>
@@ -2637,7 +2397,7 @@
           <a:bodyPr wrap="square" lIns="0" tIns="0" rIns="0" bIns="0" rtlCol="0" anchor="ctr"/>
           <a:lstStyle/>
           <a:p>
-            <a:pPr algn="r" indent="0" marL="0">
+            <a:pPr marL="0" indent="0" algn="r">
               <a:buNone/>
             </a:pPr>
             <a:r>
@@ -2676,7 +2436,7 @@
           <a:bodyPr wrap="square" lIns="0" tIns="0" rIns="0" bIns="0" rtlCol="0" anchor="ctr"/>
           <a:lstStyle/>
           <a:p>
-            <a:pPr indent="0" marL="0">
+            <a:pPr marL="0" indent="0">
               <a:buNone/>
             </a:pPr>
             <a:r>
@@ -2710,17 +2470,41 @@
         </p:nvGraphicFramePr>
         <p:xfrm>
           <a:off x="457200" y="1828800"/>
-          <a:ext cx="6400800" cy="914400"/>
+          <a:ext cx="6400800" cy="1447800"/>
         </p:xfrm>
         <a:graphic>
           <a:graphicData uri="http://schemas.openxmlformats.org/drawingml/2006/table">
             <a:tbl>
               <a:tblPr/>
               <a:tblGrid>
-                <a:gridCol w="1371600"/>
-                <a:gridCol w="2926080"/>
-                <a:gridCol w="731520"/>
-                <a:gridCol w="1371600"/>
+                <a:gridCol w="1371600">
+                  <a:extLst>
+                    <a:ext uri="{9D8B030D-6E8A-4147-A177-3AD203B41FA5}">
+                      <a16:colId xmlns:a16="http://schemas.microsoft.com/office/drawing/2014/main" val="20000"/>
+                    </a:ext>
+                  </a:extLst>
+                </a:gridCol>
+                <a:gridCol w="2926080">
+                  <a:extLst>
+                    <a:ext uri="{9D8B030D-6E8A-4147-A177-3AD203B41FA5}">
+                      <a16:colId xmlns:a16="http://schemas.microsoft.com/office/drawing/2014/main" val="20001"/>
+                    </a:ext>
+                  </a:extLst>
+                </a:gridCol>
+                <a:gridCol w="731520">
+                  <a:extLst>
+                    <a:ext uri="{9D8B030D-6E8A-4147-A177-3AD203B41FA5}">
+                      <a16:colId xmlns:a16="http://schemas.microsoft.com/office/drawing/2014/main" val="20002"/>
+                    </a:ext>
+                  </a:extLst>
+                </a:gridCol>
+                <a:gridCol w="1371600">
+                  <a:extLst>
+                    <a:ext uri="{9D8B030D-6E8A-4147-A177-3AD203B41FA5}">
+                      <a16:colId xmlns:a16="http://schemas.microsoft.com/office/drawing/2014/main" val="20003"/>
+                    </a:ext>
+                  </a:extLst>
+                </a:gridCol>
               </a:tblGrid>
               <a:tr h="0">
                 <a:tc>
@@ -2728,7 +2512,7 @@
                     <a:bodyPr/>
                     <a:lstStyle/>
                     <a:p>
-                      <a:pPr indent="0" marL="0">
+                      <a:pPr marL="0" indent="0">
                         <a:buNone/>
                       </a:pPr>
                       <a:r>
@@ -2749,7 +2533,7 @@
                       </a:endParaRPr>
                     </a:p>
                   </a:txBody>
-                  <a:tcPr marL="91440" marR="91440" marT="45720" marB="45720">
+                  <a:tcPr>
                     <a:lnL w="6350" cap="flat" cmpd="sng" algn="ctr">
                       <a:solidFill>
                         <a:srgbClr val="D5C8EE"/>
@@ -2796,7 +2580,7 @@
                     <a:bodyPr/>
                     <a:lstStyle/>
                     <a:p>
-                      <a:pPr indent="0" marL="0">
+                      <a:pPr marL="0" indent="0">
                         <a:buNone/>
                       </a:pPr>
                       <a:r>
@@ -2817,7 +2601,7 @@
                       </a:endParaRPr>
                     </a:p>
                   </a:txBody>
-                  <a:tcPr marL="91440" marR="91440" marT="45720" marB="45720">
+                  <a:tcPr>
                     <a:lnL w="6350" cap="flat" cmpd="sng" algn="ctr">
                       <a:solidFill>
                         <a:srgbClr val="D5C8EE"/>
@@ -2864,7 +2648,7 @@
                     <a:bodyPr/>
                     <a:lstStyle/>
                     <a:p>
-                      <a:pPr indent="0" marL="0">
+                      <a:pPr marL="0" indent="0">
                         <a:buNone/>
                       </a:pPr>
                       <a:r>
@@ -2885,7 +2669,7 @@
                       </a:endParaRPr>
                     </a:p>
                   </a:txBody>
-                  <a:tcPr marL="91440" marR="91440" marT="45720" marB="45720">
+                  <a:tcPr>
                     <a:lnL w="6350" cap="flat" cmpd="sng" algn="ctr">
                       <a:solidFill>
                         <a:srgbClr val="D5C8EE"/>
@@ -2932,7 +2716,7 @@
                     <a:bodyPr/>
                     <a:lstStyle/>
                     <a:p>
-                      <a:pPr indent="0" marL="0">
+                      <a:pPr marL="0" indent="0">
                         <a:buNone/>
                       </a:pPr>
                       <a:r>
@@ -2953,7 +2737,7 @@
                       </a:endParaRPr>
                     </a:p>
                   </a:txBody>
-                  <a:tcPr marL="91440" marR="91440" marT="45720" marB="45720">
+                  <a:tcPr>
                     <a:lnL w="6350" cap="flat" cmpd="sng" algn="ctr">
                       <a:solidFill>
                         <a:srgbClr val="D5C8EE"/>
@@ -2995,6 +2779,11 @@
                     </a:solidFill>
                   </a:tcPr>
                 </a:tc>
+                <a:extLst>
+                  <a:ext uri="{0D108BD9-81ED-4DB2-BD59-A6C34878D82A}">
+                    <a16:rowId xmlns:a16="http://schemas.microsoft.com/office/drawing/2014/main" val="10000"/>
+                  </a:ext>
+                </a:extLst>
               </a:tr>
               <a:tr h="0">
                 <a:tc>
@@ -3002,7 +2791,7 @@
                     <a:bodyPr/>
                     <a:lstStyle/>
                     <a:p>
-                      <a:pPr indent="0" marL="0">
+                      <a:pPr marL="0" indent="0">
                         <a:buNone/>
                       </a:pPr>
                       <a:r>
@@ -3023,7 +2812,7 @@
                       </a:endParaRPr>
                     </a:p>
                   </a:txBody>
-                  <a:tcPr marL="91440" marR="91440" marT="45720" marB="45720">
+                  <a:tcPr>
                     <a:lnL w="6350" cap="flat" cmpd="sng" algn="ctr">
                       <a:solidFill>
                         <a:srgbClr val="D5C8EE"/>
@@ -3067,7 +2856,7 @@
                     <a:bodyPr/>
                     <a:lstStyle/>
                     <a:p>
-                      <a:pPr indent="0" marL="0">
+                      <a:pPr marL="0" indent="0">
                         <a:buNone/>
                       </a:pPr>
                       <a:r>
@@ -3088,7 +2877,7 @@
                       </a:endParaRPr>
                     </a:p>
                   </a:txBody>
-                  <a:tcPr marL="91440" marR="91440" marT="45720" marB="45720">
+                  <a:tcPr>
                     <a:lnL w="6350" cap="flat" cmpd="sng" algn="ctr">
                       <a:solidFill>
                         <a:srgbClr val="D5C8EE"/>
@@ -3132,7 +2921,7 @@
                     <a:bodyPr/>
                     <a:lstStyle/>
                     <a:p>
-                      <a:pPr algn="ctr" indent="0" marL="0">
+                      <a:pPr marL="0" indent="0" algn="ctr">
                         <a:buNone/>
                       </a:pPr>
                       <a:r>
@@ -3153,7 +2942,7 @@
                       </a:endParaRPr>
                     </a:p>
                   </a:txBody>
-                  <a:tcPr marL="91440" marR="91440" marT="45720" marB="45720">
+                  <a:tcPr>
                     <a:lnL w="6350" cap="flat" cmpd="sng" algn="ctr">
                       <a:solidFill>
                         <a:srgbClr val="D5C8EE"/>
@@ -3197,7 +2986,7 @@
                     <a:bodyPr/>
                     <a:lstStyle/>
                     <a:p>
-                      <a:pPr indent="0" marL="0">
+                      <a:pPr marL="0" indent="0">
                         <a:buNone/>
                       </a:pPr>
                       <a:r>
@@ -3218,7 +3007,7 @@
                       </a:endParaRPr>
                     </a:p>
                   </a:txBody>
-                  <a:tcPr marL="91440" marR="91440" marT="45720" marB="45720">
+                  <a:tcPr>
                     <a:lnL w="6350" cap="flat" cmpd="sng" algn="ctr">
                       <a:solidFill>
                         <a:srgbClr val="D5C8EE"/>
@@ -3257,6 +3046,11 @@
                     </a:lnB>
                   </a:tcPr>
                 </a:tc>
+                <a:extLst>
+                  <a:ext uri="{0D108BD9-81ED-4DB2-BD59-A6C34878D82A}">
+                    <a16:rowId xmlns:a16="http://schemas.microsoft.com/office/drawing/2014/main" val="10001"/>
+                  </a:ext>
+                </a:extLst>
               </a:tr>
               <a:tr h="0">
                 <a:tc>
@@ -3264,7 +3058,7 @@
                     <a:bodyPr/>
                     <a:lstStyle/>
                     <a:p>
-                      <a:pPr indent="0" marL="0">
+                      <a:pPr marL="0" indent="0">
                         <a:buNone/>
                       </a:pPr>
                       <a:r>
@@ -3285,7 +3079,7 @@
                       </a:endParaRPr>
                     </a:p>
                   </a:txBody>
-                  <a:tcPr marL="91440" marR="91440" marT="45720" marB="45720">
+                  <a:tcPr>
                     <a:lnL w="6350" cap="flat" cmpd="sng" algn="ctr">
                       <a:solidFill>
                         <a:srgbClr val="D5C8EE"/>
@@ -3332,7 +3126,7 @@
                     <a:bodyPr/>
                     <a:lstStyle/>
                     <a:p>
-                      <a:pPr indent="0" marL="0">
+                      <a:pPr marL="0" indent="0">
                         <a:buNone/>
                       </a:pPr>
                       <a:r>
@@ -3353,7 +3147,7 @@
                       </a:endParaRPr>
                     </a:p>
                   </a:txBody>
-                  <a:tcPr marL="91440" marR="91440" marT="45720" marB="45720">
+                  <a:tcPr>
                     <a:lnL w="6350" cap="flat" cmpd="sng" algn="ctr">
                       <a:solidFill>
                         <a:srgbClr val="D5C8EE"/>
@@ -3400,7 +3194,7 @@
                     <a:bodyPr/>
                     <a:lstStyle/>
                     <a:p>
-                      <a:pPr algn="ctr" indent="0" marL="0">
+                      <a:pPr marL="0" indent="0" algn="ctr">
                         <a:buNone/>
                       </a:pPr>
                       <a:r>
@@ -3421,7 +3215,7 @@
                       </a:endParaRPr>
                     </a:p>
                   </a:txBody>
-                  <a:tcPr marL="91440" marR="91440" marT="45720" marB="45720">
+                  <a:tcPr>
                     <a:lnL w="6350" cap="flat" cmpd="sng" algn="ctr">
                       <a:solidFill>
                         <a:srgbClr val="D5C8EE"/>
@@ -3468,7 +3262,7 @@
                     <a:bodyPr/>
                     <a:lstStyle/>
                     <a:p>
-                      <a:pPr indent="0" marL="0">
+                      <a:pPr marL="0" indent="0">
                         <a:buNone/>
                       </a:pPr>
                       <a:r>
@@ -3489,7 +3283,7 @@
                       </a:endParaRPr>
                     </a:p>
                   </a:txBody>
-                  <a:tcPr marL="91440" marR="91440" marT="45720" marB="45720">
+                  <a:tcPr>
                     <a:lnL w="6350" cap="flat" cmpd="sng" algn="ctr">
                       <a:solidFill>
                         <a:srgbClr val="D5C8EE"/>
@@ -3531,6 +3325,11 @@
                     </a:solidFill>
                   </a:tcPr>
                 </a:tc>
+                <a:extLst>
+                  <a:ext uri="{0D108BD9-81ED-4DB2-BD59-A6C34878D82A}">
+                    <a16:rowId xmlns:a16="http://schemas.microsoft.com/office/drawing/2014/main" val="10002"/>
+                  </a:ext>
+                </a:extLst>
               </a:tr>
               <a:tr h="0">
                 <a:tc>
@@ -3538,7 +3337,7 @@
                     <a:bodyPr/>
                     <a:lstStyle/>
                     <a:p>
-                      <a:pPr indent="0" marL="0">
+                      <a:pPr marL="0" indent="0">
                         <a:buNone/>
                       </a:pPr>
                       <a:r>
@@ -3559,7 +3358,7 @@
                       </a:endParaRPr>
                     </a:p>
                   </a:txBody>
-                  <a:tcPr marL="91440" marR="91440" marT="45720" marB="45720">
+                  <a:tcPr>
                     <a:lnL w="6350" cap="flat" cmpd="sng" algn="ctr">
                       <a:solidFill>
                         <a:srgbClr val="D5C8EE"/>
@@ -3603,7 +3402,7 @@
                     <a:bodyPr/>
                     <a:lstStyle/>
                     <a:p>
-                      <a:pPr indent="0" marL="0">
+                      <a:pPr marL="0" indent="0">
                         <a:buNone/>
                       </a:pPr>
                       <a:r>
@@ -3624,7 +3423,7 @@
                       </a:endParaRPr>
                     </a:p>
                   </a:txBody>
-                  <a:tcPr marL="91440" marR="91440" marT="45720" marB="45720">
+                  <a:tcPr>
                     <a:lnL w="6350" cap="flat" cmpd="sng" algn="ctr">
                       <a:solidFill>
                         <a:srgbClr val="D5C8EE"/>
@@ -3668,7 +3467,7 @@
                     <a:bodyPr/>
                     <a:lstStyle/>
                     <a:p>
-                      <a:pPr algn="ctr" indent="0" marL="0">
+                      <a:pPr marL="0" indent="0" algn="ctr">
                         <a:buNone/>
                       </a:pPr>
                       <a:r>
@@ -3689,7 +3488,7 @@
                       </a:endParaRPr>
                     </a:p>
                   </a:txBody>
-                  <a:tcPr marL="91440" marR="91440" marT="45720" marB="45720">
+                  <a:tcPr>
                     <a:lnL w="6350" cap="flat" cmpd="sng" algn="ctr">
                       <a:solidFill>
                         <a:srgbClr val="D5C8EE"/>
@@ -3733,7 +3532,7 @@
                     <a:bodyPr/>
                     <a:lstStyle/>
                     <a:p>
-                      <a:pPr indent="0" marL="0">
+                      <a:pPr marL="0" indent="0">
                         <a:buNone/>
                       </a:pPr>
                       <a:r>
@@ -3754,7 +3553,7 @@
                       </a:endParaRPr>
                     </a:p>
                   </a:txBody>
-                  <a:tcPr marL="91440" marR="91440" marT="45720" marB="45720">
+                  <a:tcPr>
                     <a:lnL w="6350" cap="flat" cmpd="sng" algn="ctr">
                       <a:solidFill>
                         <a:srgbClr val="D5C8EE"/>
@@ -3793,6 +3592,11 @@
                     </a:lnB>
                   </a:tcPr>
                 </a:tc>
+                <a:extLst>
+                  <a:ext uri="{0D108BD9-81ED-4DB2-BD59-A6C34878D82A}">
+                    <a16:rowId xmlns:a16="http://schemas.microsoft.com/office/drawing/2014/main" val="10003"/>
+                  </a:ext>
+                </a:extLst>
               </a:tr>
             </a:tbl>
           </a:graphicData>
@@ -3819,7 +3623,7 @@
           <a:bodyPr wrap="square" lIns="0" tIns="0" rIns="0" bIns="0" rtlCol="0" anchor="ctr"/>
           <a:lstStyle/>
           <a:p>
-            <a:pPr indent="0" marL="0">
+            <a:pPr marL="0" indent="0">
               <a:buNone/>
             </a:pPr>
             <a:r>
@@ -3861,10 +3665,17 @@
             <a:prstDash val="solid"/>
           </a:ln>
         </p:spPr>
-      </p:sp>
-      <p:sp>
-        <p:nvSpPr>
-          <p:cNvPr id="11" name="Shape 8"/>
+        <p:txBody>
+          <a:bodyPr/>
+          <a:lstStyle/>
+          <a:p>
+            <a:endParaRPr lang="zh-TW" altLang="en-US"/>
+          </a:p>
+        </p:txBody>
+      </p:sp>
+      <p:sp>
+        <p:nvSpPr>
+          <p:cNvPr id="8" name="Shape 8"/>
           <p:cNvSpPr/>
           <p:nvPr/>
         </p:nvSpPr>
@@ -3886,6 +3697,13 @@
             <a:prstDash val="solid"/>
           </a:ln>
         </p:spPr>
+        <p:txBody>
+          <a:bodyPr/>
+          <a:lstStyle/>
+          <a:p>
+            <a:endParaRPr lang="zh-TW" altLang="en-US"/>
+          </a:p>
+        </p:txBody>
       </p:sp>
       <p:sp>
         <p:nvSpPr>
@@ -3908,7 +3726,7 @@
           <a:bodyPr wrap="square" lIns="0" tIns="0" rIns="0" bIns="0" rtlCol="0" anchor="ctr"/>
           <a:lstStyle/>
           <a:p>
-            <a:pPr indent="0" marL="0">
+            <a:pPr marL="0" indent="0">
               <a:buNone/>
             </a:pPr>
             <a:r>
@@ -3947,7 +3765,7 @@
           <a:bodyPr wrap="square" lIns="0" tIns="0" rIns="0" bIns="0" rtlCol="0" anchor="ctr"/>
           <a:lstStyle/>
           <a:p>
-            <a:pPr indent="0" marL="0">
+            <a:pPr marL="0" indent="0">
               <a:buNone/>
             </a:pPr>
             <a:r>
@@ -3986,7 +3804,7 @@
           <a:bodyPr wrap="square" lIns="0" tIns="0" rIns="0" bIns="0" rtlCol="0" anchor="ctr"/>
           <a:lstStyle/>
           <a:p>
-            <a:pPr indent="0" marL="0">
+            <a:pPr marL="0" indent="0">
               <a:buNone/>
             </a:pPr>
             <a:r>
@@ -4028,6 +3846,13 @@
             <a:prstDash val="solid"/>
           </a:ln>
         </p:spPr>
+        <p:txBody>
+          <a:bodyPr/>
+          <a:lstStyle/>
+          <a:p>
+            <a:endParaRPr lang="zh-TW" altLang="en-US"/>
+          </a:p>
+        </p:txBody>
       </p:sp>
       <p:sp>
         <p:nvSpPr>
@@ -4053,6 +3878,13 @@
             <a:prstDash val="solid"/>
           </a:ln>
         </p:spPr>
+        <p:txBody>
+          <a:bodyPr/>
+          <a:lstStyle/>
+          <a:p>
+            <a:endParaRPr lang="zh-TW" altLang="en-US"/>
+          </a:p>
+        </p:txBody>
       </p:sp>
       <p:sp>
         <p:nvSpPr>
@@ -4075,7 +3907,7 @@
           <a:bodyPr wrap="square" lIns="0" tIns="0" rIns="0" bIns="0" rtlCol="0" anchor="ctr"/>
           <a:lstStyle/>
           <a:p>
-            <a:pPr indent="0" marL="0">
+            <a:pPr marL="0" indent="0">
               <a:buNone/>
             </a:pPr>
             <a:r>
@@ -4114,7 +3946,7 @@
           <a:bodyPr wrap="square" lIns="0" tIns="0" rIns="0" bIns="0" rtlCol="0" anchor="ctr"/>
           <a:lstStyle/>
           <a:p>
-            <a:pPr indent="0" marL="0">
+            <a:pPr marL="0" indent="0">
               <a:buNone/>
             </a:pPr>
             <a:r>
@@ -4153,7 +3985,7 @@
           <a:bodyPr wrap="square" lIns="0" tIns="0" rIns="0" bIns="0" rtlCol="0" anchor="ctr"/>
           <a:lstStyle/>
           <a:p>
-            <a:pPr indent="0" marL="0">
+            <a:pPr marL="0" indent="0">
               <a:buNone/>
             </a:pPr>
             <a:r>
@@ -4286,7 +4118,7 @@
           <a:bodyPr wrap="square" lIns="0" tIns="0" rIns="0" bIns="0" rtlCol="0" anchor="ctr"/>
           <a:lstStyle/>
           <a:p>
-            <a:pPr indent="0" marL="0">
+            <a:pPr marL="0" indent="0">
               <a:buNone/>
             </a:pPr>
             <a:r>
@@ -4320,6 +4152,7 @@
         <a:solidFill>
           <a:srgbClr val="FFFFFF"/>
         </a:solidFill>
+        <a:effectLst/>
       </p:bgPr>
     </p:bg>
     <p:spTree>
@@ -4360,6 +4193,13 @@
             <a:prstDash val="solid"/>
           </a:ln>
         </p:spPr>
+        <p:txBody>
+          <a:bodyPr/>
+          <a:lstStyle/>
+          <a:p>
+            <a:endParaRPr lang="zh-TW" altLang="en-US"/>
+          </a:p>
+        </p:txBody>
       </p:sp>
       <p:sp>
         <p:nvSpPr>
@@ -4382,7 +4222,7 @@
           <a:bodyPr wrap="square" lIns="0" tIns="0" rIns="0" bIns="0" rtlCol="0" anchor="t"/>
           <a:lstStyle/>
           <a:p>
-            <a:pPr indent="0" marL="0">
+            <a:pPr marL="0" indent="0">
               <a:buNone/>
             </a:pPr>
             <a:r>
@@ -4421,7 +4261,7 @@
           <a:bodyPr wrap="square" lIns="0" tIns="0" rIns="0" bIns="0" rtlCol="0" anchor="t"/>
           <a:lstStyle/>
           <a:p>
-            <a:pPr indent="0" marL="0">
+            <a:pPr marL="0" indent="0">
               <a:buNone/>
             </a:pPr>
             <a:r>
@@ -4460,7 +4300,7 @@
           <a:bodyPr wrap="square" lIns="0" tIns="0" rIns="0" bIns="0" rtlCol="0" anchor="ctr"/>
           <a:lstStyle/>
           <a:p>
-            <a:pPr indent="0" marL="0">
+            <a:pPr marL="0" indent="0">
               <a:buNone/>
             </a:pPr>
             <a:r>
@@ -4499,7 +4339,7 @@
           <a:bodyPr wrap="square" lIns="0" tIns="0" rIns="0" bIns="0" rtlCol="0" anchor="ctr"/>
           <a:lstStyle/>
           <a:p>
-            <a:pPr algn="r" indent="0" marL="0">
+            <a:pPr marL="0" indent="0" algn="r">
               <a:buNone/>
             </a:pPr>
             <a:r>
@@ -4538,7 +4378,7 @@
           <a:bodyPr wrap="square" lIns="0" tIns="0" rIns="0" bIns="0" rtlCol="0" anchor="ctr"/>
           <a:lstStyle/>
           <a:p>
-            <a:pPr algn="r" indent="0" marL="0">
+            <a:pPr marL="0" indent="0" algn="r">
               <a:buNone/>
             </a:pPr>
             <a:r>
@@ -4580,6 +4420,13 @@
             <a:prstDash val="solid"/>
           </a:ln>
         </p:spPr>
+        <p:txBody>
+          <a:bodyPr/>
+          <a:lstStyle/>
+          <a:p>
+            <a:endParaRPr lang="zh-TW" altLang="en-US"/>
+          </a:p>
+        </p:txBody>
       </p:sp>
       <p:sp>
         <p:nvSpPr>
@@ -4602,7 +4449,7 @@
           <a:bodyPr wrap="square" lIns="0" tIns="0" rIns="0" bIns="0" rtlCol="0" anchor="ctr"/>
           <a:lstStyle/>
           <a:p>
-            <a:pPr indent="0" marL="0">
+            <a:pPr marL="0" indent="0">
               <a:buNone/>
             </a:pPr>
             <a:r>
@@ -4641,7 +4488,7 @@
           <a:bodyPr wrap="square" lIns="0" tIns="0" rIns="0" bIns="0" rtlCol="0" anchor="ctr"/>
           <a:lstStyle/>
           <a:p>
-            <a:pPr algn="ctr" indent="0" marL="0">
+            <a:pPr marL="0" indent="0" algn="ctr">
               <a:buNone/>
             </a:pPr>
             <a:r>
@@ -4680,7 +4527,7 @@
           <a:bodyPr wrap="square" lIns="0" tIns="0" rIns="0" bIns="0" rtlCol="0" anchor="ctr"/>
           <a:lstStyle/>
           <a:p>
-            <a:pPr algn="ctr" indent="0" marL="0">
+            <a:pPr marL="0" indent="0" algn="ctr">
               <a:buNone/>
             </a:pPr>
             <a:r>
@@ -4719,7 +4566,7 @@
           <a:bodyPr wrap="square" lIns="0" tIns="0" rIns="0" bIns="0" rtlCol="0" anchor="ctr"/>
           <a:lstStyle/>
           <a:p>
-            <a:pPr algn="ctr" indent="0" marL="0">
+            <a:pPr marL="0" indent="0" algn="ctr">
               <a:buNone/>
             </a:pPr>
             <a:r>
@@ -4758,7 +4605,7 @@
           <a:bodyPr wrap="square" lIns="0" tIns="0" rIns="0" bIns="0" rtlCol="0" anchor="ctr"/>
           <a:lstStyle/>
           <a:p>
-            <a:pPr algn="ctr" indent="0" marL="0">
+            <a:pPr marL="0" indent="0" algn="ctr">
               <a:buNone/>
             </a:pPr>
             <a:r>
@@ -4797,7 +4644,7 @@
           <a:bodyPr wrap="square" lIns="0" tIns="0" rIns="0" bIns="0" rtlCol="0" anchor="ctr"/>
           <a:lstStyle/>
           <a:p>
-            <a:pPr algn="ctr" indent="0" marL="0">
+            <a:pPr marL="0" indent="0" algn="ctr">
               <a:buNone/>
             </a:pPr>
             <a:r>
@@ -4836,7 +4683,7 @@
           <a:bodyPr wrap="square" lIns="0" tIns="0" rIns="0" bIns="0" rtlCol="0" anchor="ctr"/>
           <a:lstStyle/>
           <a:p>
-            <a:pPr algn="ctr" indent="0" marL="0">
+            <a:pPr marL="0" indent="0" algn="ctr">
               <a:buNone/>
             </a:pPr>
             <a:r>
@@ -4875,7 +4722,7 @@
           <a:bodyPr wrap="square" lIns="0" tIns="0" rIns="0" bIns="0" rtlCol="0" anchor="ctr"/>
           <a:lstStyle/>
           <a:p>
-            <a:pPr algn="ctr" indent="0" marL="0">
+            <a:pPr marL="0" indent="0" algn="ctr">
               <a:buNone/>
             </a:pPr>
             <a:r>
@@ -4914,7 +4761,7 @@
           <a:bodyPr wrap="square" lIns="0" tIns="0" rIns="0" bIns="0" rtlCol="0" anchor="ctr"/>
           <a:lstStyle/>
           <a:p>
-            <a:pPr algn="ctr" indent="0" marL="0">
+            <a:pPr marL="0" indent="0" algn="ctr">
               <a:buNone/>
             </a:pPr>
             <a:r>
@@ -4954,6 +4801,13 @@
             <a:prstDash val="dash"/>
           </a:ln>
         </p:spPr>
+        <p:txBody>
+          <a:bodyPr/>
+          <a:lstStyle/>
+          <a:p>
+            <a:endParaRPr lang="zh-TW" altLang="en-US"/>
+          </a:p>
+        </p:txBody>
       </p:sp>
       <p:sp>
         <p:nvSpPr>
@@ -4977,6 +4831,13 @@
             <a:prstDash val="dash"/>
           </a:ln>
         </p:spPr>
+        <p:txBody>
+          <a:bodyPr/>
+          <a:lstStyle/>
+          <a:p>
+            <a:endParaRPr lang="zh-TW" altLang="en-US"/>
+          </a:p>
+        </p:txBody>
       </p:sp>
       <p:sp>
         <p:nvSpPr>
@@ -5000,6 +4861,13 @@
             <a:prstDash val="dash"/>
           </a:ln>
         </p:spPr>
+        <p:txBody>
+          <a:bodyPr/>
+          <a:lstStyle/>
+          <a:p>
+            <a:endParaRPr lang="zh-TW" altLang="en-US"/>
+          </a:p>
+        </p:txBody>
       </p:sp>
       <p:sp>
         <p:nvSpPr>
@@ -5023,6 +4891,13 @@
             <a:prstDash val="dash"/>
           </a:ln>
         </p:spPr>
+        <p:txBody>
+          <a:bodyPr/>
+          <a:lstStyle/>
+          <a:p>
+            <a:endParaRPr lang="zh-TW" altLang="en-US"/>
+          </a:p>
+        </p:txBody>
       </p:sp>
       <p:sp>
         <p:nvSpPr>
@@ -5046,6 +4921,13 @@
             <a:prstDash val="dash"/>
           </a:ln>
         </p:spPr>
+        <p:txBody>
+          <a:bodyPr/>
+          <a:lstStyle/>
+          <a:p>
+            <a:endParaRPr lang="zh-TW" altLang="en-US"/>
+          </a:p>
+        </p:txBody>
       </p:sp>
       <p:sp>
         <p:nvSpPr>
@@ -5069,6 +4951,13 @@
             <a:prstDash val="solid"/>
           </a:ln>
         </p:spPr>
+        <p:txBody>
+          <a:bodyPr/>
+          <a:lstStyle/>
+          <a:p>
+            <a:endParaRPr lang="zh-TW" altLang="en-US"/>
+          </a:p>
+        </p:txBody>
       </p:sp>
       <p:sp>
         <p:nvSpPr>
@@ -5092,6 +4981,13 @@
             <a:prstDash val="solid"/>
           </a:ln>
         </p:spPr>
+        <p:txBody>
+          <a:bodyPr/>
+          <a:lstStyle/>
+          <a:p>
+            <a:endParaRPr lang="zh-TW" altLang="en-US"/>
+          </a:p>
+        </p:txBody>
       </p:sp>
       <p:sp>
         <p:nvSpPr>
@@ -5115,6 +5011,13 @@
             <a:prstDash val="solid"/>
           </a:ln>
         </p:spPr>
+        <p:txBody>
+          <a:bodyPr/>
+          <a:lstStyle/>
+          <a:p>
+            <a:endParaRPr lang="zh-TW" altLang="en-US"/>
+          </a:p>
+        </p:txBody>
       </p:sp>
       <p:sp>
         <p:nvSpPr>
@@ -5138,6 +5041,13 @@
             <a:prstDash val="solid"/>
           </a:ln>
         </p:spPr>
+        <p:txBody>
+          <a:bodyPr/>
+          <a:lstStyle/>
+          <a:p>
+            <a:endParaRPr lang="zh-TW" altLang="en-US"/>
+          </a:p>
+        </p:txBody>
       </p:sp>
       <p:sp>
         <p:nvSpPr>
@@ -5161,6 +5071,13 @@
             <a:prstDash val="solid"/>
           </a:ln>
         </p:spPr>
+        <p:txBody>
+          <a:bodyPr/>
+          <a:lstStyle/>
+          <a:p>
+            <a:endParaRPr lang="zh-TW" altLang="en-US"/>
+          </a:p>
+        </p:txBody>
       </p:sp>
       <p:sp>
         <p:nvSpPr>
@@ -5184,6 +5101,13 @@
             <a:prstDash val="solid"/>
           </a:ln>
         </p:spPr>
+        <p:txBody>
+          <a:bodyPr/>
+          <a:lstStyle/>
+          <a:p>
+            <a:endParaRPr lang="zh-TW" altLang="en-US"/>
+          </a:p>
+        </p:txBody>
       </p:sp>
       <p:sp>
         <p:nvSpPr>
@@ -5207,6 +5131,13 @@
             <a:prstDash val="solid"/>
           </a:ln>
         </p:spPr>
+        <p:txBody>
+          <a:bodyPr/>
+          <a:lstStyle/>
+          <a:p>
+            <a:endParaRPr lang="zh-TW" altLang="en-US"/>
+          </a:p>
+        </p:txBody>
       </p:sp>
       <p:sp>
         <p:nvSpPr>
@@ -5230,6 +5161,13 @@
             <a:prstDash val="solid"/>
           </a:ln>
         </p:spPr>
+        <p:txBody>
+          <a:bodyPr/>
+          <a:lstStyle/>
+          <a:p>
+            <a:endParaRPr lang="zh-TW" altLang="en-US"/>
+          </a:p>
+        </p:txBody>
       </p:sp>
       <p:sp>
         <p:nvSpPr>
@@ -5253,6 +5191,13 @@
             <a:prstDash val="solid"/>
           </a:ln>
         </p:spPr>
+        <p:txBody>
+          <a:bodyPr/>
+          <a:lstStyle/>
+          <a:p>
+            <a:endParaRPr lang="zh-TW" altLang="en-US"/>
+          </a:p>
+        </p:txBody>
       </p:sp>
       <p:sp>
         <p:nvSpPr>
@@ -5276,6 +5221,13 @@
             <a:prstDash val="solid"/>
           </a:ln>
         </p:spPr>
+        <p:txBody>
+          <a:bodyPr/>
+          <a:lstStyle/>
+          <a:p>
+            <a:endParaRPr lang="zh-TW" altLang="en-US"/>
+          </a:p>
+        </p:txBody>
       </p:sp>
       <p:sp>
         <p:nvSpPr>
@@ -5299,6 +5251,13 @@
             <a:prstDash val="solid"/>
           </a:ln>
         </p:spPr>
+        <p:txBody>
+          <a:bodyPr/>
+          <a:lstStyle/>
+          <a:p>
+            <a:endParaRPr lang="zh-TW" altLang="en-US"/>
+          </a:p>
+        </p:txBody>
       </p:sp>
       <p:sp>
         <p:nvSpPr>
@@ -5322,6 +5281,13 @@
             <a:prstDash val="solid"/>
           </a:ln>
         </p:spPr>
+        <p:txBody>
+          <a:bodyPr/>
+          <a:lstStyle/>
+          <a:p>
+            <a:endParaRPr lang="zh-TW" altLang="en-US"/>
+          </a:p>
+        </p:txBody>
       </p:sp>
       <p:sp>
         <p:nvSpPr>
@@ -5345,6 +5311,13 @@
             <a:prstDash val="solid"/>
           </a:ln>
         </p:spPr>
+        <p:txBody>
+          <a:bodyPr/>
+          <a:lstStyle/>
+          <a:p>
+            <a:endParaRPr lang="zh-TW" altLang="en-US"/>
+          </a:p>
+        </p:txBody>
       </p:sp>
       <p:sp>
         <p:nvSpPr>
@@ -5367,7 +5340,7 @@
           <a:bodyPr wrap="square" lIns="0" tIns="0" rIns="0" bIns="0" rtlCol="0" anchor="ctr"/>
           <a:lstStyle/>
           <a:p>
-            <a:pPr indent="0" marL="0">
+            <a:pPr marL="0" indent="0">
               <a:buNone/>
             </a:pPr>
             <a:r>
@@ -5406,7 +5379,7 @@
           <a:bodyPr wrap="square" lIns="0" tIns="0" rIns="0" bIns="0" rtlCol="0" anchor="ctr"/>
           <a:lstStyle/>
           <a:p>
-            <a:pPr algn="r" indent="0" marL="0">
+            <a:pPr marL="0" indent="0" algn="r">
               <a:buNone/>
             </a:pPr>
             <a:r>
@@ -5448,6 +5421,13 @@
             <a:prstDash val="solid"/>
           </a:ln>
         </p:spPr>
+        <p:txBody>
+          <a:bodyPr/>
+          <a:lstStyle/>
+          <a:p>
+            <a:endParaRPr lang="zh-TW" altLang="en-US"/>
+          </a:p>
+        </p:txBody>
       </p:sp>
       <p:sp>
         <p:nvSpPr>
@@ -5470,7 +5450,7 @@
           <a:bodyPr wrap="square" lIns="0" tIns="0" rIns="0" bIns="0" rtlCol="0" anchor="ctr"/>
           <a:lstStyle/>
           <a:p>
-            <a:pPr indent="0" marL="0">
+            <a:pPr marL="0" indent="0">
               <a:buNone/>
             </a:pPr>
             <a:r>
@@ -5509,7 +5489,7 @@
           <a:bodyPr wrap="square" lIns="0" tIns="0" rIns="0" bIns="0" rtlCol="0" anchor="ctr"/>
           <a:lstStyle/>
           <a:p>
-            <a:pPr algn="r" indent="0" marL="0">
+            <a:pPr marL="0" indent="0" algn="r">
               <a:buNone/>
             </a:pPr>
             <a:r>
@@ -5551,6 +5531,13 @@
             <a:prstDash val="solid"/>
           </a:ln>
         </p:spPr>
+        <p:txBody>
+          <a:bodyPr/>
+          <a:lstStyle/>
+          <a:p>
+            <a:endParaRPr lang="zh-TW" altLang="en-US"/>
+          </a:p>
+        </p:txBody>
       </p:sp>
       <p:sp>
         <p:nvSpPr>
@@ -5573,7 +5560,7 @@
           <a:bodyPr wrap="square" lIns="0" tIns="0" rIns="0" bIns="0" rtlCol="0" anchor="ctr"/>
           <a:lstStyle/>
           <a:p>
-            <a:pPr indent="0" marL="0">
+            <a:pPr marL="0" indent="0">
               <a:buNone/>
             </a:pPr>
             <a:r>
@@ -5612,7 +5599,7 @@
           <a:bodyPr wrap="square" lIns="0" tIns="0" rIns="0" bIns="0" rtlCol="0" anchor="ctr"/>
           <a:lstStyle/>
           <a:p>
-            <a:pPr algn="r" indent="0" marL="0">
+            <a:pPr marL="0" indent="0" algn="r">
               <a:buNone/>
             </a:pPr>
             <a:r>
@@ -5654,6 +5641,13 @@
             <a:prstDash val="solid"/>
           </a:ln>
         </p:spPr>
+        <p:txBody>
+          <a:bodyPr/>
+          <a:lstStyle/>
+          <a:p>
+            <a:endParaRPr lang="zh-TW" altLang="en-US"/>
+          </a:p>
+        </p:txBody>
       </p:sp>
       <p:sp>
         <p:nvSpPr>
@@ -5676,7 +5670,7 @@
           <a:bodyPr wrap="square" lIns="0" tIns="0" rIns="0" bIns="0" rtlCol="0" anchor="ctr"/>
           <a:lstStyle/>
           <a:p>
-            <a:pPr indent="0" marL="0">
+            <a:pPr marL="0" indent="0">
               <a:buNone/>
             </a:pPr>
             <a:r>
@@ -5715,7 +5709,7 @@
           <a:bodyPr wrap="square" lIns="0" tIns="0" rIns="0" bIns="0" rtlCol="0" anchor="ctr"/>
           <a:lstStyle/>
           <a:p>
-            <a:pPr algn="r" indent="0" marL="0">
+            <a:pPr marL="0" indent="0" algn="r">
               <a:buNone/>
             </a:pPr>
             <a:r>
@@ -5757,6 +5751,13 @@
             <a:prstDash val="solid"/>
           </a:ln>
         </p:spPr>
+        <p:txBody>
+          <a:bodyPr/>
+          <a:lstStyle/>
+          <a:p>
+            <a:endParaRPr lang="zh-TW" altLang="en-US"/>
+          </a:p>
+        </p:txBody>
       </p:sp>
       <p:sp>
         <p:nvSpPr>
@@ -5779,7 +5780,7 @@
           <a:bodyPr wrap="square" lIns="0" tIns="0" rIns="0" bIns="0" rtlCol="0" anchor="ctr"/>
           <a:lstStyle/>
           <a:p>
-            <a:pPr indent="0" marL="0">
+            <a:pPr marL="0" indent="0">
               <a:buNone/>
             </a:pPr>
             <a:r>
@@ -5818,7 +5819,7 @@
           <a:bodyPr wrap="square" lIns="0" tIns="0" rIns="0" bIns="0" rtlCol="0" anchor="ctr"/>
           <a:lstStyle/>
           <a:p>
-            <a:pPr algn="r" indent="0" marL="0">
+            <a:pPr marL="0" indent="0" algn="r">
               <a:buNone/>
             </a:pPr>
             <a:r>
@@ -5860,6 +5861,13 @@
             <a:prstDash val="solid"/>
           </a:ln>
         </p:spPr>
+        <p:txBody>
+          <a:bodyPr/>
+          <a:lstStyle/>
+          <a:p>
+            <a:endParaRPr lang="zh-TW" altLang="en-US"/>
+          </a:p>
+        </p:txBody>
       </p:sp>
       <p:sp>
         <p:nvSpPr>
@@ -5882,7 +5890,7 @@
           <a:bodyPr wrap="square" lIns="0" tIns="0" rIns="0" bIns="0" rtlCol="0" anchor="ctr"/>
           <a:lstStyle/>
           <a:p>
-            <a:pPr indent="0" marL="0">
+            <a:pPr marL="0" indent="0">
               <a:buNone/>
             </a:pPr>
             <a:r>
@@ -5921,7 +5929,7 @@
           <a:bodyPr wrap="square" lIns="0" tIns="0" rIns="0" bIns="0" rtlCol="0" anchor="ctr"/>
           <a:lstStyle/>
           <a:p>
-            <a:pPr algn="r" indent="0" marL="0">
+            <a:pPr marL="0" indent="0" algn="r">
               <a:buNone/>
             </a:pPr>
             <a:r>
@@ -5963,6 +5971,13 @@
             <a:prstDash val="solid"/>
           </a:ln>
         </p:spPr>
+        <p:txBody>
+          <a:bodyPr/>
+          <a:lstStyle/>
+          <a:p>
+            <a:endParaRPr lang="zh-TW" altLang="en-US"/>
+          </a:p>
+        </p:txBody>
       </p:sp>
       <p:sp>
         <p:nvSpPr>
@@ -5985,7 +6000,7 @@
           <a:bodyPr wrap="square" lIns="0" tIns="0" rIns="0" bIns="0" rtlCol="0" anchor="ctr"/>
           <a:lstStyle/>
           <a:p>
-            <a:pPr indent="0" marL="0">
+            <a:pPr marL="0" indent="0">
               <a:buNone/>
             </a:pPr>
             <a:r>
@@ -6024,7 +6039,7 @@
           <a:bodyPr wrap="square" lIns="0" tIns="0" rIns="0" bIns="0" rtlCol="0" anchor="ctr"/>
           <a:lstStyle/>
           <a:p>
-            <a:pPr algn="r" indent="0" marL="0">
+            <a:pPr marL="0" indent="0" algn="r">
               <a:buNone/>
             </a:pPr>
             <a:r>
@@ -6066,6 +6081,13 @@
             <a:prstDash val="solid"/>
           </a:ln>
         </p:spPr>
+        <p:txBody>
+          <a:bodyPr/>
+          <a:lstStyle/>
+          <a:p>
+            <a:endParaRPr lang="zh-TW" altLang="en-US"/>
+          </a:p>
+        </p:txBody>
       </p:sp>
       <p:sp>
         <p:nvSpPr>
@@ -6088,7 +6110,7 @@
           <a:bodyPr wrap="square" lIns="0" tIns="0" rIns="0" bIns="0" rtlCol="0" anchor="ctr"/>
           <a:lstStyle/>
           <a:p>
-            <a:pPr indent="0" marL="0">
+            <a:pPr marL="0" indent="0">
               <a:buNone/>
             </a:pPr>
             <a:r>
@@ -6127,7 +6149,7 @@
           <a:bodyPr wrap="square" lIns="0" tIns="0" rIns="0" bIns="0" rtlCol="0" anchor="ctr"/>
           <a:lstStyle/>
           <a:p>
-            <a:pPr algn="r" indent="0" marL="0">
+            <a:pPr marL="0" indent="0" algn="r">
               <a:buNone/>
             </a:pPr>
             <a:r>
@@ -6169,6 +6191,13 @@
             <a:prstDash val="solid"/>
           </a:ln>
         </p:spPr>
+        <p:txBody>
+          <a:bodyPr/>
+          <a:lstStyle/>
+          <a:p>
+            <a:endParaRPr lang="zh-TW" altLang="en-US"/>
+          </a:p>
+        </p:txBody>
       </p:sp>
       <p:sp>
         <p:nvSpPr>
@@ -6191,7 +6220,7 @@
           <a:bodyPr wrap="square" lIns="0" tIns="0" rIns="0" bIns="0" rtlCol="0" anchor="ctr"/>
           <a:lstStyle/>
           <a:p>
-            <a:pPr indent="0" marL="0">
+            <a:pPr marL="0" indent="0">
               <a:buNone/>
             </a:pPr>
             <a:r>
@@ -6230,7 +6259,7 @@
           <a:bodyPr wrap="square" lIns="0" tIns="0" rIns="0" bIns="0" rtlCol="0" anchor="ctr"/>
           <a:lstStyle/>
           <a:p>
-            <a:pPr algn="r" indent="0" marL="0">
+            <a:pPr marL="0" indent="0" algn="r">
               <a:buNone/>
             </a:pPr>
             <a:r>
@@ -6272,6 +6301,13 @@
             <a:prstDash val="solid"/>
           </a:ln>
         </p:spPr>
+        <p:txBody>
+          <a:bodyPr/>
+          <a:lstStyle/>
+          <a:p>
+            <a:endParaRPr lang="zh-TW" altLang="en-US"/>
+          </a:p>
+        </p:txBody>
       </p:sp>
       <p:sp>
         <p:nvSpPr>
@@ -6294,7 +6330,7 @@
           <a:bodyPr wrap="square" lIns="0" tIns="0" rIns="0" bIns="0" rtlCol="0" anchor="ctr"/>
           <a:lstStyle/>
           <a:p>
-            <a:pPr indent="0" marL="0">
+            <a:pPr marL="0" indent="0">
               <a:buNone/>
             </a:pPr>
             <a:r>
@@ -6333,7 +6369,7 @@
           <a:bodyPr wrap="square" lIns="0" tIns="0" rIns="0" bIns="0" rtlCol="0" anchor="ctr"/>
           <a:lstStyle/>
           <a:p>
-            <a:pPr algn="r" indent="0" marL="0">
+            <a:pPr marL="0" indent="0" algn="r">
               <a:buNone/>
             </a:pPr>
             <a:r>
@@ -6375,6 +6411,13 @@
             <a:prstDash val="solid"/>
           </a:ln>
         </p:spPr>
+        <p:txBody>
+          <a:bodyPr/>
+          <a:lstStyle/>
+          <a:p>
+            <a:endParaRPr lang="zh-TW" altLang="en-US"/>
+          </a:p>
+        </p:txBody>
       </p:sp>
       <p:sp>
         <p:nvSpPr>
@@ -6397,7 +6440,7 @@
           <a:bodyPr wrap="square" lIns="0" tIns="0" rIns="0" bIns="0" rtlCol="0" anchor="ctr"/>
           <a:lstStyle/>
           <a:p>
-            <a:pPr indent="0" marL="0">
+            <a:pPr marL="0" indent="0">
               <a:buNone/>
             </a:pPr>
             <a:r>
@@ -6436,7 +6479,7 @@
           <a:bodyPr wrap="square" lIns="0" tIns="0" rIns="0" bIns="0" rtlCol="0" anchor="ctr"/>
           <a:lstStyle/>
           <a:p>
-            <a:pPr algn="r" indent="0" marL="0">
+            <a:pPr marL="0" indent="0" algn="r">
               <a:buNone/>
             </a:pPr>
             <a:r>
@@ -6478,6 +6521,13 @@
             <a:prstDash val="solid"/>
           </a:ln>
         </p:spPr>
+        <p:txBody>
+          <a:bodyPr/>
+          <a:lstStyle/>
+          <a:p>
+            <a:endParaRPr lang="zh-TW" altLang="en-US"/>
+          </a:p>
+        </p:txBody>
       </p:sp>
       <p:sp>
         <p:nvSpPr>
@@ -6500,7 +6550,7 @@
           <a:bodyPr wrap="square" lIns="0" tIns="0" rIns="0" bIns="0" rtlCol="0" anchor="ctr"/>
           <a:lstStyle/>
           <a:p>
-            <a:pPr indent="0" marL="0">
+            <a:pPr marL="0" indent="0">
               <a:buNone/>
             </a:pPr>
             <a:r>
@@ -6539,7 +6589,7 @@
           <a:bodyPr wrap="square" lIns="0" tIns="0" rIns="0" bIns="0" rtlCol="0" anchor="ctr"/>
           <a:lstStyle/>
           <a:p>
-            <a:pPr algn="r" indent="0" marL="0">
+            <a:pPr marL="0" indent="0" algn="r">
               <a:buNone/>
             </a:pPr>
             <a:r>
@@ -6581,6 +6631,13 @@
             <a:prstDash val="solid"/>
           </a:ln>
         </p:spPr>
+        <p:txBody>
+          <a:bodyPr/>
+          <a:lstStyle/>
+          <a:p>
+            <a:endParaRPr lang="zh-TW" altLang="en-US"/>
+          </a:p>
+        </p:txBody>
       </p:sp>
       <p:sp>
         <p:nvSpPr>
@@ -6606,6 +6663,13 @@
             <a:prstDash val="solid"/>
           </a:ln>
         </p:spPr>
+        <p:txBody>
+          <a:bodyPr/>
+          <a:lstStyle/>
+          <a:p>
+            <a:endParaRPr lang="zh-TW" altLang="en-US"/>
+          </a:p>
+        </p:txBody>
       </p:sp>
       <p:sp>
         <p:nvSpPr>
@@ -6628,7 +6692,7 @@
           <a:bodyPr wrap="square" lIns="0" tIns="0" rIns="0" bIns="0" rtlCol="0" anchor="ctr"/>
           <a:lstStyle/>
           <a:p>
-            <a:pPr indent="0" marL="0">
+            <a:pPr marL="0" indent="0">
               <a:buNone/>
             </a:pPr>
             <a:r>
@@ -6670,6 +6734,13 @@
             <a:prstDash val="solid"/>
           </a:ln>
         </p:spPr>
+        <p:txBody>
+          <a:bodyPr/>
+          <a:lstStyle/>
+          <a:p>
+            <a:endParaRPr lang="zh-TW" altLang="en-US"/>
+          </a:p>
+        </p:txBody>
       </p:sp>
       <p:sp>
         <p:nvSpPr>
@@ -6692,7 +6763,7 @@
           <a:bodyPr wrap="square" lIns="0" tIns="0" rIns="0" bIns="0" rtlCol="0" anchor="ctr"/>
           <a:lstStyle/>
           <a:p>
-            <a:pPr indent="0" marL="0">
+            <a:pPr marL="0" indent="0">
               <a:buNone/>
             </a:pPr>
             <a:r>
@@ -6734,6 +6805,13 @@
             <a:prstDash val="solid"/>
           </a:ln>
         </p:spPr>
+        <p:txBody>
+          <a:bodyPr/>
+          <a:lstStyle/>
+          <a:p>
+            <a:endParaRPr lang="zh-TW" altLang="en-US"/>
+          </a:p>
+        </p:txBody>
       </p:sp>
       <p:sp>
         <p:nvSpPr>
@@ -6756,7 +6834,7 @@
           <a:bodyPr wrap="square" lIns="0" tIns="0" rIns="0" bIns="0" rtlCol="0" anchor="ctr"/>
           <a:lstStyle/>
           <a:p>
-            <a:pPr indent="0" marL="0">
+            <a:pPr marL="0" indent="0">
               <a:buNone/>
             </a:pPr>
             <a:r>
@@ -6795,7 +6873,7 @@
           <a:bodyPr wrap="square" lIns="0" tIns="0" rIns="0" bIns="0" rtlCol="0" anchor="ctr"/>
           <a:lstStyle/>
           <a:p>
-            <a:pPr indent="0" marL="0">
+            <a:pPr marL="0" indent="0">
               <a:buNone/>
             </a:pPr>
             <a:r>
@@ -6834,7 +6912,7 @@
           <a:bodyPr wrap="square" lIns="0" tIns="0" rIns="0" bIns="0" rtlCol="0" anchor="ctr"/>
           <a:lstStyle/>
           <a:p>
-            <a:pPr indent="0" marL="0">
+            <a:pPr marL="0" indent="0">
               <a:buNone/>
             </a:pPr>
             <a:r>
@@ -6868,6 +6946,7 @@
         <a:solidFill>
           <a:srgbClr val="FFFFFF"/>
         </a:solidFill>
+        <a:effectLst/>
       </p:bgPr>
     </p:bg>
     <p:spTree>
@@ -6908,6 +6987,13 @@
             <a:prstDash val="solid"/>
           </a:ln>
         </p:spPr>
+        <p:txBody>
+          <a:bodyPr/>
+          <a:lstStyle/>
+          <a:p>
+            <a:endParaRPr lang="zh-TW" altLang="en-US"/>
+          </a:p>
+        </p:txBody>
       </p:sp>
       <p:sp>
         <p:nvSpPr>
@@ -6930,7 +7016,7 @@
           <a:bodyPr wrap="square" lIns="0" tIns="0" rIns="0" bIns="0" rtlCol="0" anchor="t"/>
           <a:lstStyle/>
           <a:p>
-            <a:pPr indent="0" marL="0">
+            <a:pPr marL="0" indent="0">
               <a:buNone/>
             </a:pPr>
             <a:r>
@@ -6969,7 +7055,7 @@
           <a:bodyPr wrap="square" lIns="0" tIns="0" rIns="0" bIns="0" rtlCol="0" anchor="t"/>
           <a:lstStyle/>
           <a:p>
-            <a:pPr indent="0" marL="0">
+            <a:pPr marL="0" indent="0">
               <a:buNone/>
             </a:pPr>
             <a:r>
@@ -7008,7 +7094,7 @@
           <a:bodyPr wrap="square" lIns="0" tIns="0" rIns="0" bIns="0" rtlCol="0" anchor="ctr"/>
           <a:lstStyle/>
           <a:p>
-            <a:pPr indent="0" marL="0">
+            <a:pPr marL="0" indent="0">
               <a:buNone/>
             </a:pPr>
             <a:r>
@@ -7047,7 +7133,7 @@
           <a:bodyPr wrap="square" lIns="0" tIns="0" rIns="0" bIns="0" rtlCol="0" anchor="ctr"/>
           <a:lstStyle/>
           <a:p>
-            <a:pPr algn="r" indent="0" marL="0">
+            <a:pPr marL="0" indent="0" algn="r">
               <a:buNone/>
             </a:pPr>
             <a:r>
@@ -7086,7 +7172,7 @@
           <a:bodyPr wrap="square" lIns="0" tIns="0" rIns="0" bIns="0" rtlCol="0" anchor="ctr"/>
           <a:lstStyle/>
           <a:p>
-            <a:pPr algn="r" indent="0" marL="0">
+            <a:pPr marL="0" indent="0" algn="r">
               <a:buNone/>
             </a:pPr>
             <a:r>
@@ -7125,7 +7211,7 @@
           <a:bodyPr wrap="square" lIns="0" tIns="0" rIns="0" bIns="0" rtlCol="0" anchor="ctr"/>
           <a:lstStyle/>
           <a:p>
-            <a:pPr indent="0" marL="0">
+            <a:pPr marL="0" indent="0">
               <a:buNone/>
             </a:pPr>
             <a:r>
@@ -7152,24 +7238,48 @@
           <p:nvPr>
             <p:extLst>
               <p:ext uri="{D42A27DB-BD31-4B8C-83A1-F6EECF244321}">
-                <p14:modId xmlns:p14="http://schemas.microsoft.com/office/powerpoint/2010/main" val="1579011935"/>
+                <p14:modId xmlns:p14="http://schemas.microsoft.com/office/powerpoint/2010/main" val="3441004237"/>
               </p:ext>
             </p:extLst>
           </p:nvPr>
         </p:nvGraphicFramePr>
         <p:xfrm>
           <a:off x="457200" y="1828800"/>
-          <a:ext cx="6858000" cy="914400"/>
+          <a:ext cx="6858000" cy="2301240"/>
         </p:xfrm>
         <a:graphic>
           <a:graphicData uri="http://schemas.openxmlformats.org/drawingml/2006/table">
             <a:tbl>
               <a:tblPr/>
               <a:tblGrid>
-                <a:gridCol w="1280160"/>
-                <a:gridCol w="914400"/>
-                <a:gridCol w="3383280"/>
-                <a:gridCol w="1280160"/>
+                <a:gridCol w="1381648">
+                  <a:extLst>
+                    <a:ext uri="{9D8B030D-6E8A-4147-A177-3AD203B41FA5}">
+                      <a16:colId xmlns:a16="http://schemas.microsoft.com/office/drawing/2014/main" val="20000"/>
+                    </a:ext>
+                  </a:extLst>
+                </a:gridCol>
+                <a:gridCol w="812912">
+                  <a:extLst>
+                    <a:ext uri="{9D8B030D-6E8A-4147-A177-3AD203B41FA5}">
+                      <a16:colId xmlns:a16="http://schemas.microsoft.com/office/drawing/2014/main" val="20001"/>
+                    </a:ext>
+                  </a:extLst>
+                </a:gridCol>
+                <a:gridCol w="3383280">
+                  <a:extLst>
+                    <a:ext uri="{9D8B030D-6E8A-4147-A177-3AD203B41FA5}">
+                      <a16:colId xmlns:a16="http://schemas.microsoft.com/office/drawing/2014/main" val="20002"/>
+                    </a:ext>
+                  </a:extLst>
+                </a:gridCol>
+                <a:gridCol w="1280160">
+                  <a:extLst>
+                    <a:ext uri="{9D8B030D-6E8A-4147-A177-3AD203B41FA5}">
+                      <a16:colId xmlns:a16="http://schemas.microsoft.com/office/drawing/2014/main" val="20003"/>
+                    </a:ext>
+                  </a:extLst>
+                </a:gridCol>
               </a:tblGrid>
               <a:tr h="0">
                 <a:tc>
@@ -7177,7 +7287,7 @@
                     <a:bodyPr/>
                     <a:lstStyle/>
                     <a:p>
-                      <a:pPr indent="0" marL="0">
+                      <a:pPr marL="0" indent="0">
                         <a:buNone/>
                       </a:pPr>
                       <a:r>
@@ -7198,7 +7308,7 @@
                       </a:endParaRPr>
                     </a:p>
                   </a:txBody>
-                  <a:tcPr marL="91440" marR="91440" marT="45720" marB="45720">
+                  <a:tcPr>
                     <a:lnL w="6350" cap="flat" cmpd="sng" algn="ctr">
                       <a:solidFill>
                         <a:srgbClr val="D5C8EE"/>
@@ -7245,7 +7355,7 @@
                     <a:bodyPr/>
                     <a:lstStyle/>
                     <a:p>
-                      <a:pPr algn="ctr" indent="0" marL="0">
+                      <a:pPr marL="0" indent="0" algn="ctr">
                         <a:buNone/>
                       </a:pPr>
                       <a:r>
@@ -7266,7 +7376,7 @@
                       </a:endParaRPr>
                     </a:p>
                   </a:txBody>
-                  <a:tcPr marL="91440" marR="91440" marT="45720" marB="45720">
+                  <a:tcPr>
                     <a:lnL w="6350" cap="flat" cmpd="sng" algn="ctr">
                       <a:solidFill>
                         <a:srgbClr val="D5C8EE"/>
@@ -7313,7 +7423,7 @@
                     <a:bodyPr/>
                     <a:lstStyle/>
                     <a:p>
-                      <a:pPr indent="0" marL="0">
+                      <a:pPr marL="0" indent="0">
                         <a:buNone/>
                       </a:pPr>
                       <a:r>
@@ -7334,7 +7444,7 @@
                       </a:endParaRPr>
                     </a:p>
                   </a:txBody>
-                  <a:tcPr marL="91440" marR="91440" marT="45720" marB="45720">
+                  <a:tcPr>
                     <a:lnL w="6350" cap="flat" cmpd="sng" algn="ctr">
                       <a:solidFill>
                         <a:srgbClr val="D5C8EE"/>
@@ -7381,7 +7491,7 @@
                     <a:bodyPr/>
                     <a:lstStyle/>
                     <a:p>
-                      <a:pPr algn="ctr" indent="0" marL="0">
+                      <a:pPr marL="0" indent="0" algn="ctr">
                         <a:buNone/>
                       </a:pPr>
                       <a:r>
@@ -7402,7 +7512,7 @@
                       </a:endParaRPr>
                     </a:p>
                   </a:txBody>
-                  <a:tcPr marL="91440" marR="91440" marT="45720" marB="45720">
+                  <a:tcPr>
                     <a:lnL w="6350" cap="flat" cmpd="sng" algn="ctr">
                       <a:solidFill>
                         <a:srgbClr val="D5C8EE"/>
@@ -7444,6 +7554,11 @@
                     </a:solidFill>
                   </a:tcPr>
                 </a:tc>
+                <a:extLst>
+                  <a:ext uri="{0D108BD9-81ED-4DB2-BD59-A6C34878D82A}">
+                    <a16:rowId xmlns:a16="http://schemas.microsoft.com/office/drawing/2014/main" val="10000"/>
+                  </a:ext>
+                </a:extLst>
               </a:tr>
               <a:tr h="0">
                 <a:tc>
@@ -7451,7 +7566,7 @@
                     <a:bodyPr/>
                     <a:lstStyle/>
                     <a:p>
-                      <a:pPr indent="0" marL="0">
+                      <a:pPr marL="0" indent="0">
                         <a:buNone/>
                       </a:pPr>
                       <a:r>
@@ -7472,7 +7587,7 @@
                       </a:endParaRPr>
                     </a:p>
                   </a:txBody>
-                  <a:tcPr marL="91440" marR="91440" marT="45720" marB="45720">
+                  <a:tcPr>
                     <a:lnL w="6350" cap="flat" cmpd="sng" algn="ctr">
                       <a:solidFill>
                         <a:srgbClr val="D5C8EE"/>
@@ -7519,7 +7634,7 @@
                     <a:bodyPr/>
                     <a:lstStyle/>
                     <a:p>
-                      <a:pPr algn="ctr" indent="0" marL="0">
+                      <a:pPr marL="0" indent="0" algn="ctr">
                         <a:buNone/>
                       </a:pPr>
                       <a:r>
@@ -7540,7 +7655,7 @@
                       </a:endParaRPr>
                     </a:p>
                   </a:txBody>
-                  <a:tcPr marL="91440" marR="91440" marT="45720" marB="45720">
+                  <a:tcPr>
                     <a:lnL w="6350" cap="flat" cmpd="sng" algn="ctr">
                       <a:solidFill>
                         <a:srgbClr val="D5C8EE"/>
@@ -7587,7 +7702,7 @@
                     <a:bodyPr/>
                     <a:lstStyle/>
                     <a:p>
-                      <a:pPr indent="0" marL="0">
+                      <a:pPr marL="0" indent="0">
                         <a:buNone/>
                       </a:pPr>
                       <a:r>
@@ -7608,7 +7723,7 @@
                       </a:endParaRPr>
                     </a:p>
                   </a:txBody>
-                  <a:tcPr marL="91440" marR="91440" marT="45720" marB="45720">
+                  <a:tcPr>
                     <a:lnL w="6350" cap="flat" cmpd="sng" algn="ctr">
                       <a:solidFill>
                         <a:srgbClr val="D5C8EE"/>
@@ -7655,7 +7770,7 @@
                     <a:bodyPr/>
                     <a:lstStyle/>
                     <a:p>
-                      <a:pPr algn="ctr" indent="0" marL="0">
+                      <a:pPr marL="0" indent="0" algn="ctr">
                         <a:buNone/>
                       </a:pPr>
                       <a:r>
@@ -7676,7 +7791,7 @@
                       </a:endParaRPr>
                     </a:p>
                   </a:txBody>
-                  <a:tcPr marL="91440" marR="91440" marT="45720" marB="45720">
+                  <a:tcPr>
                     <a:lnL w="6350" cap="flat" cmpd="sng" algn="ctr">
                       <a:solidFill>
                         <a:srgbClr val="D5C8EE"/>
@@ -7718,6 +7833,11 @@
                     </a:solidFill>
                   </a:tcPr>
                 </a:tc>
+                <a:extLst>
+                  <a:ext uri="{0D108BD9-81ED-4DB2-BD59-A6C34878D82A}">
+                    <a16:rowId xmlns:a16="http://schemas.microsoft.com/office/drawing/2014/main" val="10001"/>
+                  </a:ext>
+                </a:extLst>
               </a:tr>
               <a:tr h="0">
                 <a:tc>
@@ -7725,7 +7845,7 @@
                     <a:bodyPr/>
                     <a:lstStyle/>
                     <a:p>
-                      <a:pPr indent="0" marL="0">
+                      <a:pPr marL="0" indent="0">
                         <a:buNone/>
                       </a:pPr>
                       <a:r>
@@ -7746,7 +7866,7 @@
                       </a:endParaRPr>
                     </a:p>
                   </a:txBody>
-                  <a:tcPr marL="91440" marR="91440" marT="45720" marB="45720">
+                  <a:tcPr>
                     <a:lnL w="6350" cap="flat" cmpd="sng" algn="ctr">
                       <a:solidFill>
                         <a:srgbClr val="D5C8EE"/>
@@ -7793,7 +7913,7 @@
                     <a:bodyPr/>
                     <a:lstStyle/>
                     <a:p>
-                      <a:pPr algn="ctr" indent="0" marL="0">
+                      <a:pPr marL="0" indent="0" algn="ctr">
                         <a:buNone/>
                       </a:pPr>
                       <a:r>
@@ -7814,7 +7934,7 @@
                       </a:endParaRPr>
                     </a:p>
                   </a:txBody>
-                  <a:tcPr marL="91440" marR="91440" marT="45720" marB="45720">
+                  <a:tcPr>
                     <a:lnL w="6350" cap="flat" cmpd="sng" algn="ctr">
                       <a:solidFill>
                         <a:srgbClr val="D5C8EE"/>
@@ -7861,7 +7981,7 @@
                     <a:bodyPr/>
                     <a:lstStyle/>
                     <a:p>
-                      <a:pPr indent="0" marL="0">
+                      <a:pPr marL="0" indent="0">
                         <a:buNone/>
                       </a:pPr>
                       <a:r>
@@ -7882,7 +8002,7 @@
                       </a:endParaRPr>
                     </a:p>
                   </a:txBody>
-                  <a:tcPr marL="91440" marR="91440" marT="45720" marB="45720">
+                  <a:tcPr>
                     <a:lnL w="6350" cap="flat" cmpd="sng" algn="ctr">
                       <a:solidFill>
                         <a:srgbClr val="D5C8EE"/>
@@ -7929,7 +8049,7 @@
                     <a:bodyPr/>
                     <a:lstStyle/>
                     <a:p>
-                      <a:pPr algn="ctr" indent="0" marL="0">
+                      <a:pPr marL="0" indent="0" algn="ctr">
                         <a:buNone/>
                       </a:pPr>
                       <a:r>
@@ -7950,7 +8070,7 @@
                       </a:endParaRPr>
                     </a:p>
                   </a:txBody>
-                  <a:tcPr marL="91440" marR="91440" marT="45720" marB="45720">
+                  <a:tcPr>
                     <a:lnL w="6350" cap="flat" cmpd="sng" algn="ctr">
                       <a:solidFill>
                         <a:srgbClr val="D5C8EE"/>
@@ -7992,6 +8112,11 @@
                     </a:solidFill>
                   </a:tcPr>
                 </a:tc>
+                <a:extLst>
+                  <a:ext uri="{0D108BD9-81ED-4DB2-BD59-A6C34878D82A}">
+                    <a16:rowId xmlns:a16="http://schemas.microsoft.com/office/drawing/2014/main" val="10002"/>
+                  </a:ext>
+                </a:extLst>
               </a:tr>
               <a:tr h="0">
                 <a:tc>
@@ -7999,7 +8124,7 @@
                     <a:bodyPr/>
                     <a:lstStyle/>
                     <a:p>
-                      <a:pPr indent="0" marL="0">
+                      <a:pPr marL="0" indent="0">
                         <a:buNone/>
                       </a:pPr>
                       <a:r>
@@ -8020,7 +8145,7 @@
                       </a:endParaRPr>
                     </a:p>
                   </a:txBody>
-                  <a:tcPr marL="91440" marR="91440" marT="45720" marB="45720">
+                  <a:tcPr>
                     <a:lnL w="6350" cap="flat" cmpd="sng" algn="ctr">
                       <a:solidFill>
                         <a:srgbClr val="D5C8EE"/>
@@ -8067,7 +8192,7 @@
                     <a:bodyPr/>
                     <a:lstStyle/>
                     <a:p>
-                      <a:pPr algn="ctr" indent="0" marL="0">
+                      <a:pPr marL="0" indent="0" algn="ctr">
                         <a:buNone/>
                       </a:pPr>
                       <a:r>
@@ -8088,7 +8213,7 @@
                       </a:endParaRPr>
                     </a:p>
                   </a:txBody>
-                  <a:tcPr marL="91440" marR="91440" marT="45720" marB="45720">
+                  <a:tcPr>
                     <a:lnL w="6350" cap="flat" cmpd="sng" algn="ctr">
                       <a:solidFill>
                         <a:srgbClr val="D5C8EE"/>
@@ -8135,7 +8260,7 @@
                     <a:bodyPr/>
                     <a:lstStyle/>
                     <a:p>
-                      <a:pPr indent="0" marL="0">
+                      <a:pPr marL="0" indent="0">
                         <a:buNone/>
                       </a:pPr>
                       <a:r>
@@ -8156,7 +8281,7 @@
                       </a:endParaRPr>
                     </a:p>
                   </a:txBody>
-                  <a:tcPr marL="91440" marR="91440" marT="45720" marB="45720">
+                  <a:tcPr>
                     <a:lnL w="6350" cap="flat" cmpd="sng" algn="ctr">
                       <a:solidFill>
                         <a:srgbClr val="D5C8EE"/>
@@ -8203,7 +8328,7 @@
                     <a:bodyPr/>
                     <a:lstStyle/>
                     <a:p>
-                      <a:pPr algn="ctr" indent="0" marL="0">
+                      <a:pPr marL="0" indent="0" algn="ctr">
                         <a:buNone/>
                       </a:pPr>
                       <a:r>
@@ -8224,7 +8349,7 @@
                       </a:endParaRPr>
                     </a:p>
                   </a:txBody>
-                  <a:tcPr marL="91440" marR="91440" marT="45720" marB="45720">
+                  <a:tcPr>
                     <a:lnL w="6350" cap="flat" cmpd="sng" algn="ctr">
                       <a:solidFill>
                         <a:srgbClr val="D5C8EE"/>
@@ -8266,6 +8391,11 @@
                     </a:solidFill>
                   </a:tcPr>
                 </a:tc>
+                <a:extLst>
+                  <a:ext uri="{0D108BD9-81ED-4DB2-BD59-A6C34878D82A}">
+                    <a16:rowId xmlns:a16="http://schemas.microsoft.com/office/drawing/2014/main" val="10003"/>
+                  </a:ext>
+                </a:extLst>
               </a:tr>
               <a:tr h="0">
                 <a:tc>
@@ -8273,7 +8403,7 @@
                     <a:bodyPr/>
                     <a:lstStyle/>
                     <a:p>
-                      <a:pPr indent="0" marL="0">
+                      <a:pPr marL="0" indent="0">
                         <a:buNone/>
                       </a:pPr>
                       <a:r>
@@ -8294,7 +8424,7 @@
                       </a:endParaRPr>
                     </a:p>
                   </a:txBody>
-                  <a:tcPr marL="91440" marR="91440" marT="45720" marB="45720">
+                  <a:tcPr>
                     <a:lnL w="6350" cap="flat" cmpd="sng" algn="ctr">
                       <a:solidFill>
                         <a:srgbClr val="D5C8EE"/>
@@ -8341,7 +8471,7 @@
                     <a:bodyPr/>
                     <a:lstStyle/>
                     <a:p>
-                      <a:pPr algn="ctr" indent="0" marL="0">
+                      <a:pPr marL="0" indent="0" algn="ctr">
                         <a:buNone/>
                       </a:pPr>
                       <a:r>
@@ -8362,7 +8492,7 @@
                       </a:endParaRPr>
                     </a:p>
                   </a:txBody>
-                  <a:tcPr marL="91440" marR="91440" marT="45720" marB="45720">
+                  <a:tcPr>
                     <a:lnL w="6350" cap="flat" cmpd="sng" algn="ctr">
                       <a:solidFill>
                         <a:srgbClr val="D5C8EE"/>
@@ -8409,7 +8539,7 @@
                     <a:bodyPr/>
                     <a:lstStyle/>
                     <a:p>
-                      <a:pPr indent="0" marL="0">
+                      <a:pPr marL="0" indent="0">
                         <a:buNone/>
                       </a:pPr>
                       <a:r>
@@ -8430,7 +8560,7 @@
                       </a:endParaRPr>
                     </a:p>
                   </a:txBody>
-                  <a:tcPr marL="91440" marR="91440" marT="45720" marB="45720">
+                  <a:tcPr>
                     <a:lnL w="6350" cap="flat" cmpd="sng" algn="ctr">
                       <a:solidFill>
                         <a:srgbClr val="D5C8EE"/>
@@ -8477,7 +8607,7 @@
                     <a:bodyPr/>
                     <a:lstStyle/>
                     <a:p>
-                      <a:pPr algn="ctr" indent="0" marL="0">
+                      <a:pPr marL="0" indent="0" algn="ctr">
                         <a:buNone/>
                       </a:pPr>
                       <a:r>
@@ -8498,7 +8628,7 @@
                       </a:endParaRPr>
                     </a:p>
                   </a:txBody>
-                  <a:tcPr marL="91440" marR="91440" marT="45720" marB="45720">
+                  <a:tcPr>
                     <a:lnL w="6350" cap="flat" cmpd="sng" algn="ctr">
                       <a:solidFill>
                         <a:srgbClr val="D5C8EE"/>
@@ -8540,6 +8670,11 @@
                     </a:solidFill>
                   </a:tcPr>
                 </a:tc>
+                <a:extLst>
+                  <a:ext uri="{0D108BD9-81ED-4DB2-BD59-A6C34878D82A}">
+                    <a16:rowId xmlns:a16="http://schemas.microsoft.com/office/drawing/2014/main" val="10004"/>
+                  </a:ext>
+                </a:extLst>
               </a:tr>
               <a:tr h="0">
                 <a:tc>
@@ -8547,7 +8682,7 @@
                     <a:bodyPr/>
                     <a:lstStyle/>
                     <a:p>
-                      <a:pPr indent="0" marL="0">
+                      <a:pPr marL="0" indent="0">
                         <a:buNone/>
                       </a:pPr>
                       <a:r>
@@ -8568,7 +8703,7 @@
                       </a:endParaRPr>
                     </a:p>
                   </a:txBody>
-                  <a:tcPr marL="91440" marR="91440" marT="45720" marB="45720">
+                  <a:tcPr>
                     <a:lnL w="6350" cap="flat" cmpd="sng" algn="ctr">
                       <a:solidFill>
                         <a:srgbClr val="D5C8EE"/>
@@ -8615,7 +8750,7 @@
                     <a:bodyPr/>
                     <a:lstStyle/>
                     <a:p>
-                      <a:pPr algn="ctr" indent="0" marL="0">
+                      <a:pPr marL="0" indent="0" algn="ctr">
                         <a:buNone/>
                       </a:pPr>
                       <a:r>
@@ -8636,7 +8771,7 @@
                       </a:endParaRPr>
                     </a:p>
                   </a:txBody>
-                  <a:tcPr marL="91440" marR="91440" marT="45720" marB="45720">
+                  <a:tcPr>
                     <a:lnL w="6350" cap="flat" cmpd="sng" algn="ctr">
                       <a:solidFill>
                         <a:srgbClr val="D5C8EE"/>
@@ -8683,7 +8818,7 @@
                     <a:bodyPr/>
                     <a:lstStyle/>
                     <a:p>
-                      <a:pPr indent="0" marL="0">
+                      <a:pPr marL="0" indent="0">
                         <a:buNone/>
                       </a:pPr>
                       <a:r>
@@ -8704,7 +8839,7 @@
                       </a:endParaRPr>
                     </a:p>
                   </a:txBody>
-                  <a:tcPr marL="91440" marR="91440" marT="45720" marB="45720">
+                  <a:tcPr>
                     <a:lnL w="6350" cap="flat" cmpd="sng" algn="ctr">
                       <a:solidFill>
                         <a:srgbClr val="D5C8EE"/>
@@ -8751,7 +8886,7 @@
                     <a:bodyPr/>
                     <a:lstStyle/>
                     <a:p>
-                      <a:pPr algn="ctr" indent="0" marL="0">
+                      <a:pPr marL="0" indent="0" algn="ctr">
                         <a:buNone/>
                       </a:pPr>
                       <a:r>
@@ -8772,7 +8907,7 @@
                       </a:endParaRPr>
                     </a:p>
                   </a:txBody>
-                  <a:tcPr marL="91440" marR="91440" marT="45720" marB="45720">
+                  <a:tcPr>
                     <a:lnL w="6350" cap="flat" cmpd="sng" algn="ctr">
                       <a:solidFill>
                         <a:srgbClr val="D5C8EE"/>
@@ -8814,6 +8949,11 @@
                     </a:solidFill>
                   </a:tcPr>
                 </a:tc>
+                <a:extLst>
+                  <a:ext uri="{0D108BD9-81ED-4DB2-BD59-A6C34878D82A}">
+                    <a16:rowId xmlns:a16="http://schemas.microsoft.com/office/drawing/2014/main" val="10005"/>
+                  </a:ext>
+                </a:extLst>
               </a:tr>
               <a:tr h="0">
                 <a:tc>
@@ -8821,7 +8961,7 @@
                     <a:bodyPr/>
                     <a:lstStyle/>
                     <a:p>
-                      <a:pPr indent="0" marL="0">
+                      <a:pPr marL="0" indent="0">
                         <a:buNone/>
                       </a:pPr>
                       <a:r>
@@ -8842,7 +8982,7 @@
                       </a:endParaRPr>
                     </a:p>
                   </a:txBody>
-                  <a:tcPr marL="91440" marR="91440" marT="45720" marB="45720">
+                  <a:tcPr>
                     <a:lnL w="6350" cap="flat" cmpd="sng" algn="ctr">
                       <a:solidFill>
                         <a:srgbClr val="D5C8EE"/>
@@ -8889,7 +9029,7 @@
                     <a:bodyPr/>
                     <a:lstStyle/>
                     <a:p>
-                      <a:pPr algn="ctr" indent="0" marL="0">
+                      <a:pPr marL="0" indent="0" algn="ctr">
                         <a:buNone/>
                       </a:pPr>
                       <a:r>
@@ -8910,7 +9050,7 @@
                       </a:endParaRPr>
                     </a:p>
                   </a:txBody>
-                  <a:tcPr marL="91440" marR="91440" marT="45720" marB="45720">
+                  <a:tcPr>
                     <a:lnL w="6350" cap="flat" cmpd="sng" algn="ctr">
                       <a:solidFill>
                         <a:srgbClr val="D5C8EE"/>
@@ -8957,7 +9097,7 @@
                     <a:bodyPr/>
                     <a:lstStyle/>
                     <a:p>
-                      <a:pPr indent="0" marL="0">
+                      <a:pPr marL="0" indent="0">
                         <a:buNone/>
                       </a:pPr>
                       <a:r>
@@ -8978,7 +9118,7 @@
                       </a:endParaRPr>
                     </a:p>
                   </a:txBody>
-                  <a:tcPr marL="91440" marR="91440" marT="45720" marB="45720">
+                  <a:tcPr>
                     <a:lnL w="6350" cap="flat" cmpd="sng" algn="ctr">
                       <a:solidFill>
                         <a:srgbClr val="D5C8EE"/>
@@ -9025,7 +9165,7 @@
                     <a:bodyPr/>
                     <a:lstStyle/>
                     <a:p>
-                      <a:pPr algn="ctr" indent="0" marL="0">
+                      <a:pPr marL="0" indent="0" algn="ctr">
                         <a:buNone/>
                       </a:pPr>
                       <a:r>
@@ -9046,7 +9186,7 @@
                       </a:endParaRPr>
                     </a:p>
                   </a:txBody>
-                  <a:tcPr marL="91440" marR="91440" marT="45720" marB="45720">
+                  <a:tcPr>
                     <a:lnL w="6350" cap="flat" cmpd="sng" algn="ctr">
                       <a:solidFill>
                         <a:srgbClr val="D5C8EE"/>
@@ -9088,6 +9228,11 @@
                     </a:solidFill>
                   </a:tcPr>
                 </a:tc>
+                <a:extLst>
+                  <a:ext uri="{0D108BD9-81ED-4DB2-BD59-A6C34878D82A}">
+                    <a16:rowId xmlns:a16="http://schemas.microsoft.com/office/drawing/2014/main" val="10006"/>
+                  </a:ext>
+                </a:extLst>
               </a:tr>
             </a:tbl>
           </a:graphicData>
@@ -9117,6 +9262,13 @@
             <a:prstDash val="solid"/>
           </a:ln>
         </p:spPr>
+        <p:txBody>
+          <a:bodyPr/>
+          <a:lstStyle/>
+          <a:p>
+            <a:endParaRPr lang="zh-TW" altLang="en-US"/>
+          </a:p>
+        </p:txBody>
       </p:sp>
       <p:sp>
         <p:nvSpPr>
@@ -9139,7 +9291,7 @@
           <a:bodyPr wrap="square" lIns="0" tIns="0" rIns="0" bIns="0" rtlCol="0" anchor="ctr"/>
           <a:lstStyle/>
           <a:p>
-            <a:pPr indent="0" marL="0">
+            <a:pPr marL="0" indent="0">
               <a:buNone/>
             </a:pPr>
             <a:r>
@@ -9178,7 +9330,7 @@
           <a:bodyPr wrap="square" lIns="0" tIns="0" rIns="0" bIns="0" rtlCol="0" anchor="ctr"/>
           <a:lstStyle/>
           <a:p>
-            <a:pPr indent="0" marL="0">
+            <a:pPr marL="0" indent="0">
               <a:buNone/>
             </a:pPr>
             <a:r>
@@ -9198,7 +9350,7 @@
       </p:sp>
       <p:sp>
         <p:nvSpPr>
-          <p:cNvPr id="13" name="Shape 10"/>
+          <p:cNvPr id="9" name="Shape 10"/>
           <p:cNvSpPr/>
           <p:nvPr/>
         </p:nvSpPr>
@@ -9218,6 +9370,13 @@
             <a:prstDash val="solid"/>
           </a:ln>
         </p:spPr>
+        <p:txBody>
+          <a:bodyPr/>
+          <a:lstStyle/>
+          <a:p>
+            <a:endParaRPr lang="zh-TW" altLang="en-US"/>
+          </a:p>
+        </p:txBody>
       </p:sp>
       <p:sp>
         <p:nvSpPr>
@@ -9240,7 +9399,7 @@
           <a:bodyPr wrap="square" lIns="0" tIns="0" rIns="0" bIns="0" rtlCol="0" anchor="ctr"/>
           <a:lstStyle/>
           <a:p>
-            <a:pPr indent="0" marL="0">
+            <a:pPr marL="0" indent="0">
               <a:buNone/>
             </a:pPr>
             <a:r>
@@ -9279,7 +9438,7 @@
           <a:bodyPr wrap="square" lIns="0" tIns="0" rIns="0" bIns="0" rtlCol="0" anchor="ctr"/>
           <a:lstStyle/>
           <a:p>
-            <a:pPr indent="0" marL="0">
+            <a:pPr marL="0" indent="0">
               <a:buNone/>
             </a:pPr>
             <a:r>
@@ -9321,6 +9480,13 @@
             <a:prstDash val="solid"/>
           </a:ln>
         </p:spPr>
+        <p:txBody>
+          <a:bodyPr/>
+          <a:lstStyle/>
+          <a:p>
+            <a:endParaRPr lang="zh-TW" altLang="en-US"/>
+          </a:p>
+        </p:txBody>
       </p:sp>
       <p:sp>
         <p:nvSpPr>
@@ -9343,7 +9509,7 @@
           <a:bodyPr wrap="square" lIns="0" tIns="0" rIns="0" bIns="0" rtlCol="0" anchor="ctr"/>
           <a:lstStyle/>
           <a:p>
-            <a:pPr indent="0" marL="0">
+            <a:pPr marL="0" indent="0">
               <a:buNone/>
             </a:pPr>
             <a:r>
@@ -9382,7 +9548,7 @@
           <a:bodyPr wrap="square" lIns="0" tIns="0" rIns="0" bIns="0" rtlCol="0" anchor="ctr"/>
           <a:lstStyle/>
           <a:p>
-            <a:pPr indent="0" marL="0">
+            <a:pPr marL="0" indent="0">
               <a:buNone/>
             </a:pPr>
             <a:r>
@@ -9516,6 +9682,13 @@
             <a:prstDash val="solid"/>
           </a:ln>
         </p:spPr>
+        <p:txBody>
+          <a:bodyPr/>
+          <a:lstStyle/>
+          <a:p>
+            <a:endParaRPr lang="zh-TW" altLang="en-US"/>
+          </a:p>
+        </p:txBody>
       </p:sp>
       <p:sp>
         <p:nvSpPr>
@@ -9538,7 +9711,7 @@
           <a:bodyPr wrap="square" lIns="0" tIns="0" rIns="0" bIns="0" rtlCol="0" anchor="ctr"/>
           <a:lstStyle/>
           <a:p>
-            <a:pPr indent="0" marL="0">
+            <a:pPr marL="0" indent="0">
               <a:buNone/>
             </a:pPr>
             <a:r>
@@ -9577,7 +9750,7 @@
           <a:bodyPr wrap="square" lIns="0" tIns="0" rIns="0" bIns="0" rtlCol="0" anchor="ctr"/>
           <a:lstStyle/>
           <a:p>
-            <a:pPr indent="0" marL="0">
+            <a:pPr marL="0" indent="0">
               <a:buNone/>
             </a:pPr>
             <a:r>
@@ -9611,6 +9784,7 @@
         <a:solidFill>
           <a:srgbClr val="FFFFFF"/>
         </a:solidFill>
+        <a:effectLst/>
       </p:bgPr>
     </p:bg>
     <p:spTree>
@@ -9651,6 +9825,13 @@
             <a:prstDash val="solid"/>
           </a:ln>
         </p:spPr>
+        <p:txBody>
+          <a:bodyPr/>
+          <a:lstStyle/>
+          <a:p>
+            <a:endParaRPr lang="zh-TW" altLang="en-US"/>
+          </a:p>
+        </p:txBody>
       </p:sp>
       <p:sp>
         <p:nvSpPr>
@@ -9673,7 +9854,7 @@
           <a:bodyPr wrap="square" lIns="0" tIns="0" rIns="0" bIns="0" rtlCol="0" anchor="t"/>
           <a:lstStyle/>
           <a:p>
-            <a:pPr indent="0" marL="0">
+            <a:pPr marL="0" indent="0">
               <a:buNone/>
             </a:pPr>
             <a:r>
@@ -9712,7 +9893,7 @@
           <a:bodyPr wrap="square" lIns="0" tIns="0" rIns="0" bIns="0" rtlCol="0" anchor="t"/>
           <a:lstStyle/>
           <a:p>
-            <a:pPr indent="0" marL="0">
+            <a:pPr marL="0" indent="0">
               <a:buNone/>
             </a:pPr>
             <a:r>
@@ -9751,7 +9932,7 @@
           <a:bodyPr wrap="square" lIns="0" tIns="0" rIns="0" bIns="0" rtlCol="0" anchor="ctr"/>
           <a:lstStyle/>
           <a:p>
-            <a:pPr indent="0" marL="0">
+            <a:pPr marL="0" indent="0">
               <a:buNone/>
             </a:pPr>
             <a:r>
@@ -9790,7 +9971,7 @@
           <a:bodyPr wrap="square" lIns="0" tIns="0" rIns="0" bIns="0" rtlCol="0" anchor="ctr"/>
           <a:lstStyle/>
           <a:p>
-            <a:pPr algn="r" indent="0" marL="0">
+            <a:pPr marL="0" indent="0" algn="r">
               <a:buNone/>
             </a:pPr>
             <a:r>
@@ -9829,7 +10010,7 @@
           <a:bodyPr wrap="square" lIns="0" tIns="0" rIns="0" bIns="0" rtlCol="0" anchor="ctr"/>
           <a:lstStyle/>
           <a:p>
-            <a:pPr algn="r" indent="0" marL="0">
+            <a:pPr marL="0" indent="0" algn="r">
               <a:buNone/>
             </a:pPr>
             <a:r>
@@ -9871,6 +10052,13 @@
             <a:prstDash val="solid"/>
           </a:ln>
         </p:spPr>
+        <p:txBody>
+          <a:bodyPr/>
+          <a:lstStyle/>
+          <a:p>
+            <a:endParaRPr lang="zh-TW" altLang="en-US"/>
+          </a:p>
+        </p:txBody>
       </p:sp>
       <p:sp>
         <p:nvSpPr>
@@ -9896,6 +10084,13 @@
             <a:prstDash val="solid"/>
           </a:ln>
         </p:spPr>
+        <p:txBody>
+          <a:bodyPr/>
+          <a:lstStyle/>
+          <a:p>
+            <a:endParaRPr lang="zh-TW" altLang="en-US"/>
+          </a:p>
+        </p:txBody>
       </p:sp>
       <p:sp>
         <p:nvSpPr>
@@ -9918,7 +10113,7 @@
           <a:bodyPr wrap="square" lIns="0" tIns="0" rIns="0" bIns="0" rtlCol="0" anchor="ctr"/>
           <a:lstStyle/>
           <a:p>
-            <a:pPr algn="ctr" indent="0" marL="0">
+            <a:pPr marL="0" indent="0" algn="ctr">
               <a:buNone/>
             </a:pPr>
             <a:r>
@@ -9957,7 +10152,7 @@
           <a:bodyPr wrap="square" lIns="0" tIns="0" rIns="0" bIns="0" rtlCol="0" anchor="ctr"/>
           <a:lstStyle/>
           <a:p>
-            <a:pPr indent="0" marL="0">
+            <a:pPr marL="0" indent="0">
               <a:buNone/>
             </a:pPr>
             <a:r>
@@ -9996,7 +10191,7 @@
           <a:bodyPr wrap="square" lIns="0" tIns="0" rIns="0" bIns="0" rtlCol="0" anchor="ctr"/>
           <a:lstStyle/>
           <a:p>
-            <a:pPr indent="0" marL="0">
+            <a:pPr marL="0" indent="0">
               <a:buNone/>
             </a:pPr>
             <a:r>
@@ -10036,6 +10231,13 @@
             <a:prstDash val="solid"/>
           </a:ln>
         </p:spPr>
+        <p:txBody>
+          <a:bodyPr/>
+          <a:lstStyle/>
+          <a:p>
+            <a:endParaRPr lang="zh-TW" altLang="en-US"/>
+          </a:p>
+        </p:txBody>
       </p:sp>
       <p:sp>
         <p:nvSpPr>
@@ -10058,7 +10260,7 @@
           <a:bodyPr wrap="square" lIns="0" tIns="0" rIns="0" bIns="0" rtlCol="0" anchor="ctr"/>
           <a:lstStyle/>
           <a:p>
-            <a:pPr indent="0" marL="0">
+            <a:pPr marL="0" indent="0">
               <a:buNone/>
             </a:pPr>
             <a:r>
@@ -10097,7 +10299,7 @@
           <a:bodyPr wrap="square" lIns="0" tIns="0" rIns="0" bIns="0" rtlCol="0" anchor="ctr"/>
           <a:lstStyle/>
           <a:p>
-            <a:pPr indent="0" marL="0">
+            <a:pPr marL="0" indent="0">
               <a:buNone/>
             </a:pPr>
             <a:r>
@@ -10139,6 +10341,13 @@
             <a:prstDash val="solid"/>
           </a:ln>
         </p:spPr>
+        <p:txBody>
+          <a:bodyPr/>
+          <a:lstStyle/>
+          <a:p>
+            <a:endParaRPr lang="zh-TW" altLang="en-US"/>
+          </a:p>
+        </p:txBody>
       </p:sp>
       <p:sp>
         <p:nvSpPr>
@@ -10164,6 +10373,13 @@
             <a:prstDash val="solid"/>
           </a:ln>
         </p:spPr>
+        <p:txBody>
+          <a:bodyPr/>
+          <a:lstStyle/>
+          <a:p>
+            <a:endParaRPr lang="zh-TW" altLang="en-US"/>
+          </a:p>
+        </p:txBody>
       </p:sp>
       <p:sp>
         <p:nvSpPr>
@@ -10186,7 +10402,7 @@
           <a:bodyPr wrap="square" lIns="0" tIns="0" rIns="0" bIns="0" rtlCol="0" anchor="ctr"/>
           <a:lstStyle/>
           <a:p>
-            <a:pPr algn="ctr" indent="0" marL="0">
+            <a:pPr marL="0" indent="0" algn="ctr">
               <a:buNone/>
             </a:pPr>
             <a:r>
@@ -10225,7 +10441,7 @@
           <a:bodyPr wrap="square" lIns="0" tIns="0" rIns="0" bIns="0" rtlCol="0" anchor="ctr"/>
           <a:lstStyle/>
           <a:p>
-            <a:pPr indent="0" marL="0">
+            <a:pPr marL="0" indent="0">
               <a:buNone/>
             </a:pPr>
             <a:r>
@@ -10264,7 +10480,7 @@
           <a:bodyPr wrap="square" lIns="0" tIns="0" rIns="0" bIns="0" rtlCol="0" anchor="ctr"/>
           <a:lstStyle/>
           <a:p>
-            <a:pPr indent="0" marL="0">
+            <a:pPr marL="0" indent="0">
               <a:buNone/>
             </a:pPr>
             <a:r>
@@ -10304,6 +10520,13 @@
             <a:prstDash val="solid"/>
           </a:ln>
         </p:spPr>
+        <p:txBody>
+          <a:bodyPr/>
+          <a:lstStyle/>
+          <a:p>
+            <a:endParaRPr lang="zh-TW" altLang="en-US"/>
+          </a:p>
+        </p:txBody>
       </p:sp>
       <p:sp>
         <p:nvSpPr>
@@ -10326,7 +10549,7 @@
           <a:bodyPr wrap="square" lIns="0" tIns="0" rIns="0" bIns="0" rtlCol="0" anchor="ctr"/>
           <a:lstStyle/>
           <a:p>
-            <a:pPr indent="0" marL="0">
+            <a:pPr marL="0" indent="0">
               <a:buNone/>
             </a:pPr>
             <a:r>
@@ -10365,7 +10588,7 @@
           <a:bodyPr wrap="square" lIns="0" tIns="0" rIns="0" bIns="0" rtlCol="0" anchor="ctr"/>
           <a:lstStyle/>
           <a:p>
-            <a:pPr indent="0" marL="0">
+            <a:pPr marL="0" indent="0">
               <a:buNone/>
             </a:pPr>
             <a:r>
@@ -10407,6 +10630,13 @@
             <a:prstDash val="solid"/>
           </a:ln>
         </p:spPr>
+        <p:txBody>
+          <a:bodyPr/>
+          <a:lstStyle/>
+          <a:p>
+            <a:endParaRPr lang="zh-TW" altLang="en-US"/>
+          </a:p>
+        </p:txBody>
       </p:sp>
       <p:sp>
         <p:nvSpPr>
@@ -10432,6 +10662,13 @@
             <a:prstDash val="solid"/>
           </a:ln>
         </p:spPr>
+        <p:txBody>
+          <a:bodyPr/>
+          <a:lstStyle/>
+          <a:p>
+            <a:endParaRPr lang="zh-TW" altLang="en-US"/>
+          </a:p>
+        </p:txBody>
       </p:sp>
       <p:sp>
         <p:nvSpPr>
@@ -10454,7 +10691,7 @@
           <a:bodyPr wrap="square" lIns="0" tIns="0" rIns="0" bIns="0" rtlCol="0" anchor="ctr"/>
           <a:lstStyle/>
           <a:p>
-            <a:pPr algn="ctr" indent="0" marL="0">
+            <a:pPr marL="0" indent="0" algn="ctr">
               <a:buNone/>
             </a:pPr>
             <a:r>
@@ -10493,7 +10730,7 @@
           <a:bodyPr wrap="square" lIns="0" tIns="0" rIns="0" bIns="0" rtlCol="0" anchor="ctr"/>
           <a:lstStyle/>
           <a:p>
-            <a:pPr indent="0" marL="0">
+            <a:pPr marL="0" indent="0">
               <a:buNone/>
             </a:pPr>
             <a:r>
@@ -10532,7 +10769,7 @@
           <a:bodyPr wrap="square" lIns="0" tIns="0" rIns="0" bIns="0" rtlCol="0" anchor="ctr"/>
           <a:lstStyle/>
           <a:p>
-            <a:pPr indent="0" marL="0">
+            <a:pPr marL="0" indent="0">
               <a:buNone/>
             </a:pPr>
             <a:r>
@@ -10572,6 +10809,13 @@
             <a:prstDash val="solid"/>
           </a:ln>
         </p:spPr>
+        <p:txBody>
+          <a:bodyPr/>
+          <a:lstStyle/>
+          <a:p>
+            <a:endParaRPr lang="zh-TW" altLang="en-US"/>
+          </a:p>
+        </p:txBody>
       </p:sp>
       <p:sp>
         <p:nvSpPr>
@@ -10594,7 +10838,7 @@
           <a:bodyPr wrap="square" lIns="0" tIns="0" rIns="0" bIns="0" rtlCol="0" anchor="ctr"/>
           <a:lstStyle/>
           <a:p>
-            <a:pPr indent="0" marL="0">
+            <a:pPr marL="0" indent="0">
               <a:buNone/>
             </a:pPr>
             <a:r>
@@ -10633,7 +10877,7 @@
           <a:bodyPr wrap="square" lIns="0" tIns="0" rIns="0" bIns="0" rtlCol="0" anchor="ctr"/>
           <a:lstStyle/>
           <a:p>
-            <a:pPr indent="0" marL="0">
+            <a:pPr marL="0" indent="0">
               <a:buNone/>
             </a:pPr>
             <a:r>
@@ -10675,6 +10919,13 @@
             <a:prstDash val="solid"/>
           </a:ln>
         </p:spPr>
+        <p:txBody>
+          <a:bodyPr/>
+          <a:lstStyle/>
+          <a:p>
+            <a:endParaRPr lang="zh-TW" altLang="en-US"/>
+          </a:p>
+        </p:txBody>
       </p:sp>
       <p:sp>
         <p:nvSpPr>
@@ -10700,6 +10951,13 @@
             <a:prstDash val="solid"/>
           </a:ln>
         </p:spPr>
+        <p:txBody>
+          <a:bodyPr/>
+          <a:lstStyle/>
+          <a:p>
+            <a:endParaRPr lang="zh-TW" altLang="en-US"/>
+          </a:p>
+        </p:txBody>
       </p:sp>
       <p:sp>
         <p:nvSpPr>
@@ -10722,7 +10980,7 @@
           <a:bodyPr wrap="square" lIns="0" tIns="0" rIns="0" bIns="0" rtlCol="0" anchor="ctr"/>
           <a:lstStyle/>
           <a:p>
-            <a:pPr algn="ctr" indent="0" marL="0">
+            <a:pPr marL="0" indent="0" algn="ctr">
               <a:buNone/>
             </a:pPr>
             <a:r>
@@ -10761,7 +11019,7 @@
           <a:bodyPr wrap="square" lIns="0" tIns="0" rIns="0" bIns="0" rtlCol="0" anchor="ctr"/>
           <a:lstStyle/>
           <a:p>
-            <a:pPr indent="0" marL="0">
+            <a:pPr marL="0" indent="0">
               <a:buNone/>
             </a:pPr>
             <a:r>
@@ -10800,7 +11058,7 @@
           <a:bodyPr wrap="square" lIns="0" tIns="0" rIns="0" bIns="0" rtlCol="0" anchor="ctr"/>
           <a:lstStyle/>
           <a:p>
-            <a:pPr indent="0" marL="0">
+            <a:pPr marL="0" indent="0">
               <a:buNone/>
             </a:pPr>
             <a:r>
@@ -10840,6 +11098,13 @@
             <a:prstDash val="solid"/>
           </a:ln>
         </p:spPr>
+        <p:txBody>
+          <a:bodyPr/>
+          <a:lstStyle/>
+          <a:p>
+            <a:endParaRPr lang="zh-TW" altLang="en-US"/>
+          </a:p>
+        </p:txBody>
       </p:sp>
       <p:sp>
         <p:nvSpPr>
@@ -10862,7 +11127,7 @@
           <a:bodyPr wrap="square" lIns="0" tIns="0" rIns="0" bIns="0" rtlCol="0" anchor="ctr"/>
           <a:lstStyle/>
           <a:p>
-            <a:pPr indent="0" marL="0">
+            <a:pPr marL="0" indent="0">
               <a:buNone/>
             </a:pPr>
             <a:r>
@@ -10901,7 +11166,7 @@
           <a:bodyPr wrap="square" lIns="0" tIns="0" rIns="0" bIns="0" rtlCol="0" anchor="ctr"/>
           <a:lstStyle/>
           <a:p>
-            <a:pPr indent="0" marL="0">
+            <a:pPr marL="0" indent="0">
               <a:buNone/>
             </a:pPr>
             <a:r>
@@ -10943,6 +11208,13 @@
             <a:prstDash val="solid"/>
           </a:ln>
         </p:spPr>
+        <p:txBody>
+          <a:bodyPr/>
+          <a:lstStyle/>
+          <a:p>
+            <a:endParaRPr lang="zh-TW" altLang="en-US"/>
+          </a:p>
+        </p:txBody>
       </p:sp>
       <p:sp>
         <p:nvSpPr>
@@ -10968,6 +11240,13 @@
             <a:prstDash val="solid"/>
           </a:ln>
         </p:spPr>
+        <p:txBody>
+          <a:bodyPr/>
+          <a:lstStyle/>
+          <a:p>
+            <a:endParaRPr lang="zh-TW" altLang="en-US"/>
+          </a:p>
+        </p:txBody>
       </p:sp>
       <p:sp>
         <p:nvSpPr>
@@ -10990,7 +11269,7 @@
           <a:bodyPr wrap="square" lIns="0" tIns="0" rIns="0" bIns="0" rtlCol="0" anchor="ctr"/>
           <a:lstStyle/>
           <a:p>
-            <a:pPr algn="ctr" indent="0" marL="0">
+            <a:pPr marL="0" indent="0" algn="ctr">
               <a:buNone/>
             </a:pPr>
             <a:r>
@@ -11029,7 +11308,7 @@
           <a:bodyPr wrap="square" lIns="0" tIns="0" rIns="0" bIns="0" rtlCol="0" anchor="ctr"/>
           <a:lstStyle/>
           <a:p>
-            <a:pPr indent="0" marL="0">
+            <a:pPr marL="0" indent="0">
               <a:buNone/>
             </a:pPr>
             <a:r>
@@ -11068,7 +11347,7 @@
           <a:bodyPr wrap="square" lIns="0" tIns="0" rIns="0" bIns="0" rtlCol="0" anchor="ctr"/>
           <a:lstStyle/>
           <a:p>
-            <a:pPr indent="0" marL="0">
+            <a:pPr marL="0" indent="0">
               <a:buNone/>
             </a:pPr>
             <a:r>
@@ -11108,6 +11387,13 @@
             <a:prstDash val="solid"/>
           </a:ln>
         </p:spPr>
+        <p:txBody>
+          <a:bodyPr/>
+          <a:lstStyle/>
+          <a:p>
+            <a:endParaRPr lang="zh-TW" altLang="en-US"/>
+          </a:p>
+        </p:txBody>
       </p:sp>
       <p:sp>
         <p:nvSpPr>
@@ -11130,7 +11416,7 @@
           <a:bodyPr wrap="square" lIns="0" tIns="0" rIns="0" bIns="0" rtlCol="0" anchor="ctr"/>
           <a:lstStyle/>
           <a:p>
-            <a:pPr indent="0" marL="0">
+            <a:pPr marL="0" indent="0">
               <a:buNone/>
             </a:pPr>
             <a:r>
@@ -11169,7 +11455,7 @@
           <a:bodyPr wrap="square" lIns="0" tIns="0" rIns="0" bIns="0" rtlCol="0" anchor="ctr"/>
           <a:lstStyle/>
           <a:p>
-            <a:pPr indent="0" marL="0">
+            <a:pPr marL="0" indent="0">
               <a:buNone/>
             </a:pPr>
             <a:r>
@@ -11211,6 +11497,13 @@
             <a:prstDash val="solid"/>
           </a:ln>
         </p:spPr>
+        <p:txBody>
+          <a:bodyPr/>
+          <a:lstStyle/>
+          <a:p>
+            <a:endParaRPr lang="zh-TW" altLang="en-US"/>
+          </a:p>
+        </p:txBody>
       </p:sp>
       <p:sp>
         <p:nvSpPr>
@@ -11236,6 +11529,13 @@
             <a:prstDash val="solid"/>
           </a:ln>
         </p:spPr>
+        <p:txBody>
+          <a:bodyPr/>
+          <a:lstStyle/>
+          <a:p>
+            <a:endParaRPr lang="zh-TW" altLang="en-US"/>
+          </a:p>
+        </p:txBody>
       </p:sp>
       <p:sp>
         <p:nvSpPr>
@@ -11258,7 +11558,7 @@
           <a:bodyPr wrap="square" lIns="0" tIns="0" rIns="0" bIns="0" rtlCol="0" anchor="ctr"/>
           <a:lstStyle/>
           <a:p>
-            <a:pPr algn="ctr" indent="0" marL="0">
+            <a:pPr marL="0" indent="0" algn="ctr">
               <a:buNone/>
             </a:pPr>
             <a:r>
@@ -11297,7 +11597,7 @@
           <a:bodyPr wrap="square" lIns="0" tIns="0" rIns="0" bIns="0" rtlCol="0" anchor="ctr"/>
           <a:lstStyle/>
           <a:p>
-            <a:pPr indent="0" marL="0">
+            <a:pPr marL="0" indent="0">
               <a:buNone/>
             </a:pPr>
             <a:r>
@@ -11336,7 +11636,7 @@
           <a:bodyPr wrap="square" lIns="0" tIns="0" rIns="0" bIns="0" rtlCol="0" anchor="ctr"/>
           <a:lstStyle/>
           <a:p>
-            <a:pPr indent="0" marL="0">
+            <a:pPr marL="0" indent="0">
               <a:buNone/>
             </a:pPr>
             <a:r>
@@ -11376,6 +11676,13 @@
             <a:prstDash val="solid"/>
           </a:ln>
         </p:spPr>
+        <p:txBody>
+          <a:bodyPr/>
+          <a:lstStyle/>
+          <a:p>
+            <a:endParaRPr lang="zh-TW" altLang="en-US"/>
+          </a:p>
+        </p:txBody>
       </p:sp>
       <p:sp>
         <p:nvSpPr>
@@ -11398,7 +11705,7 @@
           <a:bodyPr wrap="square" lIns="0" tIns="0" rIns="0" bIns="0" rtlCol="0" anchor="ctr"/>
           <a:lstStyle/>
           <a:p>
-            <a:pPr indent="0" marL="0">
+            <a:pPr marL="0" indent="0">
               <a:buNone/>
             </a:pPr>
             <a:r>
@@ -11437,7 +11744,7 @@
           <a:bodyPr wrap="square" lIns="0" tIns="0" rIns="0" bIns="0" rtlCol="0" anchor="ctr"/>
           <a:lstStyle/>
           <a:p>
-            <a:pPr indent="0" marL="0">
+            <a:pPr marL="0" indent="0">
               <a:buNone/>
             </a:pPr>
             <a:r>
@@ -11471,6 +11778,7 @@
         <a:solidFill>
           <a:srgbClr val="FFFFFF"/>
         </a:solidFill>
+        <a:effectLst/>
       </p:bgPr>
     </p:bg>
     <p:spTree>
@@ -11511,6 +11819,13 @@
             <a:prstDash val="solid"/>
           </a:ln>
         </p:spPr>
+        <p:txBody>
+          <a:bodyPr/>
+          <a:lstStyle/>
+          <a:p>
+            <a:endParaRPr lang="zh-TW" altLang="en-US"/>
+          </a:p>
+        </p:txBody>
       </p:sp>
       <p:sp>
         <p:nvSpPr>
@@ -11533,7 +11848,7 @@
           <a:bodyPr wrap="square" lIns="0" tIns="0" rIns="0" bIns="0" rtlCol="0" anchor="t"/>
           <a:lstStyle/>
           <a:p>
-            <a:pPr indent="0" marL="0">
+            <a:pPr marL="0" indent="0">
               <a:buNone/>
             </a:pPr>
             <a:r>
@@ -11572,7 +11887,7 @@
           <a:bodyPr wrap="square" lIns="0" tIns="0" rIns="0" bIns="0" rtlCol="0" anchor="t"/>
           <a:lstStyle/>
           <a:p>
-            <a:pPr indent="0" marL="0">
+            <a:pPr marL="0" indent="0">
               <a:buNone/>
             </a:pPr>
             <a:r>
@@ -11611,7 +11926,7 @@
           <a:bodyPr wrap="square" lIns="0" tIns="0" rIns="0" bIns="0" rtlCol="0" anchor="ctr"/>
           <a:lstStyle/>
           <a:p>
-            <a:pPr indent="0" marL="0">
+            <a:pPr marL="0" indent="0">
               <a:buNone/>
             </a:pPr>
             <a:r>
@@ -11650,7 +11965,7 @@
           <a:bodyPr wrap="square" lIns="0" tIns="0" rIns="0" bIns="0" rtlCol="0" anchor="ctr"/>
           <a:lstStyle/>
           <a:p>
-            <a:pPr algn="r" indent="0" marL="0">
+            <a:pPr marL="0" indent="0" algn="r">
               <a:buNone/>
             </a:pPr>
             <a:r>
@@ -11689,7 +12004,7 @@
           <a:bodyPr wrap="square" lIns="0" tIns="0" rIns="0" bIns="0" rtlCol="0" anchor="ctr"/>
           <a:lstStyle/>
           <a:p>
-            <a:pPr algn="r" indent="0" marL="0">
+            <a:pPr marL="0" indent="0" algn="r">
               <a:buNone/>
             </a:pPr>
             <a:r>
@@ -11731,6 +12046,13 @@
             <a:prstDash val="solid"/>
           </a:ln>
         </p:spPr>
+        <p:txBody>
+          <a:bodyPr/>
+          <a:lstStyle/>
+          <a:p>
+            <a:endParaRPr lang="zh-TW" altLang="en-US"/>
+          </a:p>
+        </p:txBody>
       </p:sp>
       <p:sp>
         <p:nvSpPr>
@@ -11756,6 +12078,13 @@
             <a:prstDash val="solid"/>
           </a:ln>
         </p:spPr>
+        <p:txBody>
+          <a:bodyPr/>
+          <a:lstStyle/>
+          <a:p>
+            <a:endParaRPr lang="zh-TW" altLang="en-US"/>
+          </a:p>
+        </p:txBody>
       </p:sp>
       <p:sp>
         <p:nvSpPr>
@@ -11778,7 +12107,7 @@
           <a:bodyPr wrap="square" lIns="0" tIns="0" rIns="0" bIns="0" rtlCol="0" anchor="ctr"/>
           <a:lstStyle/>
           <a:p>
-            <a:pPr indent="0" marL="0">
+            <a:pPr marL="0" indent="0">
               <a:buNone/>
             </a:pPr>
             <a:r>
@@ -11817,7 +12146,7 @@
           <a:bodyPr wrap="square" lIns="0" tIns="0" rIns="0" bIns="0" rtlCol="0" anchor="ctr"/>
           <a:lstStyle/>
           <a:p>
-            <a:pPr indent="0" marL="0">
+            <a:pPr marL="0" indent="0">
               <a:buNone/>
             </a:pPr>
             <a:r>
@@ -11856,7 +12185,7 @@
           <a:bodyPr wrap="square" lIns="0" tIns="0" rIns="0" bIns="0" rtlCol="0" anchor="ctr"/>
           <a:lstStyle/>
           <a:p>
-            <a:pPr indent="0" marL="0">
+            <a:pPr marL="0" indent="0">
               <a:buNone/>
             </a:pPr>
             <a:r>
@@ -11974,6 +12303,13 @@
             <a:prstDash val="solid"/>
           </a:ln>
         </p:spPr>
+        <p:txBody>
+          <a:bodyPr/>
+          <a:lstStyle/>
+          <a:p>
+            <a:endParaRPr lang="zh-TW" altLang="en-US"/>
+          </a:p>
+        </p:txBody>
       </p:sp>
       <p:sp>
         <p:nvSpPr>
@@ -11999,6 +12335,13 @@
             <a:prstDash val="solid"/>
           </a:ln>
         </p:spPr>
+        <p:txBody>
+          <a:bodyPr/>
+          <a:lstStyle/>
+          <a:p>
+            <a:endParaRPr lang="zh-TW" altLang="en-US"/>
+          </a:p>
+        </p:txBody>
       </p:sp>
       <p:sp>
         <p:nvSpPr>
@@ -12021,7 +12364,7 @@
           <a:bodyPr wrap="square" lIns="0" tIns="0" rIns="0" bIns="0" rtlCol="0" anchor="ctr"/>
           <a:lstStyle/>
           <a:p>
-            <a:pPr indent="0" marL="0">
+            <a:pPr marL="0" indent="0">
               <a:buNone/>
             </a:pPr>
             <a:r>
@@ -12060,7 +12403,7 @@
           <a:bodyPr wrap="square" lIns="0" tIns="0" rIns="0" bIns="0" rtlCol="0" anchor="ctr"/>
           <a:lstStyle/>
           <a:p>
-            <a:pPr indent="0" marL="0">
+            <a:pPr marL="0" indent="0">
               <a:buNone/>
             </a:pPr>
             <a:r>
@@ -12099,7 +12442,7 @@
           <a:bodyPr wrap="square" lIns="0" tIns="0" rIns="0" bIns="0" rtlCol="0" anchor="ctr"/>
           <a:lstStyle/>
           <a:p>
-            <a:pPr indent="0" marL="0">
+            <a:pPr marL="0" indent="0">
               <a:buNone/>
             </a:pPr>
             <a:r>
@@ -12217,6 +12560,13 @@
             <a:prstDash val="solid"/>
           </a:ln>
         </p:spPr>
+        <p:txBody>
+          <a:bodyPr/>
+          <a:lstStyle/>
+          <a:p>
+            <a:endParaRPr lang="zh-TW" altLang="en-US"/>
+          </a:p>
+        </p:txBody>
       </p:sp>
       <p:sp>
         <p:nvSpPr>
@@ -12242,6 +12592,13 @@
             <a:prstDash val="solid"/>
           </a:ln>
         </p:spPr>
+        <p:txBody>
+          <a:bodyPr/>
+          <a:lstStyle/>
+          <a:p>
+            <a:endParaRPr lang="zh-TW" altLang="en-US"/>
+          </a:p>
+        </p:txBody>
       </p:sp>
       <p:sp>
         <p:nvSpPr>
@@ -12264,7 +12621,7 @@
           <a:bodyPr wrap="square" lIns="0" tIns="0" rIns="0" bIns="0" rtlCol="0" anchor="ctr"/>
           <a:lstStyle/>
           <a:p>
-            <a:pPr indent="0" marL="0">
+            <a:pPr marL="0" indent="0">
               <a:buNone/>
             </a:pPr>
             <a:r>
@@ -12303,7 +12660,7 @@
           <a:bodyPr wrap="square" lIns="0" tIns="0" rIns="0" bIns="0" rtlCol="0" anchor="ctr"/>
           <a:lstStyle/>
           <a:p>
-            <a:pPr indent="0" marL="0">
+            <a:pPr marL="0" indent="0">
               <a:buNone/>
             </a:pPr>
             <a:r>
@@ -12342,7 +12699,7 @@
           <a:bodyPr wrap="square" lIns="0" tIns="0" rIns="0" bIns="0" rtlCol="0" anchor="ctr"/>
           <a:lstStyle/>
           <a:p>
-            <a:pPr indent="0" marL="0">
+            <a:pPr marL="0" indent="0">
               <a:buNone/>
             </a:pPr>
             <a:r>
@@ -12460,6 +12817,13 @@
             <a:prstDash val="solid"/>
           </a:ln>
         </p:spPr>
+        <p:txBody>
+          <a:bodyPr/>
+          <a:lstStyle/>
+          <a:p>
+            <a:endParaRPr lang="zh-TW" altLang="en-US"/>
+          </a:p>
+        </p:txBody>
       </p:sp>
       <p:sp>
         <p:nvSpPr>
@@ -12482,7 +12846,7 @@
           <a:bodyPr wrap="square" lIns="0" tIns="0" rIns="0" bIns="0" rtlCol="0" anchor="ctr"/>
           <a:lstStyle/>
           <a:p>
-            <a:pPr indent="0" marL="0">
+            <a:pPr marL="0" indent="0">
               <a:buNone/>
             </a:pPr>
             <a:r>
@@ -12521,7 +12885,7 @@
           <a:bodyPr wrap="square" lIns="0" tIns="0" rIns="0" bIns="0" rtlCol="0" anchor="ctr"/>
           <a:lstStyle/>
           <a:p>
-            <a:pPr indent="0" marL="0">
+            <a:pPr marL="0" indent="0">
               <a:buNone/>
             </a:pPr>
             <a:r>
@@ -12560,7 +12924,7 @@
           <a:bodyPr wrap="square" lIns="0" tIns="0" rIns="0" bIns="0" rtlCol="0" anchor="ctr"/>
           <a:lstStyle/>
           <a:p>
-            <a:pPr indent="0" marL="0">
+            <a:pPr marL="0" indent="0">
               <a:buNone/>
             </a:pPr>
             <a:r>
@@ -12594,6 +12958,7 @@
         <a:solidFill>
           <a:srgbClr val="FFFFFF"/>
         </a:solidFill>
+        <a:effectLst/>
       </p:bgPr>
     </p:bg>
     <p:spTree>
@@ -12634,6 +12999,13 @@
             <a:prstDash val="solid"/>
           </a:ln>
         </p:spPr>
+        <p:txBody>
+          <a:bodyPr/>
+          <a:lstStyle/>
+          <a:p>
+            <a:endParaRPr lang="zh-TW" altLang="en-US"/>
+          </a:p>
+        </p:txBody>
       </p:sp>
       <p:sp>
         <p:nvSpPr>
@@ -12656,7 +13028,7 @@
           <a:bodyPr wrap="square" lIns="0" tIns="0" rIns="0" bIns="0" rtlCol="0" anchor="t"/>
           <a:lstStyle/>
           <a:p>
-            <a:pPr indent="0" marL="0">
+            <a:pPr marL="0" indent="0">
               <a:buNone/>
             </a:pPr>
             <a:r>
@@ -12695,7 +13067,7 @@
           <a:bodyPr wrap="square" lIns="0" tIns="0" rIns="0" bIns="0" rtlCol="0" anchor="t"/>
           <a:lstStyle/>
           <a:p>
-            <a:pPr indent="0" marL="0">
+            <a:pPr marL="0" indent="0">
               <a:buNone/>
             </a:pPr>
             <a:r>
@@ -12734,7 +13106,7 @@
           <a:bodyPr wrap="square" lIns="0" tIns="0" rIns="0" bIns="0" rtlCol="0" anchor="ctr"/>
           <a:lstStyle/>
           <a:p>
-            <a:pPr indent="0" marL="0">
+            <a:pPr marL="0" indent="0">
               <a:buNone/>
             </a:pPr>
             <a:r>
@@ -12773,7 +13145,7 @@
           <a:bodyPr wrap="square" lIns="0" tIns="0" rIns="0" bIns="0" rtlCol="0" anchor="ctr"/>
           <a:lstStyle/>
           <a:p>
-            <a:pPr algn="r" indent="0" marL="0">
+            <a:pPr marL="0" indent="0" algn="r">
               <a:buNone/>
             </a:pPr>
             <a:r>
@@ -12812,7 +13184,7 @@
           <a:bodyPr wrap="square" lIns="0" tIns="0" rIns="0" bIns="0" rtlCol="0" anchor="ctr"/>
           <a:lstStyle/>
           <a:p>
-            <a:pPr algn="r" indent="0" marL="0">
+            <a:pPr marL="0" indent="0" algn="r">
               <a:buNone/>
             </a:pPr>
             <a:r>
@@ -12846,16 +13218,34 @@
         </p:nvGraphicFramePr>
         <p:xfrm>
           <a:off x="457200" y="1417320"/>
-          <a:ext cx="11247120" cy="914400"/>
+          <a:ext cx="11247120" cy="3733800"/>
         </p:xfrm>
         <a:graphic>
           <a:graphicData uri="http://schemas.openxmlformats.org/drawingml/2006/table">
             <a:tbl>
               <a:tblPr/>
               <a:tblGrid>
-                <a:gridCol w="2286000"/>
-                <a:gridCol w="5486400"/>
-                <a:gridCol w="3474720"/>
+                <a:gridCol w="2286000">
+                  <a:extLst>
+                    <a:ext uri="{9D8B030D-6E8A-4147-A177-3AD203B41FA5}">
+                      <a16:colId xmlns:a16="http://schemas.microsoft.com/office/drawing/2014/main" val="20000"/>
+                    </a:ext>
+                  </a:extLst>
+                </a:gridCol>
+                <a:gridCol w="5486400">
+                  <a:extLst>
+                    <a:ext uri="{9D8B030D-6E8A-4147-A177-3AD203B41FA5}">
+                      <a16:colId xmlns:a16="http://schemas.microsoft.com/office/drawing/2014/main" val="20001"/>
+                    </a:ext>
+                  </a:extLst>
+                </a:gridCol>
+                <a:gridCol w="3474720">
+                  <a:extLst>
+                    <a:ext uri="{9D8B030D-6E8A-4147-A177-3AD203B41FA5}">
+                      <a16:colId xmlns:a16="http://schemas.microsoft.com/office/drawing/2014/main" val="20002"/>
+                    </a:ext>
+                  </a:extLst>
+                </a:gridCol>
               </a:tblGrid>
               <a:tr h="411480">
                 <a:tc>
@@ -12863,7 +13253,7 @@
                     <a:bodyPr/>
                     <a:lstStyle/>
                     <a:p>
-                      <a:pPr algn="ctr" indent="0" marL="0">
+                      <a:pPr marL="0" indent="0" algn="ctr">
                         <a:buNone/>
                       </a:pPr>
                       <a:r>
@@ -12884,7 +13274,7 @@
                       </a:endParaRPr>
                     </a:p>
                   </a:txBody>
-                  <a:tcPr marL="91440" marR="91440" marT="45720" marB="45720">
+                  <a:tcPr>
                     <a:lnL w="6350" cap="flat" cmpd="sng" algn="ctr">
                       <a:solidFill>
                         <a:srgbClr val="D5C8EE"/>
@@ -12931,7 +13321,7 @@
                     <a:bodyPr/>
                     <a:lstStyle/>
                     <a:p>
-                      <a:pPr indent="0" marL="0">
+                      <a:pPr marL="0" indent="0">
                         <a:buNone/>
                       </a:pPr>
                       <a:r>
@@ -12952,7 +13342,7 @@
                       </a:endParaRPr>
                     </a:p>
                   </a:txBody>
-                  <a:tcPr marL="91440" marR="91440" marT="45720" marB="45720">
+                  <a:tcPr>
                     <a:lnL w="6350" cap="flat" cmpd="sng" algn="ctr">
                       <a:solidFill>
                         <a:srgbClr val="D5C8EE"/>
@@ -12999,7 +13389,7 @@
                     <a:bodyPr/>
                     <a:lstStyle/>
                     <a:p>
-                      <a:pPr indent="0" marL="0">
+                      <a:pPr marL="0" indent="0">
                         <a:buNone/>
                       </a:pPr>
                       <a:r>
@@ -13020,7 +13410,7 @@
                       </a:endParaRPr>
                     </a:p>
                   </a:txBody>
-                  <a:tcPr marL="91440" marR="91440" marT="45720" marB="45720">
+                  <a:tcPr>
                     <a:lnL w="6350" cap="flat" cmpd="sng" algn="ctr">
                       <a:solidFill>
                         <a:srgbClr val="D5C8EE"/>
@@ -13062,6 +13452,11 @@
                     </a:solidFill>
                   </a:tcPr>
                 </a:tc>
+                <a:extLst>
+                  <a:ext uri="{0D108BD9-81ED-4DB2-BD59-A6C34878D82A}">
+                    <a16:rowId xmlns:a16="http://schemas.microsoft.com/office/drawing/2014/main" val="10000"/>
+                  </a:ext>
+                </a:extLst>
               </a:tr>
               <a:tr h="411480">
                 <a:tc>
@@ -13069,7 +13464,7 @@
                     <a:bodyPr/>
                     <a:lstStyle/>
                     <a:p>
-                      <a:pPr algn="ctr" indent="0" marL="0">
+                      <a:pPr marL="0" indent="0" algn="ctr">
                         <a:buNone/>
                       </a:pPr>
                       <a:r>
@@ -13090,7 +13485,7 @@
                       </a:endParaRPr>
                     </a:p>
                   </a:txBody>
-                  <a:tcPr marL="91440" marR="91440" marT="45720" marB="45720">
+                  <a:tcPr>
                     <a:lnL w="6350" cap="flat" cmpd="sng" algn="ctr">
                       <a:solidFill>
                         <a:srgbClr val="D5C8EE"/>
@@ -13137,7 +13532,7 @@
                     <a:bodyPr/>
                     <a:lstStyle/>
                     <a:p>
-                      <a:pPr indent="0" marL="0">
+                      <a:pPr marL="0" indent="0">
                         <a:buNone/>
                       </a:pPr>
                       <a:r>
@@ -13158,7 +13553,7 @@
                       </a:endParaRPr>
                     </a:p>
                   </a:txBody>
-                  <a:tcPr marL="91440" marR="91440" marT="45720" marB="45720">
+                  <a:tcPr>
                     <a:lnL w="6350" cap="flat" cmpd="sng" algn="ctr">
                       <a:solidFill>
                         <a:srgbClr val="D5C8EE"/>
@@ -13205,7 +13600,7 @@
                     <a:bodyPr/>
                     <a:lstStyle/>
                     <a:p>
-                      <a:pPr indent="0" marL="0">
+                      <a:pPr marL="0" indent="0">
                         <a:buNone/>
                       </a:pPr>
                       <a:r>
@@ -13226,7 +13621,7 @@
                       </a:endParaRPr>
                     </a:p>
                   </a:txBody>
-                  <a:tcPr marL="91440" marR="91440" marT="45720" marB="45720">
+                  <a:tcPr>
                     <a:lnL w="6350" cap="flat" cmpd="sng" algn="ctr">
                       <a:solidFill>
                         <a:srgbClr val="D5C8EE"/>
@@ -13268,6 +13663,11 @@
                     </a:solidFill>
                   </a:tcPr>
                 </a:tc>
+                <a:extLst>
+                  <a:ext uri="{0D108BD9-81ED-4DB2-BD59-A6C34878D82A}">
+                    <a16:rowId xmlns:a16="http://schemas.microsoft.com/office/drawing/2014/main" val="10001"/>
+                  </a:ext>
+                </a:extLst>
               </a:tr>
               <a:tr h="411480">
                 <a:tc>
@@ -13275,7 +13675,7 @@
                     <a:bodyPr/>
                     <a:lstStyle/>
                     <a:p>
-                      <a:pPr algn="ctr" indent="0" marL="0">
+                      <a:pPr marL="0" indent="0" algn="ctr">
                         <a:buNone/>
                       </a:pPr>
                       <a:r>
@@ -13296,7 +13696,7 @@
                       </a:endParaRPr>
                     </a:p>
                   </a:txBody>
-                  <a:tcPr marL="91440" marR="91440" marT="45720" marB="45720">
+                  <a:tcPr>
                     <a:lnL w="6350" cap="flat" cmpd="sng" algn="ctr">
                       <a:solidFill>
                         <a:srgbClr val="D5C8EE"/>
@@ -13343,7 +13743,7 @@
                     <a:bodyPr/>
                     <a:lstStyle/>
                     <a:p>
-                      <a:pPr indent="0" marL="0">
+                      <a:pPr marL="0" indent="0">
                         <a:buNone/>
                       </a:pPr>
                       <a:r>
@@ -13364,7 +13764,7 @@
                       </a:endParaRPr>
                     </a:p>
                   </a:txBody>
-                  <a:tcPr marL="91440" marR="91440" marT="45720" marB="45720">
+                  <a:tcPr>
                     <a:lnL w="6350" cap="flat" cmpd="sng" algn="ctr">
                       <a:solidFill>
                         <a:srgbClr val="D5C8EE"/>
@@ -13411,7 +13811,7 @@
                     <a:bodyPr/>
                     <a:lstStyle/>
                     <a:p>
-                      <a:pPr indent="0" marL="0">
+                      <a:pPr marL="0" indent="0">
                         <a:buNone/>
                       </a:pPr>
                       <a:r>
@@ -13432,7 +13832,7 @@
                       </a:endParaRPr>
                     </a:p>
                   </a:txBody>
-                  <a:tcPr marL="91440" marR="91440" marT="45720" marB="45720">
+                  <a:tcPr>
                     <a:lnL w="6350" cap="flat" cmpd="sng" algn="ctr">
                       <a:solidFill>
                         <a:srgbClr val="D5C8EE"/>
@@ -13474,6 +13874,11 @@
                     </a:solidFill>
                   </a:tcPr>
                 </a:tc>
+                <a:extLst>
+                  <a:ext uri="{0D108BD9-81ED-4DB2-BD59-A6C34878D82A}">
+                    <a16:rowId xmlns:a16="http://schemas.microsoft.com/office/drawing/2014/main" val="10002"/>
+                  </a:ext>
+                </a:extLst>
               </a:tr>
               <a:tr h="411480">
                 <a:tc>
@@ -13481,7 +13886,7 @@
                     <a:bodyPr/>
                     <a:lstStyle/>
                     <a:p>
-                      <a:pPr algn="ctr" indent="0" marL="0">
+                      <a:pPr marL="0" indent="0" algn="ctr">
                         <a:buNone/>
                       </a:pPr>
                       <a:r>
@@ -13502,7 +13907,7 @@
                       </a:endParaRPr>
                     </a:p>
                   </a:txBody>
-                  <a:tcPr marL="91440" marR="91440" marT="45720" marB="45720">
+                  <a:tcPr>
                     <a:lnL w="6350" cap="flat" cmpd="sng" algn="ctr">
                       <a:solidFill>
                         <a:srgbClr val="D5C8EE"/>
@@ -13549,7 +13954,7 @@
                     <a:bodyPr/>
                     <a:lstStyle/>
                     <a:p>
-                      <a:pPr indent="0" marL="0">
+                      <a:pPr marL="0" indent="0">
                         <a:buNone/>
                       </a:pPr>
                       <a:r>
@@ -13570,7 +13975,7 @@
                       </a:endParaRPr>
                     </a:p>
                   </a:txBody>
-                  <a:tcPr marL="91440" marR="91440" marT="45720" marB="45720">
+                  <a:tcPr>
                     <a:lnL w="6350" cap="flat" cmpd="sng" algn="ctr">
                       <a:solidFill>
                         <a:srgbClr val="D5C8EE"/>
@@ -13617,7 +14022,7 @@
                     <a:bodyPr/>
                     <a:lstStyle/>
                     <a:p>
-                      <a:pPr indent="0" marL="0">
+                      <a:pPr marL="0" indent="0">
                         <a:buNone/>
                       </a:pPr>
                       <a:r>
@@ -13638,7 +14043,7 @@
                       </a:endParaRPr>
                     </a:p>
                   </a:txBody>
-                  <a:tcPr marL="91440" marR="91440" marT="45720" marB="45720">
+                  <a:tcPr>
                     <a:lnL w="6350" cap="flat" cmpd="sng" algn="ctr">
                       <a:solidFill>
                         <a:srgbClr val="D5C8EE"/>
@@ -13680,6 +14085,11 @@
                     </a:solidFill>
                   </a:tcPr>
                 </a:tc>
+                <a:extLst>
+                  <a:ext uri="{0D108BD9-81ED-4DB2-BD59-A6C34878D82A}">
+                    <a16:rowId xmlns:a16="http://schemas.microsoft.com/office/drawing/2014/main" val="10003"/>
+                  </a:ext>
+                </a:extLst>
               </a:tr>
               <a:tr h="411480">
                 <a:tc>
@@ -13687,7 +14097,7 @@
                     <a:bodyPr/>
                     <a:lstStyle/>
                     <a:p>
-                      <a:pPr algn="ctr" indent="0" marL="0">
+                      <a:pPr marL="0" indent="0" algn="ctr">
                         <a:buNone/>
                       </a:pPr>
                       <a:r>
@@ -13708,7 +14118,7 @@
                       </a:endParaRPr>
                     </a:p>
                   </a:txBody>
-                  <a:tcPr marL="91440" marR="91440" marT="45720" marB="45720">
+                  <a:tcPr>
                     <a:lnL w="6350" cap="flat" cmpd="sng" algn="ctr">
                       <a:solidFill>
                         <a:srgbClr val="D5C8EE"/>
@@ -13755,7 +14165,7 @@
                     <a:bodyPr/>
                     <a:lstStyle/>
                     <a:p>
-                      <a:pPr indent="0" marL="0">
+                      <a:pPr marL="0" indent="0">
                         <a:buNone/>
                       </a:pPr>
                       <a:r>
@@ -13776,7 +14186,7 @@
                       </a:endParaRPr>
                     </a:p>
                   </a:txBody>
-                  <a:tcPr marL="91440" marR="91440" marT="45720" marB="45720">
+                  <a:tcPr>
                     <a:lnL w="6350" cap="flat" cmpd="sng" algn="ctr">
                       <a:solidFill>
                         <a:srgbClr val="D5C8EE"/>
@@ -13823,7 +14233,7 @@
                     <a:bodyPr/>
                     <a:lstStyle/>
                     <a:p>
-                      <a:pPr indent="0" marL="0">
+                      <a:pPr marL="0" indent="0">
                         <a:buNone/>
                       </a:pPr>
                       <a:r>
@@ -13844,7 +14254,7 @@
                       </a:endParaRPr>
                     </a:p>
                   </a:txBody>
-                  <a:tcPr marL="91440" marR="91440" marT="45720" marB="45720">
+                  <a:tcPr>
                     <a:lnL w="6350" cap="flat" cmpd="sng" algn="ctr">
                       <a:solidFill>
                         <a:srgbClr val="D5C8EE"/>
@@ -13886,6 +14296,11 @@
                     </a:solidFill>
                   </a:tcPr>
                 </a:tc>
+                <a:extLst>
+                  <a:ext uri="{0D108BD9-81ED-4DB2-BD59-A6C34878D82A}">
+                    <a16:rowId xmlns:a16="http://schemas.microsoft.com/office/drawing/2014/main" val="10004"/>
+                  </a:ext>
+                </a:extLst>
               </a:tr>
               <a:tr h="411480">
                 <a:tc>
@@ -13893,7 +14308,7 @@
                     <a:bodyPr/>
                     <a:lstStyle/>
                     <a:p>
-                      <a:pPr algn="ctr" indent="0" marL="0">
+                      <a:pPr marL="0" indent="0" algn="ctr">
                         <a:buNone/>
                       </a:pPr>
                       <a:r>
@@ -13914,7 +14329,7 @@
                       </a:endParaRPr>
                     </a:p>
                   </a:txBody>
-                  <a:tcPr marL="91440" marR="91440" marT="45720" marB="45720">
+                  <a:tcPr>
                     <a:lnL w="6350" cap="flat" cmpd="sng" algn="ctr">
                       <a:solidFill>
                         <a:srgbClr val="D5C8EE"/>
@@ -13961,7 +14376,7 @@
                     <a:bodyPr/>
                     <a:lstStyle/>
                     <a:p>
-                      <a:pPr indent="0" marL="0">
+                      <a:pPr marL="0" indent="0">
                         <a:buNone/>
                       </a:pPr>
                       <a:r>
@@ -13982,7 +14397,7 @@
                       </a:endParaRPr>
                     </a:p>
                   </a:txBody>
-                  <a:tcPr marL="91440" marR="91440" marT="45720" marB="45720">
+                  <a:tcPr>
                     <a:lnL w="6350" cap="flat" cmpd="sng" algn="ctr">
                       <a:solidFill>
                         <a:srgbClr val="D5C8EE"/>
@@ -14029,7 +14444,7 @@
                     <a:bodyPr/>
                     <a:lstStyle/>
                     <a:p>
-                      <a:pPr indent="0" marL="0">
+                      <a:pPr marL="0" indent="0">
                         <a:buNone/>
                       </a:pPr>
                       <a:r>
@@ -14050,7 +14465,7 @@
                       </a:endParaRPr>
                     </a:p>
                   </a:txBody>
-                  <a:tcPr marL="91440" marR="91440" marT="45720" marB="45720">
+                  <a:tcPr>
                     <a:lnL w="6350" cap="flat" cmpd="sng" algn="ctr">
                       <a:solidFill>
                         <a:srgbClr val="D5C8EE"/>
@@ -14092,6 +14507,11 @@
                     </a:solidFill>
                   </a:tcPr>
                 </a:tc>
+                <a:extLst>
+                  <a:ext uri="{0D108BD9-81ED-4DB2-BD59-A6C34878D82A}">
+                    <a16:rowId xmlns:a16="http://schemas.microsoft.com/office/drawing/2014/main" val="10005"/>
+                  </a:ext>
+                </a:extLst>
               </a:tr>
               <a:tr h="411480">
                 <a:tc>
@@ -14099,7 +14519,7 @@
                     <a:bodyPr/>
                     <a:lstStyle/>
                     <a:p>
-                      <a:pPr algn="ctr" indent="0" marL="0">
+                      <a:pPr marL="0" indent="0" algn="ctr">
                         <a:buNone/>
                       </a:pPr>
                       <a:r>
@@ -14120,7 +14540,7 @@
                       </a:endParaRPr>
                     </a:p>
                   </a:txBody>
-                  <a:tcPr marL="91440" marR="91440" marT="45720" marB="45720">
+                  <a:tcPr>
                     <a:lnL w="6350" cap="flat" cmpd="sng" algn="ctr">
                       <a:solidFill>
                         <a:srgbClr val="D5C8EE"/>
@@ -14167,7 +14587,7 @@
                     <a:bodyPr/>
                     <a:lstStyle/>
                     <a:p>
-                      <a:pPr indent="0" marL="0">
+                      <a:pPr marL="0" indent="0">
                         <a:buNone/>
                       </a:pPr>
                       <a:r>
@@ -14188,7 +14608,7 @@
                       </a:endParaRPr>
                     </a:p>
                   </a:txBody>
-                  <a:tcPr marL="91440" marR="91440" marT="45720" marB="45720">
+                  <a:tcPr>
                     <a:lnL w="6350" cap="flat" cmpd="sng" algn="ctr">
                       <a:solidFill>
                         <a:srgbClr val="D5C8EE"/>
@@ -14235,7 +14655,7 @@
                     <a:bodyPr/>
                     <a:lstStyle/>
                     <a:p>
-                      <a:pPr indent="0" marL="0">
+                      <a:pPr marL="0" indent="0">
                         <a:buNone/>
                       </a:pPr>
                       <a:r>
@@ -14256,7 +14676,7 @@
                       </a:endParaRPr>
                     </a:p>
                   </a:txBody>
-                  <a:tcPr marL="91440" marR="91440" marT="45720" marB="45720">
+                  <a:tcPr>
                     <a:lnL w="6350" cap="flat" cmpd="sng" algn="ctr">
                       <a:solidFill>
                         <a:srgbClr val="D5C8EE"/>
@@ -14298,6 +14718,11 @@
                     </a:solidFill>
                   </a:tcPr>
                 </a:tc>
+                <a:extLst>
+                  <a:ext uri="{0D108BD9-81ED-4DB2-BD59-A6C34878D82A}">
+                    <a16:rowId xmlns:a16="http://schemas.microsoft.com/office/drawing/2014/main" val="10006"/>
+                  </a:ext>
+                </a:extLst>
               </a:tr>
               <a:tr h="411480">
                 <a:tc>
@@ -14305,7 +14730,7 @@
                     <a:bodyPr/>
                     <a:lstStyle/>
                     <a:p>
-                      <a:pPr algn="ctr" indent="0" marL="0">
+                      <a:pPr marL="0" indent="0" algn="ctr">
                         <a:buNone/>
                       </a:pPr>
                       <a:r>
@@ -14326,7 +14751,7 @@
                       </a:endParaRPr>
                     </a:p>
                   </a:txBody>
-                  <a:tcPr marL="91440" marR="91440" marT="45720" marB="45720">
+                  <a:tcPr>
                     <a:lnL w="6350" cap="flat" cmpd="sng" algn="ctr">
                       <a:solidFill>
                         <a:srgbClr val="D5C8EE"/>
@@ -14373,7 +14798,7 @@
                     <a:bodyPr/>
                     <a:lstStyle/>
                     <a:p>
-                      <a:pPr indent="0" marL="0">
+                      <a:pPr marL="0" indent="0">
                         <a:buNone/>
                       </a:pPr>
                       <a:r>
@@ -14394,7 +14819,7 @@
                       </a:endParaRPr>
                     </a:p>
                   </a:txBody>
-                  <a:tcPr marL="91440" marR="91440" marT="45720" marB="45720">
+                  <a:tcPr>
                     <a:lnL w="6350" cap="flat" cmpd="sng" algn="ctr">
                       <a:solidFill>
                         <a:srgbClr val="D5C8EE"/>
@@ -14441,7 +14866,7 @@
                     <a:bodyPr/>
                     <a:lstStyle/>
                     <a:p>
-                      <a:pPr indent="0" marL="0">
+                      <a:pPr marL="0" indent="0">
                         <a:buNone/>
                       </a:pPr>
                       <a:r>
@@ -14462,7 +14887,7 @@
                       </a:endParaRPr>
                     </a:p>
                   </a:txBody>
-                  <a:tcPr marL="91440" marR="91440" marT="45720" marB="45720">
+                  <a:tcPr>
                     <a:lnL w="6350" cap="flat" cmpd="sng" algn="ctr">
                       <a:solidFill>
                         <a:srgbClr val="D5C8EE"/>
@@ -14504,6 +14929,11 @@
                     </a:solidFill>
                   </a:tcPr>
                 </a:tc>
+                <a:extLst>
+                  <a:ext uri="{0D108BD9-81ED-4DB2-BD59-A6C34878D82A}">
+                    <a16:rowId xmlns:a16="http://schemas.microsoft.com/office/drawing/2014/main" val="10007"/>
+                  </a:ext>
+                </a:extLst>
               </a:tr>
               <a:tr h="411480">
                 <a:tc>
@@ -14511,7 +14941,7 @@
                     <a:bodyPr/>
                     <a:lstStyle/>
                     <a:p>
-                      <a:pPr algn="ctr" indent="0" marL="0">
+                      <a:pPr marL="0" indent="0" algn="ctr">
                         <a:buNone/>
                       </a:pPr>
                       <a:r>
@@ -14532,7 +14962,7 @@
                       </a:endParaRPr>
                     </a:p>
                   </a:txBody>
-                  <a:tcPr marL="91440" marR="91440" marT="45720" marB="45720">
+                  <a:tcPr>
                     <a:lnL w="6350" cap="flat" cmpd="sng" algn="ctr">
                       <a:solidFill>
                         <a:srgbClr val="D5C8EE"/>
@@ -14579,7 +15009,7 @@
                     <a:bodyPr/>
                     <a:lstStyle/>
                     <a:p>
-                      <a:pPr indent="0" marL="0">
+                      <a:pPr marL="0" indent="0">
                         <a:buNone/>
                       </a:pPr>
                       <a:r>
@@ -14600,7 +15030,7 @@
                       </a:endParaRPr>
                     </a:p>
                   </a:txBody>
-                  <a:tcPr marL="91440" marR="91440" marT="45720" marB="45720">
+                  <a:tcPr>
                     <a:lnL w="6350" cap="flat" cmpd="sng" algn="ctr">
                       <a:solidFill>
                         <a:srgbClr val="D5C8EE"/>
@@ -14647,7 +15077,7 @@
                     <a:bodyPr/>
                     <a:lstStyle/>
                     <a:p>
-                      <a:pPr indent="0" marL="0">
+                      <a:pPr marL="0" indent="0">
                         <a:buNone/>
                       </a:pPr>
                       <a:r>
@@ -14668,7 +15098,7 @@
                       </a:endParaRPr>
                     </a:p>
                   </a:txBody>
-                  <a:tcPr marL="91440" marR="91440" marT="45720" marB="45720">
+                  <a:tcPr>
                     <a:lnL w="6350" cap="flat" cmpd="sng" algn="ctr">
                       <a:solidFill>
                         <a:srgbClr val="D5C8EE"/>
@@ -14710,6 +15140,11 @@
                     </a:solidFill>
                   </a:tcPr>
                 </a:tc>
+                <a:extLst>
+                  <a:ext uri="{0D108BD9-81ED-4DB2-BD59-A6C34878D82A}">
+                    <a16:rowId xmlns:a16="http://schemas.microsoft.com/office/drawing/2014/main" val="10008"/>
+                  </a:ext>
+                </a:extLst>
               </a:tr>
             </a:tbl>
           </a:graphicData>
@@ -14723,8 +15158,8 @@
         </p:nvSpPr>
         <p:spPr>
           <a:xfrm>
-            <a:off x="457200" y="4937760"/>
-            <a:ext cx="11247120" cy="1371600"/>
+            <a:off x="457200" y="5209064"/>
+            <a:ext cx="11247120" cy="1143000"/>
           </a:xfrm>
           <a:prstGeom prst="rect">
             <a:avLst/>
@@ -14739,6 +15174,13 @@
             <a:prstDash val="solid"/>
           </a:ln>
         </p:spPr>
+        <p:txBody>
+          <a:bodyPr/>
+          <a:lstStyle/>
+          <a:p>
+            <a:endParaRPr lang="zh-TW" altLang="en-US"/>
+          </a:p>
+        </p:txBody>
       </p:sp>
       <p:sp>
         <p:nvSpPr>
@@ -14748,7 +15190,7 @@
         </p:nvSpPr>
         <p:spPr>
           <a:xfrm>
-            <a:off x="640080" y="5029200"/>
+            <a:off x="640080" y="5290456"/>
             <a:ext cx="10972800" cy="365760"/>
           </a:xfrm>
           <a:prstGeom prst="rect">
@@ -14761,7 +15203,7 @@
           <a:bodyPr wrap="square" lIns="0" tIns="0" rIns="0" bIns="0" rtlCol="0" anchor="ctr"/>
           <a:lstStyle/>
           <a:p>
-            <a:pPr indent="0" marL="0">
+            <a:pPr marL="0" indent="0">
               <a:buNone/>
             </a:pPr>
             <a:r>
@@ -14787,7 +15229,7 @@
         </p:nvSpPr>
         <p:spPr>
           <a:xfrm>
-            <a:off x="640080" y="5440680"/>
+            <a:off x="640080" y="5711984"/>
             <a:ext cx="10972800" cy="868680"/>
           </a:xfrm>
           <a:prstGeom prst="rect">
@@ -14800,7 +15242,7 @@
           <a:bodyPr wrap="square" lIns="0" tIns="0" rIns="0" bIns="0" rtlCol="0" anchor="t"/>
           <a:lstStyle/>
           <a:p>
-            <a:pPr indent="0" marL="0">
+            <a:pPr marL="0" indent="0">
               <a:buNone/>
             </a:pPr>
             <a:r>
@@ -14817,7 +15259,7 @@
             <a:endParaRPr lang="en-US" sz="1150" dirty="0"/>
           </a:p>
           <a:p>
-            <a:pPr indent="0" marL="0">
+            <a:pPr marL="0" indent="0">
               <a:buNone/>
             </a:pPr>
             <a:r>
@@ -14834,7 +15276,7 @@
             <a:endParaRPr lang="en-US" sz="1150" dirty="0"/>
           </a:p>
           <a:p>
-            <a:pPr indent="0" marL="0">
+            <a:pPr marL="0" indent="0">
               <a:buNone/>
             </a:pPr>
             <a:r>
@@ -14868,6 +15310,7 @@
         <a:solidFill>
           <a:srgbClr val="FFFFFF"/>
         </a:solidFill>
+        <a:effectLst/>
       </p:bgPr>
     </p:bg>
     <p:spTree>
@@ -14908,6 +15351,13 @@
             <a:prstDash val="solid"/>
           </a:ln>
         </p:spPr>
+        <p:txBody>
+          <a:bodyPr/>
+          <a:lstStyle/>
+          <a:p>
+            <a:endParaRPr lang="zh-TW" altLang="en-US"/>
+          </a:p>
+        </p:txBody>
       </p:sp>
       <p:sp>
         <p:nvSpPr>
@@ -14930,7 +15380,7 @@
           <a:bodyPr wrap="square" lIns="0" tIns="0" rIns="0" bIns="0" rtlCol="0" anchor="t"/>
           <a:lstStyle/>
           <a:p>
-            <a:pPr indent="0" marL="0">
+            <a:pPr marL="0" indent="0">
               <a:buNone/>
             </a:pPr>
             <a:r>
@@ -14969,7 +15419,7 @@
           <a:bodyPr wrap="square" lIns="0" tIns="0" rIns="0" bIns="0" rtlCol="0" anchor="t"/>
           <a:lstStyle/>
           <a:p>
-            <a:pPr indent="0" marL="0">
+            <a:pPr marL="0" indent="0">
               <a:buNone/>
             </a:pPr>
             <a:r>
@@ -15008,7 +15458,7 @@
           <a:bodyPr wrap="square" lIns="0" tIns="0" rIns="0" bIns="0" rtlCol="0" anchor="ctr"/>
           <a:lstStyle/>
           <a:p>
-            <a:pPr indent="0" marL="0">
+            <a:pPr marL="0" indent="0">
               <a:buNone/>
             </a:pPr>
             <a:r>
@@ -15047,7 +15497,7 @@
           <a:bodyPr wrap="square" lIns="0" tIns="0" rIns="0" bIns="0" rtlCol="0" anchor="ctr"/>
           <a:lstStyle/>
           <a:p>
-            <a:pPr algn="r" indent="0" marL="0">
+            <a:pPr marL="0" indent="0" algn="r">
               <a:buNone/>
             </a:pPr>
             <a:r>
@@ -15086,7 +15536,7 @@
           <a:bodyPr wrap="square" lIns="0" tIns="0" rIns="0" bIns="0" rtlCol="0" anchor="ctr"/>
           <a:lstStyle/>
           <a:p>
-            <a:pPr algn="r" indent="0" marL="0">
+            <a:pPr marL="0" indent="0" algn="r">
               <a:buNone/>
             </a:pPr>
             <a:r>
@@ -15128,6 +15578,13 @@
             <a:prstDash val="solid"/>
           </a:ln>
         </p:spPr>
+        <p:txBody>
+          <a:bodyPr/>
+          <a:lstStyle/>
+          <a:p>
+            <a:endParaRPr lang="zh-TW" altLang="en-US"/>
+          </a:p>
+        </p:txBody>
       </p:sp>
       <p:sp>
         <p:nvSpPr>
@@ -15150,7 +15607,7 @@
           <a:bodyPr wrap="square" lIns="0" tIns="0" rIns="0" bIns="0" rtlCol="0" anchor="ctr"/>
           <a:lstStyle/>
           <a:p>
-            <a:pPr indent="0" marL="0">
+            <a:pPr marL="0" indent="0">
               <a:buNone/>
             </a:pPr>
             <a:r>
@@ -15189,7 +15646,7 @@
           <a:bodyPr wrap="square" lIns="0" tIns="0" rIns="0" bIns="0" rtlCol="0" anchor="ctr"/>
           <a:lstStyle/>
           <a:p>
-            <a:pPr indent="0" marL="0">
+            <a:pPr marL="0" indent="0">
               <a:buNone/>
             </a:pPr>
             <a:r>
@@ -15228,7 +15685,7 @@
           <a:bodyPr wrap="square" lIns="0" tIns="0" rIns="0" bIns="0" rtlCol="0" anchor="ctr"/>
           <a:lstStyle/>
           <a:p>
-            <a:pPr indent="0" marL="0">
+            <a:pPr marL="0" indent="0">
               <a:buNone/>
             </a:pPr>
             <a:r>
@@ -15270,6 +15727,13 @@
             <a:prstDash val="solid"/>
           </a:ln>
         </p:spPr>
+        <p:txBody>
+          <a:bodyPr/>
+          <a:lstStyle/>
+          <a:p>
+            <a:endParaRPr lang="zh-TW" altLang="en-US"/>
+          </a:p>
+        </p:txBody>
       </p:sp>
       <p:sp>
         <p:nvSpPr>
@@ -15292,7 +15756,7 @@
           <a:bodyPr wrap="square" lIns="0" tIns="0" rIns="0" bIns="0" rtlCol="0" anchor="ctr"/>
           <a:lstStyle/>
           <a:p>
-            <a:pPr indent="0" marL="0">
+            <a:pPr marL="0" indent="0">
               <a:buNone/>
             </a:pPr>
             <a:r>
@@ -15331,7 +15795,7 @@
           <a:bodyPr wrap="square" lIns="0" tIns="0" rIns="0" bIns="0" rtlCol="0" anchor="ctr"/>
           <a:lstStyle/>
           <a:p>
-            <a:pPr indent="0" marL="0">
+            <a:pPr marL="0" indent="0">
               <a:buNone/>
             </a:pPr>
             <a:r>
@@ -15370,7 +15834,7 @@
           <a:bodyPr wrap="square" lIns="0" tIns="0" rIns="0" bIns="0" rtlCol="0" anchor="ctr"/>
           <a:lstStyle/>
           <a:p>
-            <a:pPr indent="0" marL="0">
+            <a:pPr marL="0" indent="0">
               <a:buNone/>
             </a:pPr>
             <a:r>
@@ -15412,6 +15876,13 @@
             <a:prstDash val="solid"/>
           </a:ln>
         </p:spPr>
+        <p:txBody>
+          <a:bodyPr/>
+          <a:lstStyle/>
+          <a:p>
+            <a:endParaRPr lang="zh-TW" altLang="en-US"/>
+          </a:p>
+        </p:txBody>
       </p:sp>
       <p:sp>
         <p:nvSpPr>
@@ -15434,7 +15905,7 @@
           <a:bodyPr wrap="square" lIns="0" tIns="0" rIns="0" bIns="0" rtlCol="0" anchor="ctr"/>
           <a:lstStyle/>
           <a:p>
-            <a:pPr indent="0" marL="0">
+            <a:pPr marL="0" indent="0">
               <a:buNone/>
             </a:pPr>
             <a:r>
@@ -15473,7 +15944,7 @@
           <a:bodyPr wrap="square" lIns="0" tIns="0" rIns="0" bIns="0" rtlCol="0" anchor="ctr"/>
           <a:lstStyle/>
           <a:p>
-            <a:pPr indent="0" marL="0">
+            <a:pPr marL="0" indent="0">
               <a:buNone/>
             </a:pPr>
             <a:r>
@@ -15512,7 +15983,7 @@
           <a:bodyPr wrap="square" lIns="0" tIns="0" rIns="0" bIns="0" rtlCol="0" anchor="ctr"/>
           <a:lstStyle/>
           <a:p>
-            <a:pPr indent="0" marL="0">
+            <a:pPr marL="0" indent="0">
               <a:buNone/>
             </a:pPr>
             <a:r>
@@ -15554,6 +16025,13 @@
             <a:prstDash val="solid"/>
           </a:ln>
         </p:spPr>
+        <p:txBody>
+          <a:bodyPr/>
+          <a:lstStyle/>
+          <a:p>
+            <a:endParaRPr lang="zh-TW" altLang="en-US"/>
+          </a:p>
+        </p:txBody>
       </p:sp>
       <p:sp>
         <p:nvSpPr>
@@ -15576,7 +16054,7 @@
           <a:bodyPr wrap="square" lIns="0" tIns="0" rIns="0" bIns="0" rtlCol="0" anchor="ctr"/>
           <a:lstStyle/>
           <a:p>
-            <a:pPr indent="0" marL="0">
+            <a:pPr marL="0" indent="0">
               <a:buNone/>
             </a:pPr>
             <a:r>
@@ -15615,7 +16093,7 @@
           <a:bodyPr wrap="square" lIns="0" tIns="0" rIns="0" bIns="0" rtlCol="0" anchor="ctr"/>
           <a:lstStyle/>
           <a:p>
-            <a:pPr indent="0" marL="0">
+            <a:pPr marL="0" indent="0">
               <a:buNone/>
             </a:pPr>
             <a:r>
@@ -15654,7 +16132,7 @@
           <a:bodyPr wrap="square" lIns="0" tIns="0" rIns="0" bIns="0" rtlCol="0" anchor="ctr"/>
           <a:lstStyle/>
           <a:p>
-            <a:pPr indent="0" marL="0">
+            <a:pPr marL="0" indent="0">
               <a:buNone/>
             </a:pPr>
             <a:r>
@@ -15696,6 +16174,13 @@
             <a:prstDash val="solid"/>
           </a:ln>
         </p:spPr>
+        <p:txBody>
+          <a:bodyPr/>
+          <a:lstStyle/>
+          <a:p>
+            <a:endParaRPr lang="zh-TW" altLang="en-US"/>
+          </a:p>
+        </p:txBody>
       </p:sp>
       <p:sp>
         <p:nvSpPr>
@@ -15718,7 +16203,7 @@
           <a:bodyPr wrap="square" lIns="0" tIns="0" rIns="0" bIns="0" rtlCol="0" anchor="ctr"/>
           <a:lstStyle/>
           <a:p>
-            <a:pPr indent="0" marL="0">
+            <a:pPr marL="0" indent="0">
               <a:buNone/>
             </a:pPr>
             <a:r>
@@ -15757,7 +16242,7 @@
           <a:bodyPr wrap="square" lIns="0" tIns="0" rIns="0" bIns="0" rtlCol="0" anchor="ctr"/>
           <a:lstStyle/>
           <a:p>
-            <a:pPr indent="0" marL="0">
+            <a:pPr marL="0" indent="0">
               <a:buNone/>
             </a:pPr>
             <a:r>
@@ -15796,7 +16281,7 @@
           <a:bodyPr wrap="square" lIns="0" tIns="0" rIns="0" bIns="0" rtlCol="0" anchor="ctr"/>
           <a:lstStyle/>
           <a:p>
-            <a:pPr indent="0" marL="0">
+            <a:pPr marL="0" indent="0">
               <a:buNone/>
             </a:pPr>
             <a:r>
@@ -15838,6 +16323,13 @@
             <a:prstDash val="solid"/>
           </a:ln>
         </p:spPr>
+        <p:txBody>
+          <a:bodyPr/>
+          <a:lstStyle/>
+          <a:p>
+            <a:endParaRPr lang="zh-TW" altLang="en-US"/>
+          </a:p>
+        </p:txBody>
       </p:sp>
       <p:sp>
         <p:nvSpPr>
@@ -15860,7 +16352,7 @@
           <a:bodyPr wrap="square" lIns="0" tIns="0" rIns="0" bIns="0" rtlCol="0" anchor="ctr"/>
           <a:lstStyle/>
           <a:p>
-            <a:pPr indent="0" marL="0">
+            <a:pPr marL="0" indent="0">
               <a:buNone/>
             </a:pPr>
             <a:r>
@@ -15899,7 +16391,7 @@
           <a:bodyPr wrap="square" lIns="0" tIns="0" rIns="0" bIns="0" rtlCol="0" anchor="ctr"/>
           <a:lstStyle/>
           <a:p>
-            <a:pPr indent="0" marL="0">
+            <a:pPr marL="0" indent="0">
               <a:buNone/>
             </a:pPr>
             <a:r>
@@ -15938,7 +16430,7 @@
           <a:bodyPr wrap="square" lIns="0" tIns="0" rIns="0" bIns="0" rtlCol="0" anchor="ctr"/>
           <a:lstStyle/>
           <a:p>
-            <a:pPr indent="0" marL="0">
+            <a:pPr marL="0" indent="0">
               <a:buNone/>
             </a:pPr>
             <a:r>
@@ -15980,6 +16472,13 @@
             <a:prstDash val="solid"/>
           </a:ln>
         </p:spPr>
+        <p:txBody>
+          <a:bodyPr/>
+          <a:lstStyle/>
+          <a:p>
+            <a:endParaRPr lang="zh-TW" altLang="en-US"/>
+          </a:p>
+        </p:txBody>
       </p:sp>
       <p:sp>
         <p:nvSpPr>
@@ -16002,7 +16501,7 @@
           <a:bodyPr wrap="square" lIns="0" tIns="0" rIns="0" bIns="0" rtlCol="0" anchor="ctr"/>
           <a:lstStyle/>
           <a:p>
-            <a:pPr indent="0" marL="0">
+            <a:pPr marL="0" indent="0">
               <a:buNone/>
             </a:pPr>
             <a:r>
@@ -16041,7 +16540,7 @@
           <a:bodyPr wrap="square" lIns="0" tIns="0" rIns="0" bIns="0" rtlCol="0" anchor="ctr"/>
           <a:lstStyle/>
           <a:p>
-            <a:pPr indent="0" marL="0">
+            <a:pPr marL="0" indent="0">
               <a:buNone/>
             </a:pPr>
             <a:r>
@@ -16080,7 +16579,7 @@
           <a:bodyPr wrap="square" lIns="0" tIns="0" rIns="0" bIns="0" rtlCol="0" anchor="ctr"/>
           <a:lstStyle/>
           <a:p>
-            <a:pPr indent="0" marL="0">
+            <a:pPr marL="0" indent="0">
               <a:buNone/>
             </a:pPr>
             <a:r>
@@ -16122,6 +16621,13 @@
             <a:prstDash val="solid"/>
           </a:ln>
         </p:spPr>
+        <p:txBody>
+          <a:bodyPr/>
+          <a:lstStyle/>
+          <a:p>
+            <a:endParaRPr lang="zh-TW" altLang="en-US"/>
+          </a:p>
+        </p:txBody>
       </p:sp>
       <p:sp>
         <p:nvSpPr>
@@ -16144,7 +16650,7 @@
           <a:bodyPr wrap="square" lIns="0" tIns="0" rIns="0" bIns="0" rtlCol="0" anchor="ctr"/>
           <a:lstStyle/>
           <a:p>
-            <a:pPr indent="0" marL="0">
+            <a:pPr marL="0" indent="0">
               <a:buNone/>
             </a:pPr>
             <a:r>
@@ -16183,7 +16689,7 @@
           <a:bodyPr wrap="square" lIns="0" tIns="0" rIns="0" bIns="0" rtlCol="0" anchor="ctr"/>
           <a:lstStyle/>
           <a:p>
-            <a:pPr indent="0" marL="0">
+            <a:pPr marL="0" indent="0">
               <a:buNone/>
             </a:pPr>
             <a:r>
@@ -16222,7 +16728,7 @@
           <a:bodyPr wrap="square" lIns="0" tIns="0" rIns="0" bIns="0" rtlCol="0" anchor="ctr"/>
           <a:lstStyle/>
           <a:p>
-            <a:pPr indent="0" marL="0">
+            <a:pPr marL="0" indent="0">
               <a:buNone/>
             </a:pPr>
             <a:r>
@@ -16264,6 +16770,13 @@
             <a:prstDash val="solid"/>
           </a:ln>
         </p:spPr>
+        <p:txBody>
+          <a:bodyPr/>
+          <a:lstStyle/>
+          <a:p>
+            <a:endParaRPr lang="zh-TW" altLang="en-US"/>
+          </a:p>
+        </p:txBody>
       </p:sp>
       <p:sp>
         <p:nvSpPr>
@@ -16286,7 +16799,7 @@
           <a:bodyPr wrap="square" lIns="0" tIns="0" rIns="0" bIns="0" rtlCol="0" anchor="ctr"/>
           <a:lstStyle/>
           <a:p>
-            <a:pPr indent="0" marL="0">
+            <a:pPr marL="0" indent="0">
               <a:buNone/>
             </a:pPr>
             <a:r>
@@ -16325,7 +16838,7 @@
           <a:bodyPr wrap="square" lIns="0" tIns="0" rIns="0" bIns="0" rtlCol="0" anchor="ctr"/>
           <a:lstStyle/>
           <a:p>
-            <a:pPr indent="0" marL="0">
+            <a:pPr marL="0" indent="0">
               <a:buNone/>
             </a:pPr>
             <a:r>
@@ -16364,7 +16877,7 @@
           <a:bodyPr wrap="square" lIns="0" tIns="0" rIns="0" bIns="0" rtlCol="0" anchor="ctr"/>
           <a:lstStyle/>
           <a:p>
-            <a:pPr indent="0" marL="0">
+            <a:pPr marL="0" indent="0">
               <a:buNone/>
             </a:pPr>
             <a:r>
@@ -16398,6 +16911,7 @@
         <a:solidFill>
           <a:srgbClr val="FFFFFF"/>
         </a:solidFill>
+        <a:effectLst/>
       </p:bgPr>
     </p:bg>
     <p:spTree>
@@ -16438,6 +16952,13 @@
             <a:prstDash val="solid"/>
           </a:ln>
         </p:spPr>
+        <p:txBody>
+          <a:bodyPr/>
+          <a:lstStyle/>
+          <a:p>
+            <a:endParaRPr lang="zh-TW" altLang="en-US"/>
+          </a:p>
+        </p:txBody>
       </p:sp>
       <p:sp>
         <p:nvSpPr>
@@ -16460,7 +16981,7 @@
           <a:bodyPr wrap="square" lIns="0" tIns="0" rIns="0" bIns="0" rtlCol="0" anchor="t"/>
           <a:lstStyle/>
           <a:p>
-            <a:pPr indent="0" marL="0">
+            <a:pPr marL="0" indent="0">
               <a:buNone/>
             </a:pPr>
             <a:r>
@@ -16499,7 +17020,7 @@
           <a:bodyPr wrap="square" lIns="0" tIns="0" rIns="0" bIns="0" rtlCol="0" anchor="t"/>
           <a:lstStyle/>
           <a:p>
-            <a:pPr indent="0" marL="0">
+            <a:pPr marL="0" indent="0">
               <a:buNone/>
             </a:pPr>
             <a:r>
@@ -16538,7 +17059,7 @@
           <a:bodyPr wrap="square" lIns="0" tIns="0" rIns="0" bIns="0" rtlCol="0" anchor="ctr"/>
           <a:lstStyle/>
           <a:p>
-            <a:pPr indent="0" marL="0">
+            <a:pPr marL="0" indent="0">
               <a:buNone/>
             </a:pPr>
             <a:r>
@@ -16577,7 +17098,7 @@
           <a:bodyPr wrap="square" lIns="0" tIns="0" rIns="0" bIns="0" rtlCol="0" anchor="ctr"/>
           <a:lstStyle/>
           <a:p>
-            <a:pPr algn="r" indent="0" marL="0">
+            <a:pPr marL="0" indent="0" algn="r">
               <a:buNone/>
             </a:pPr>
             <a:r>
@@ -16616,7 +17137,7 @@
           <a:bodyPr wrap="square" lIns="0" tIns="0" rIns="0" bIns="0" rtlCol="0" anchor="ctr"/>
           <a:lstStyle/>
           <a:p>
-            <a:pPr algn="r" indent="0" marL="0">
+            <a:pPr marL="0" indent="0" algn="r">
               <a:buNone/>
             </a:pPr>
             <a:r>
@@ -16658,6 +17179,13 @@
             <a:prstDash val="solid"/>
           </a:ln>
         </p:spPr>
+        <p:txBody>
+          <a:bodyPr/>
+          <a:lstStyle/>
+          <a:p>
+            <a:endParaRPr lang="zh-TW" altLang="en-US"/>
+          </a:p>
+        </p:txBody>
       </p:sp>
       <p:sp>
         <p:nvSpPr>
@@ -16683,6 +17211,13 @@
             <a:prstDash val="solid"/>
           </a:ln>
         </p:spPr>
+        <p:txBody>
+          <a:bodyPr/>
+          <a:lstStyle/>
+          <a:p>
+            <a:endParaRPr lang="zh-TW" altLang="en-US"/>
+          </a:p>
+        </p:txBody>
       </p:sp>
       <p:sp>
         <p:nvSpPr>
@@ -16705,7 +17240,7 @@
           <a:bodyPr wrap="square" lIns="0" tIns="0" rIns="0" bIns="0" rtlCol="0" anchor="ctr"/>
           <a:lstStyle/>
           <a:p>
-            <a:pPr algn="ctr" indent="0" marL="0">
+            <a:pPr marL="0" indent="0" algn="ctr">
               <a:buNone/>
             </a:pPr>
             <a:r>
@@ -16744,7 +17279,7 @@
           <a:bodyPr wrap="square" lIns="0" tIns="0" rIns="0" bIns="0" rtlCol="0" anchor="ctr"/>
           <a:lstStyle/>
           <a:p>
-            <a:pPr indent="0" marL="0">
+            <a:pPr marL="0" indent="0">
               <a:buNone/>
             </a:pPr>
             <a:r>
@@ -16783,7 +17318,7 @@
           <a:bodyPr wrap="square" lIns="0" tIns="0" rIns="0" bIns="0" rtlCol="0" anchor="ctr"/>
           <a:lstStyle/>
           <a:p>
-            <a:pPr indent="0" marL="0">
+            <a:pPr marL="0" indent="0">
               <a:buNone/>
             </a:pPr>
             <a:r>
@@ -16825,6 +17360,13 @@
             <a:prstDash val="solid"/>
           </a:ln>
         </p:spPr>
+        <p:txBody>
+          <a:bodyPr/>
+          <a:lstStyle/>
+          <a:p>
+            <a:endParaRPr lang="zh-TW" altLang="en-US"/>
+          </a:p>
+        </p:txBody>
       </p:sp>
       <p:sp>
         <p:nvSpPr>
@@ -16850,6 +17392,13 @@
             <a:prstDash val="solid"/>
           </a:ln>
         </p:spPr>
+        <p:txBody>
+          <a:bodyPr/>
+          <a:lstStyle/>
+          <a:p>
+            <a:endParaRPr lang="zh-TW" altLang="en-US"/>
+          </a:p>
+        </p:txBody>
       </p:sp>
       <p:sp>
         <p:nvSpPr>
@@ -16872,7 +17421,7 @@
           <a:bodyPr wrap="square" lIns="0" tIns="0" rIns="0" bIns="0" rtlCol="0" anchor="ctr"/>
           <a:lstStyle/>
           <a:p>
-            <a:pPr algn="ctr" indent="0" marL="0">
+            <a:pPr marL="0" indent="0" algn="ctr">
               <a:buNone/>
             </a:pPr>
             <a:r>
@@ -16911,7 +17460,7 @@
           <a:bodyPr wrap="square" lIns="0" tIns="0" rIns="0" bIns="0" rtlCol="0" anchor="ctr"/>
           <a:lstStyle/>
           <a:p>
-            <a:pPr indent="0" marL="0">
+            <a:pPr marL="0" indent="0">
               <a:buNone/>
             </a:pPr>
             <a:r>
@@ -16950,7 +17499,7 @@
           <a:bodyPr wrap="square" lIns="0" tIns="0" rIns="0" bIns="0" rtlCol="0" anchor="ctr"/>
           <a:lstStyle/>
           <a:p>
-            <a:pPr indent="0" marL="0">
+            <a:pPr marL="0" indent="0">
               <a:buNone/>
             </a:pPr>
             <a:r>
@@ -16992,6 +17541,13 @@
             <a:prstDash val="solid"/>
           </a:ln>
         </p:spPr>
+        <p:txBody>
+          <a:bodyPr/>
+          <a:lstStyle/>
+          <a:p>
+            <a:endParaRPr lang="zh-TW" altLang="en-US"/>
+          </a:p>
+        </p:txBody>
       </p:sp>
       <p:sp>
         <p:nvSpPr>
@@ -17017,6 +17573,13 @@
             <a:prstDash val="solid"/>
           </a:ln>
         </p:spPr>
+        <p:txBody>
+          <a:bodyPr/>
+          <a:lstStyle/>
+          <a:p>
+            <a:endParaRPr lang="zh-TW" altLang="en-US"/>
+          </a:p>
+        </p:txBody>
       </p:sp>
       <p:sp>
         <p:nvSpPr>
@@ -17039,7 +17602,7 @@
           <a:bodyPr wrap="square" lIns="0" tIns="0" rIns="0" bIns="0" rtlCol="0" anchor="ctr"/>
           <a:lstStyle/>
           <a:p>
-            <a:pPr algn="ctr" indent="0" marL="0">
+            <a:pPr marL="0" indent="0" algn="ctr">
               <a:buNone/>
             </a:pPr>
             <a:r>
@@ -17078,7 +17641,7 @@
           <a:bodyPr wrap="square" lIns="0" tIns="0" rIns="0" bIns="0" rtlCol="0" anchor="ctr"/>
           <a:lstStyle/>
           <a:p>
-            <a:pPr indent="0" marL="0">
+            <a:pPr marL="0" indent="0">
               <a:buNone/>
             </a:pPr>
             <a:r>
@@ -17117,7 +17680,7 @@
           <a:bodyPr wrap="square" lIns="0" tIns="0" rIns="0" bIns="0" rtlCol="0" anchor="ctr"/>
           <a:lstStyle/>
           <a:p>
-            <a:pPr indent="0" marL="0">
+            <a:pPr marL="0" indent="0">
               <a:buNone/>
             </a:pPr>
             <a:r>
@@ -17159,6 +17722,13 @@
             <a:prstDash val="solid"/>
           </a:ln>
         </p:spPr>
+        <p:txBody>
+          <a:bodyPr/>
+          <a:lstStyle/>
+          <a:p>
+            <a:endParaRPr lang="zh-TW" altLang="en-US"/>
+          </a:p>
+        </p:txBody>
       </p:sp>
       <p:sp>
         <p:nvSpPr>
@@ -17184,6 +17754,13 @@
             <a:prstDash val="solid"/>
           </a:ln>
         </p:spPr>
+        <p:txBody>
+          <a:bodyPr/>
+          <a:lstStyle/>
+          <a:p>
+            <a:endParaRPr lang="zh-TW" altLang="en-US"/>
+          </a:p>
+        </p:txBody>
       </p:sp>
       <p:sp>
         <p:nvSpPr>
@@ -17206,7 +17783,7 @@
           <a:bodyPr wrap="square" lIns="0" tIns="0" rIns="0" bIns="0" rtlCol="0" anchor="ctr"/>
           <a:lstStyle/>
           <a:p>
-            <a:pPr algn="ctr" indent="0" marL="0">
+            <a:pPr marL="0" indent="0" algn="ctr">
               <a:buNone/>
             </a:pPr>
             <a:r>
@@ -17245,7 +17822,7 @@
           <a:bodyPr wrap="square" lIns="0" tIns="0" rIns="0" bIns="0" rtlCol="0" anchor="ctr"/>
           <a:lstStyle/>
           <a:p>
-            <a:pPr indent="0" marL="0">
+            <a:pPr marL="0" indent="0">
               <a:buNone/>
             </a:pPr>
             <a:r>
@@ -17284,7 +17861,7 @@
           <a:bodyPr wrap="square" lIns="0" tIns="0" rIns="0" bIns="0" rtlCol="0" anchor="ctr"/>
           <a:lstStyle/>
           <a:p>
-            <a:pPr indent="0" marL="0">
+            <a:pPr marL="0" indent="0">
               <a:buNone/>
             </a:pPr>
             <a:r>
@@ -17323,7 +17900,7 @@
           <a:bodyPr wrap="square" lIns="0" tIns="0" rIns="0" bIns="0" rtlCol="0" anchor="ctr"/>
           <a:lstStyle/>
           <a:p>
-            <a:pPr algn="ctr" indent="0" marL="0">
+            <a:pPr marL="0" indent="0" algn="ctr">
               <a:buNone/>
             </a:pPr>
             <a:r>
@@ -17357,6 +17934,7 @@
         <a:solidFill>
           <a:srgbClr val="FFFFFF"/>
         </a:solidFill>
+        <a:effectLst/>
       </p:bgPr>
     </p:bg>
     <p:spTree>
@@ -17397,6 +17975,13 @@
             <a:prstDash val="solid"/>
           </a:ln>
         </p:spPr>
+        <p:txBody>
+          <a:bodyPr/>
+          <a:lstStyle/>
+          <a:p>
+            <a:endParaRPr lang="zh-TW" altLang="en-US"/>
+          </a:p>
+        </p:txBody>
       </p:sp>
       <p:sp>
         <p:nvSpPr>
@@ -17419,7 +18004,7 @@
           <a:bodyPr wrap="square" lIns="0" tIns="0" rIns="0" bIns="0" rtlCol="0" anchor="t"/>
           <a:lstStyle/>
           <a:p>
-            <a:pPr indent="0" marL="0">
+            <a:pPr marL="0" indent="0">
               <a:buNone/>
             </a:pPr>
             <a:r>
@@ -17458,7 +18043,7 @@
           <a:bodyPr wrap="square" lIns="0" tIns="0" rIns="0" bIns="0" rtlCol="0" anchor="t"/>
           <a:lstStyle/>
           <a:p>
-            <a:pPr indent="0" marL="0">
+            <a:pPr marL="0" indent="0">
               <a:buNone/>
             </a:pPr>
             <a:r>
@@ -17497,7 +18082,7 @@
           <a:bodyPr wrap="square" lIns="0" tIns="0" rIns="0" bIns="0" rtlCol="0" anchor="ctr"/>
           <a:lstStyle/>
           <a:p>
-            <a:pPr indent="0" marL="0">
+            <a:pPr marL="0" indent="0">
               <a:buNone/>
             </a:pPr>
             <a:r>
@@ -17536,7 +18121,7 @@
           <a:bodyPr wrap="square" lIns="0" tIns="0" rIns="0" bIns="0" rtlCol="0" anchor="ctr"/>
           <a:lstStyle/>
           <a:p>
-            <a:pPr algn="r" indent="0" marL="0">
+            <a:pPr marL="0" indent="0" algn="r">
               <a:buNone/>
             </a:pPr>
             <a:r>
@@ -17575,7 +18160,7 @@
           <a:bodyPr wrap="square" lIns="0" tIns="0" rIns="0" bIns="0" rtlCol="0" anchor="ctr"/>
           <a:lstStyle/>
           <a:p>
-            <a:pPr algn="r" indent="0" marL="0">
+            <a:pPr marL="0" indent="0" algn="r">
               <a:buNone/>
             </a:pPr>
             <a:r>
@@ -17617,6 +18202,13 @@
             <a:prstDash val="solid"/>
           </a:ln>
         </p:spPr>
+        <p:txBody>
+          <a:bodyPr/>
+          <a:lstStyle/>
+          <a:p>
+            <a:endParaRPr lang="zh-TW" altLang="en-US"/>
+          </a:p>
+        </p:txBody>
       </p:sp>
       <p:sp>
         <p:nvSpPr>
@@ -17642,6 +18234,13 @@
             <a:prstDash val="solid"/>
           </a:ln>
         </p:spPr>
+        <p:txBody>
+          <a:bodyPr/>
+          <a:lstStyle/>
+          <a:p>
+            <a:endParaRPr lang="zh-TW" altLang="en-US"/>
+          </a:p>
+        </p:txBody>
       </p:sp>
       <p:sp>
         <p:nvSpPr>
@@ -17664,7 +18263,7 @@
           <a:bodyPr wrap="square" lIns="0" tIns="0" rIns="0" bIns="0" rtlCol="0" anchor="ctr"/>
           <a:lstStyle/>
           <a:p>
-            <a:pPr indent="0" marL="0">
+            <a:pPr marL="0" indent="0">
               <a:buNone/>
             </a:pPr>
             <a:r>
@@ -17703,7 +18302,7 @@
           <a:bodyPr wrap="square" lIns="0" tIns="0" rIns="0" bIns="0" rtlCol="0" anchor="ctr"/>
           <a:lstStyle/>
           <a:p>
-            <a:pPr indent="0" marL="0">
+            <a:pPr marL="0" indent="0">
               <a:buNone/>
             </a:pPr>
             <a:r>
@@ -17742,7 +18341,7 @@
           <a:bodyPr wrap="square" lIns="0" tIns="0" rIns="0" bIns="0" rtlCol="0" anchor="ctr"/>
           <a:lstStyle/>
           <a:p>
-            <a:pPr indent="0" marL="0">
+            <a:pPr marL="0" indent="0">
               <a:buNone/>
             </a:pPr>
             <a:r>
@@ -17784,6 +18383,13 @@
             <a:prstDash val="solid"/>
           </a:ln>
         </p:spPr>
+        <p:txBody>
+          <a:bodyPr/>
+          <a:lstStyle/>
+          <a:p>
+            <a:endParaRPr lang="zh-TW" altLang="en-US"/>
+          </a:p>
+        </p:txBody>
       </p:sp>
       <p:sp>
         <p:nvSpPr>
@@ -17809,6 +18415,13 @@
             <a:prstDash val="solid"/>
           </a:ln>
         </p:spPr>
+        <p:txBody>
+          <a:bodyPr/>
+          <a:lstStyle/>
+          <a:p>
+            <a:endParaRPr lang="zh-TW" altLang="en-US"/>
+          </a:p>
+        </p:txBody>
       </p:sp>
       <p:sp>
         <p:nvSpPr>
@@ -17831,7 +18444,7 @@
           <a:bodyPr wrap="square" lIns="0" tIns="0" rIns="0" bIns="0" rtlCol="0" anchor="ctr"/>
           <a:lstStyle/>
           <a:p>
-            <a:pPr indent="0" marL="0">
+            <a:pPr marL="0" indent="0">
               <a:buNone/>
             </a:pPr>
             <a:r>
@@ -17870,7 +18483,7 @@
           <a:bodyPr wrap="square" lIns="0" tIns="0" rIns="0" bIns="0" rtlCol="0" anchor="ctr"/>
           <a:lstStyle/>
           <a:p>
-            <a:pPr indent="0" marL="0">
+            <a:pPr marL="0" indent="0">
               <a:buNone/>
             </a:pPr>
             <a:r>
@@ -17909,7 +18522,7 @@
           <a:bodyPr wrap="square" lIns="0" tIns="0" rIns="0" bIns="0" rtlCol="0" anchor="ctr"/>
           <a:lstStyle/>
           <a:p>
-            <a:pPr indent="0" marL="0">
+            <a:pPr marL="0" indent="0">
               <a:buNone/>
             </a:pPr>
             <a:r>
@@ -17951,6 +18564,13 @@
             <a:prstDash val="solid"/>
           </a:ln>
         </p:spPr>
+        <p:txBody>
+          <a:bodyPr/>
+          <a:lstStyle/>
+          <a:p>
+            <a:endParaRPr lang="zh-TW" altLang="en-US"/>
+          </a:p>
+        </p:txBody>
       </p:sp>
       <p:sp>
         <p:nvSpPr>
@@ -17976,6 +18596,13 @@
             <a:prstDash val="solid"/>
           </a:ln>
         </p:spPr>
+        <p:txBody>
+          <a:bodyPr/>
+          <a:lstStyle/>
+          <a:p>
+            <a:endParaRPr lang="zh-TW" altLang="en-US"/>
+          </a:p>
+        </p:txBody>
       </p:sp>
       <p:sp>
         <p:nvSpPr>
@@ -17998,7 +18625,7 @@
           <a:bodyPr wrap="square" lIns="0" tIns="0" rIns="0" bIns="0" rtlCol="0" anchor="ctr"/>
           <a:lstStyle/>
           <a:p>
-            <a:pPr indent="0" marL="0">
+            <a:pPr marL="0" indent="0">
               <a:buNone/>
             </a:pPr>
             <a:r>
@@ -18037,7 +18664,7 @@
           <a:bodyPr wrap="square" lIns="0" tIns="0" rIns="0" bIns="0" rtlCol="0" anchor="ctr"/>
           <a:lstStyle/>
           <a:p>
-            <a:pPr indent="0" marL="0">
+            <a:pPr marL="0" indent="0">
               <a:buNone/>
             </a:pPr>
             <a:r>
@@ -18076,7 +18703,7 @@
           <a:bodyPr wrap="square" lIns="0" tIns="0" rIns="0" bIns="0" rtlCol="0" anchor="ctr"/>
           <a:lstStyle/>
           <a:p>
-            <a:pPr indent="0" marL="0">
+            <a:pPr marL="0" indent="0">
               <a:buNone/>
             </a:pPr>
             <a:r>
@@ -18118,6 +18745,13 @@
             <a:prstDash val="solid"/>
           </a:ln>
         </p:spPr>
+        <p:txBody>
+          <a:bodyPr/>
+          <a:lstStyle/>
+          <a:p>
+            <a:endParaRPr lang="zh-TW" altLang="en-US"/>
+          </a:p>
+        </p:txBody>
       </p:sp>
       <p:sp>
         <p:nvSpPr>
@@ -18143,6 +18777,13 @@
             <a:prstDash val="solid"/>
           </a:ln>
         </p:spPr>
+        <p:txBody>
+          <a:bodyPr/>
+          <a:lstStyle/>
+          <a:p>
+            <a:endParaRPr lang="zh-TW" altLang="en-US"/>
+          </a:p>
+        </p:txBody>
       </p:sp>
       <p:sp>
         <p:nvSpPr>
@@ -18165,7 +18806,7 @@
           <a:bodyPr wrap="square" lIns="0" tIns="0" rIns="0" bIns="0" rtlCol="0" anchor="ctr"/>
           <a:lstStyle/>
           <a:p>
-            <a:pPr indent="0" marL="0">
+            <a:pPr marL="0" indent="0">
               <a:buNone/>
             </a:pPr>
             <a:r>
@@ -18206,7 +18847,7 @@
           <a:bodyPr wrap="square" lIns="0" tIns="0" rIns="0" bIns="0" rtlCol="0" anchor="ctr"/>
           <a:lstStyle/>
           <a:p>
-            <a:pPr algn="ctr" indent="0" marL="0">
+            <a:pPr marL="0" indent="0" algn="ctr">
               <a:buNone/>
             </a:pPr>
             <a:r>
@@ -18245,7 +18886,7 @@
           <a:bodyPr wrap="square" lIns="0" tIns="0" rIns="0" bIns="0" rtlCol="0" anchor="ctr"/>
           <a:lstStyle/>
           <a:p>
-            <a:pPr indent="0" marL="0">
+            <a:pPr marL="0" indent="0">
               <a:buNone/>
             </a:pPr>
             <a:r>
@@ -18284,7 +18925,7 @@
           <a:bodyPr wrap="square" lIns="0" tIns="0" rIns="0" bIns="0" rtlCol="0" anchor="ctr"/>
           <a:lstStyle/>
           <a:p>
-            <a:pPr indent="0" marL="0">
+            <a:pPr marL="0" indent="0">
               <a:buNone/>
             </a:pPr>
             <a:r>
@@ -18326,6 +18967,13 @@
             <a:prstDash val="solid"/>
           </a:ln>
         </p:spPr>
+        <p:txBody>
+          <a:bodyPr/>
+          <a:lstStyle/>
+          <a:p>
+            <a:endParaRPr lang="zh-TW" altLang="en-US"/>
+          </a:p>
+        </p:txBody>
       </p:sp>
       <p:sp>
         <p:nvSpPr>
@@ -18351,6 +18999,13 @@
             <a:prstDash val="solid"/>
           </a:ln>
         </p:spPr>
+        <p:txBody>
+          <a:bodyPr/>
+          <a:lstStyle/>
+          <a:p>
+            <a:endParaRPr lang="zh-TW" altLang="en-US"/>
+          </a:p>
+        </p:txBody>
       </p:sp>
       <p:sp>
         <p:nvSpPr>
@@ -18373,7 +19028,7 @@
           <a:bodyPr wrap="square" lIns="0" tIns="0" rIns="0" bIns="0" rtlCol="0" anchor="ctr"/>
           <a:lstStyle/>
           <a:p>
-            <a:pPr indent="0" marL="0">
+            <a:pPr marL="0" indent="0">
               <a:buNone/>
             </a:pPr>
             <a:r>
@@ -18412,7 +19067,7 @@
           <a:bodyPr wrap="square" lIns="0" tIns="0" rIns="0" bIns="0" rtlCol="0" anchor="ctr"/>
           <a:lstStyle/>
           <a:p>
-            <a:pPr indent="0" marL="0">
+            <a:pPr marL="0" indent="0">
               <a:buNone/>
             </a:pPr>
             <a:r>
@@ -18451,7 +19106,7 @@
           <a:bodyPr wrap="square" lIns="0" tIns="0" rIns="0" bIns="0" rtlCol="0" anchor="ctr"/>
           <a:lstStyle/>
           <a:p>
-            <a:pPr indent="0" marL="0">
+            <a:pPr marL="0" indent="0">
               <a:buNone/>
             </a:pPr>
             <a:r>
@@ -18493,6 +19148,13 @@
             <a:prstDash val="solid"/>
           </a:ln>
         </p:spPr>
+        <p:txBody>
+          <a:bodyPr/>
+          <a:lstStyle/>
+          <a:p>
+            <a:endParaRPr lang="zh-TW" altLang="en-US"/>
+          </a:p>
+        </p:txBody>
       </p:sp>
       <p:sp>
         <p:nvSpPr>
@@ -18515,7 +19177,7 @@
           <a:bodyPr wrap="square" lIns="0" tIns="0" rIns="0" bIns="0" rtlCol="0" anchor="ctr"/>
           <a:lstStyle/>
           <a:p>
-            <a:pPr indent="0" marL="0">
+            <a:pPr marL="0" indent="0">
               <a:buNone/>
             </a:pPr>
             <a:r>
@@ -18554,7 +19216,7 @@
           <a:bodyPr wrap="square" lIns="0" tIns="0" rIns="0" bIns="0" rtlCol="0" anchor="ctr"/>
           <a:lstStyle/>
           <a:p>
-            <a:pPr indent="0" marL="0">
+            <a:pPr marL="0" indent="0">
               <a:buNone/>
             </a:pPr>
             <a:r>
@@ -18588,6 +19250,7 @@
         <a:solidFill>
           <a:srgbClr val="FFFFFF"/>
         </a:solidFill>
+        <a:effectLst/>
       </p:bgPr>
     </p:bg>
     <p:spTree>
@@ -18628,6 +19291,13 @@
             <a:prstDash val="solid"/>
           </a:ln>
         </p:spPr>
+        <p:txBody>
+          <a:bodyPr/>
+          <a:lstStyle/>
+          <a:p>
+            <a:endParaRPr lang="zh-TW" altLang="en-US"/>
+          </a:p>
+        </p:txBody>
       </p:sp>
       <p:sp>
         <p:nvSpPr>
@@ -18650,7 +19320,7 @@
           <a:bodyPr wrap="square" lIns="0" tIns="0" rIns="0" bIns="0" rtlCol="0" anchor="t"/>
           <a:lstStyle/>
           <a:p>
-            <a:pPr indent="0" marL="0">
+            <a:pPr marL="0" indent="0">
               <a:buNone/>
             </a:pPr>
             <a:r>
@@ -18689,7 +19359,7 @@
           <a:bodyPr wrap="square" lIns="0" tIns="0" rIns="0" bIns="0" rtlCol="0" anchor="t"/>
           <a:lstStyle/>
           <a:p>
-            <a:pPr indent="0" marL="0">
+            <a:pPr marL="0" indent="0">
               <a:buNone/>
             </a:pPr>
             <a:r>
@@ -18728,7 +19398,7 @@
           <a:bodyPr wrap="square" lIns="0" tIns="0" rIns="0" bIns="0" rtlCol="0" anchor="ctr"/>
           <a:lstStyle/>
           <a:p>
-            <a:pPr indent="0" marL="0">
+            <a:pPr marL="0" indent="0">
               <a:buNone/>
             </a:pPr>
             <a:r>
@@ -18767,7 +19437,7 @@
           <a:bodyPr wrap="square" lIns="0" tIns="0" rIns="0" bIns="0" rtlCol="0" anchor="ctr"/>
           <a:lstStyle/>
           <a:p>
-            <a:pPr algn="r" indent="0" marL="0">
+            <a:pPr marL="0" indent="0" algn="r">
               <a:buNone/>
             </a:pPr>
             <a:r>
@@ -18806,7 +19476,7 @@
           <a:bodyPr wrap="square" lIns="0" tIns="0" rIns="0" bIns="0" rtlCol="0" anchor="ctr"/>
           <a:lstStyle/>
           <a:p>
-            <a:pPr algn="r" indent="0" marL="0">
+            <a:pPr marL="0" indent="0" algn="r">
               <a:buNone/>
             </a:pPr>
             <a:r>
@@ -18845,11 +19515,11 @@
           <a:bodyPr wrap="square" lIns="0" tIns="0" rIns="0" bIns="0" rtlCol="0" anchor="ctr"/>
           <a:lstStyle/>
           <a:p>
-            <a:pPr algn="ctr" indent="0" marL="0">
-              <a:buNone/>
-            </a:pPr>
-            <a:r>
-              <a:rPr lang="en-US" sz="1400" b="1" dirty="0">
+            <a:pPr marL="0" indent="0" algn="ctr">
+              <a:buNone/>
+            </a:pPr>
+            <a:r>
+              <a:rPr lang="en-US" sz="1400" b="1" dirty="0" err="1">
                 <a:solidFill>
                   <a:srgbClr val="5D4894"/>
                 </a:solidFill>
@@ -18857,7 +19527,7 @@
                 <a:ea typeface="Microsoft JhengHei" pitchFamily="34" charset="-122"/>
                 <a:cs typeface="Microsoft JhengHei" pitchFamily="34" charset="-120"/>
               </a:rPr>
-              <a:t>題目 22：門市銷售預測與巡店建議</a:t>
+              <a:t>題目：門市銷售預測與巡店建議</a:t>
             </a:r>
             <a:endParaRPr lang="en-US" sz="1400" dirty="0"/>
           </a:p>
@@ -18887,6 +19557,13 @@
             <a:prstDash val="solid"/>
           </a:ln>
         </p:spPr>
+        <p:txBody>
+          <a:bodyPr/>
+          <a:lstStyle/>
+          <a:p>
+            <a:endParaRPr lang="zh-TW" altLang="en-US"/>
+          </a:p>
+        </p:txBody>
       </p:sp>
       <p:sp>
         <p:nvSpPr>
@@ -18912,6 +19589,13 @@
             <a:prstDash val="solid"/>
           </a:ln>
         </p:spPr>
+        <p:txBody>
+          <a:bodyPr/>
+          <a:lstStyle/>
+          <a:p>
+            <a:endParaRPr lang="zh-TW" altLang="en-US"/>
+          </a:p>
+        </p:txBody>
       </p:sp>
       <p:sp>
         <p:nvSpPr>
@@ -18934,7 +19618,7 @@
           <a:bodyPr wrap="square" lIns="0" tIns="0" rIns="0" bIns="0" rtlCol="0" anchor="ctr"/>
           <a:lstStyle/>
           <a:p>
-            <a:pPr indent="0" marL="0">
+            <a:pPr marL="0" indent="0">
               <a:buNone/>
             </a:pPr>
             <a:r>
@@ -18973,7 +19657,7 @@
           <a:bodyPr wrap="square" lIns="0" tIns="0" rIns="0" bIns="0" rtlCol="0" anchor="ctr"/>
           <a:lstStyle/>
           <a:p>
-            <a:pPr indent="0" marL="0">
+            <a:pPr marL="0" indent="0">
               <a:buNone/>
             </a:pPr>
             <a:r>
@@ -19012,7 +19696,7 @@
           <a:bodyPr wrap="square" lIns="0" tIns="0" rIns="0" bIns="0" rtlCol="0" anchor="ctr"/>
           <a:lstStyle/>
           <a:p>
-            <a:pPr indent="0" marL="0">
+            <a:pPr marL="0" indent="0">
               <a:buNone/>
             </a:pPr>
             <a:r>
@@ -19051,7 +19735,7 @@
           <a:bodyPr wrap="square" lIns="0" tIns="0" rIns="0" bIns="0" rtlCol="0" anchor="ctr"/>
           <a:lstStyle/>
           <a:p>
-            <a:pPr indent="0" marL="0">
+            <a:pPr marL="0" indent="0">
               <a:buNone/>
             </a:pPr>
             <a:r>
@@ -19184,7 +19868,7 @@
           <a:bodyPr wrap="square" lIns="0" tIns="0" rIns="0" bIns="0" rtlCol="0" anchor="ctr"/>
           <a:lstStyle/>
           <a:p>
-            <a:pPr indent="0" marL="0">
+            <a:pPr marL="0" indent="0">
               <a:buNone/>
             </a:pPr>
             <a:r>
@@ -19223,7 +19907,7 @@
           <a:bodyPr wrap="square" lIns="0" tIns="0" rIns="0" bIns="0" rtlCol="0" anchor="ctr"/>
           <a:lstStyle/>
           <a:p>
-            <a:pPr indent="0" marL="0">
+            <a:pPr marL="0" indent="0">
               <a:buNone/>
             </a:pPr>
             <a:r>
@@ -19265,6 +19949,13 @@
             <a:prstDash val="solid"/>
           </a:ln>
         </p:spPr>
+        <p:txBody>
+          <a:bodyPr/>
+          <a:lstStyle/>
+          <a:p>
+            <a:endParaRPr lang="zh-TW" altLang="en-US"/>
+          </a:p>
+        </p:txBody>
       </p:sp>
       <p:sp>
         <p:nvSpPr>
@@ -19290,6 +19981,13 @@
             <a:prstDash val="solid"/>
           </a:ln>
         </p:spPr>
+        <p:txBody>
+          <a:bodyPr/>
+          <a:lstStyle/>
+          <a:p>
+            <a:endParaRPr lang="zh-TW" altLang="en-US"/>
+          </a:p>
+        </p:txBody>
       </p:sp>
       <p:sp>
         <p:nvSpPr>
@@ -19312,7 +20010,7 @@
           <a:bodyPr wrap="square" lIns="0" tIns="0" rIns="0" bIns="0" rtlCol="0" anchor="ctr"/>
           <a:lstStyle/>
           <a:p>
-            <a:pPr indent="0" marL="0">
+            <a:pPr marL="0" indent="0">
               <a:buNone/>
             </a:pPr>
             <a:r>
@@ -19351,7 +20049,7 @@
           <a:bodyPr wrap="square" lIns="0" tIns="0" rIns="0" bIns="0" rtlCol="0" anchor="ctr"/>
           <a:lstStyle/>
           <a:p>
-            <a:pPr indent="0" marL="0">
+            <a:pPr marL="0" indent="0">
               <a:buNone/>
             </a:pPr>
             <a:r>
@@ -19390,7 +20088,7 @@
           <a:bodyPr wrap="square" lIns="0" tIns="0" rIns="0" bIns="0" rtlCol="0" anchor="ctr"/>
           <a:lstStyle/>
           <a:p>
-            <a:pPr indent="0" marL="0">
+            <a:pPr marL="0" indent="0">
               <a:buNone/>
             </a:pPr>
             <a:r>
@@ -19429,7 +20127,7 @@
           <a:bodyPr wrap="square" lIns="0" tIns="0" rIns="0" bIns="0" rtlCol="0" anchor="ctr"/>
           <a:lstStyle/>
           <a:p>
-            <a:pPr indent="0" marL="0">
+            <a:pPr marL="0" indent="0">
               <a:buNone/>
             </a:pPr>
             <a:r>
@@ -19562,7 +20260,7 @@
           <a:bodyPr wrap="square" lIns="0" tIns="0" rIns="0" bIns="0" rtlCol="0" anchor="ctr"/>
           <a:lstStyle/>
           <a:p>
-            <a:pPr indent="0" marL="0">
+            <a:pPr marL="0" indent="0">
               <a:buNone/>
             </a:pPr>
             <a:r>
@@ -19601,7 +20299,7 @@
           <a:bodyPr wrap="square" lIns="0" tIns="0" rIns="0" bIns="0" rtlCol="0" anchor="ctr"/>
           <a:lstStyle/>
           <a:p>
-            <a:pPr indent="0" marL="0">
+            <a:pPr marL="0" indent="0">
               <a:buNone/>
             </a:pPr>
             <a:r>
@@ -19642,6 +20340,13 @@
             <a:tailEnd type="triangle"/>
           </a:ln>
         </p:spPr>
+        <p:txBody>
+          <a:bodyPr/>
+          <a:lstStyle/>
+          <a:p>
+            <a:endParaRPr lang="zh-TW" altLang="en-US"/>
+          </a:p>
+        </p:txBody>
       </p:sp>
       <p:sp>
         <p:nvSpPr>
@@ -19664,7 +20369,7 @@
           <a:bodyPr wrap="square" lIns="0" tIns="0" rIns="0" bIns="0" rtlCol="0" anchor="ctr"/>
           <a:lstStyle/>
           <a:p>
-            <a:pPr algn="ctr" indent="0" marL="0">
+            <a:pPr marL="0" indent="0" algn="ctr">
               <a:buNone/>
             </a:pPr>
             <a:r>
@@ -19703,7 +20408,7 @@
           <a:bodyPr wrap="square" lIns="0" tIns="0" rIns="0" bIns="0" rtlCol="0" anchor="ctr"/>
           <a:lstStyle/>
           <a:p>
-            <a:pPr algn="ctr" indent="0" marL="0">
+            <a:pPr marL="0" indent="0" algn="ctr">
               <a:buNone/>
             </a:pPr>
             <a:r>
@@ -19737,6 +20442,7 @@
         <a:solidFill>
           <a:srgbClr val="FFFFFF"/>
         </a:solidFill>
+        <a:effectLst/>
       </p:bgPr>
     </p:bg>
     <p:spTree>
@@ -19777,6 +20483,13 @@
             <a:prstDash val="solid"/>
           </a:ln>
         </p:spPr>
+        <p:txBody>
+          <a:bodyPr/>
+          <a:lstStyle/>
+          <a:p>
+            <a:endParaRPr lang="zh-TW" altLang="en-US"/>
+          </a:p>
+        </p:txBody>
       </p:sp>
       <p:sp>
         <p:nvSpPr>
@@ -19799,7 +20512,7 @@
           <a:bodyPr wrap="square" lIns="0" tIns="0" rIns="0" bIns="0" rtlCol="0" anchor="t"/>
           <a:lstStyle/>
           <a:p>
-            <a:pPr indent="0" marL="0">
+            <a:pPr marL="0" indent="0">
               <a:buNone/>
             </a:pPr>
             <a:r>
@@ -19838,7 +20551,7 @@
           <a:bodyPr wrap="square" lIns="0" tIns="0" rIns="0" bIns="0" rtlCol="0" anchor="t"/>
           <a:lstStyle/>
           <a:p>
-            <a:pPr indent="0" marL="0">
+            <a:pPr marL="0" indent="0">
               <a:buNone/>
             </a:pPr>
             <a:r>
@@ -19877,7 +20590,7 @@
           <a:bodyPr wrap="square" lIns="0" tIns="0" rIns="0" bIns="0" rtlCol="0" anchor="ctr"/>
           <a:lstStyle/>
           <a:p>
-            <a:pPr indent="0" marL="0">
+            <a:pPr marL="0" indent="0">
               <a:buNone/>
             </a:pPr>
             <a:r>
@@ -19916,7 +20629,7 @@
           <a:bodyPr wrap="square" lIns="0" tIns="0" rIns="0" bIns="0" rtlCol="0" anchor="ctr"/>
           <a:lstStyle/>
           <a:p>
-            <a:pPr algn="r" indent="0" marL="0">
+            <a:pPr marL="0" indent="0" algn="r">
               <a:buNone/>
             </a:pPr>
             <a:r>
@@ -19955,7 +20668,7 @@
           <a:bodyPr wrap="square" lIns="0" tIns="0" rIns="0" bIns="0" rtlCol="0" anchor="ctr"/>
           <a:lstStyle/>
           <a:p>
-            <a:pPr algn="r" indent="0" marL="0">
+            <a:pPr marL="0" indent="0" algn="r">
               <a:buNone/>
             </a:pPr>
             <a:r>
@@ -19997,6 +20710,13 @@
             <a:prstDash val="solid"/>
           </a:ln>
         </p:spPr>
+        <p:txBody>
+          <a:bodyPr/>
+          <a:lstStyle/>
+          <a:p>
+            <a:endParaRPr lang="zh-TW" altLang="en-US"/>
+          </a:p>
+        </p:txBody>
       </p:sp>
       <p:sp>
         <p:nvSpPr>
@@ -20022,6 +20742,13 @@
             <a:prstDash val="solid"/>
           </a:ln>
         </p:spPr>
+        <p:txBody>
+          <a:bodyPr/>
+          <a:lstStyle/>
+          <a:p>
+            <a:endParaRPr lang="zh-TW" altLang="en-US"/>
+          </a:p>
+        </p:txBody>
       </p:sp>
       <p:sp>
         <p:nvSpPr>
@@ -20044,7 +20771,7 @@
           <a:bodyPr wrap="square" lIns="0" tIns="0" rIns="0" bIns="0" rtlCol="0" anchor="ctr"/>
           <a:lstStyle/>
           <a:p>
-            <a:pPr indent="0" marL="0">
+            <a:pPr marL="0" indent="0">
               <a:buNone/>
             </a:pPr>
             <a:r>
@@ -20083,7 +20810,7 @@
           <a:bodyPr wrap="square" lIns="0" tIns="0" rIns="0" bIns="0" rtlCol="0" anchor="ctr"/>
           <a:lstStyle/>
           <a:p>
-            <a:pPr indent="0" marL="0">
+            <a:pPr marL="0" indent="0">
               <a:buNone/>
             </a:pPr>
             <a:r>
@@ -20125,6 +20852,13 @@
             <a:prstDash val="solid"/>
           </a:ln>
         </p:spPr>
+        <p:txBody>
+          <a:bodyPr/>
+          <a:lstStyle/>
+          <a:p>
+            <a:endParaRPr lang="zh-TW" altLang="en-US"/>
+          </a:p>
+        </p:txBody>
       </p:sp>
       <p:sp>
         <p:nvSpPr>
@@ -20150,6 +20884,13 @@
             <a:prstDash val="solid"/>
           </a:ln>
         </p:spPr>
+        <p:txBody>
+          <a:bodyPr/>
+          <a:lstStyle/>
+          <a:p>
+            <a:endParaRPr lang="zh-TW" altLang="en-US"/>
+          </a:p>
+        </p:txBody>
       </p:sp>
       <p:sp>
         <p:nvSpPr>
@@ -20172,7 +20913,7 @@
           <a:bodyPr wrap="square" lIns="0" tIns="0" rIns="0" bIns="0" rtlCol="0" anchor="ctr"/>
           <a:lstStyle/>
           <a:p>
-            <a:pPr indent="0" marL="0">
+            <a:pPr marL="0" indent="0">
               <a:buNone/>
             </a:pPr>
             <a:r>
@@ -20211,7 +20952,7 @@
           <a:bodyPr wrap="square" lIns="0" tIns="0" rIns="0" bIns="0" rtlCol="0" anchor="ctr"/>
           <a:lstStyle/>
           <a:p>
-            <a:pPr indent="0" marL="0">
+            <a:pPr marL="0" indent="0">
               <a:buNone/>
             </a:pPr>
             <a:r>
@@ -20250,7 +20991,7 @@
           <a:bodyPr wrap="square" lIns="0" tIns="0" rIns="0" bIns="0" rtlCol="0" anchor="ctr"/>
           <a:lstStyle/>
           <a:p>
-            <a:pPr indent="0" marL="0">
+            <a:pPr marL="0" indent="0">
               <a:buNone/>
             </a:pPr>
             <a:r>
@@ -20366,6 +21107,13 @@
             <a:prstDash val="solid"/>
           </a:ln>
         </p:spPr>
+        <p:txBody>
+          <a:bodyPr/>
+          <a:lstStyle/>
+          <a:p>
+            <a:endParaRPr lang="zh-TW" altLang="en-US"/>
+          </a:p>
+        </p:txBody>
       </p:sp>
       <p:sp>
         <p:nvSpPr>
@@ -20388,7 +21136,7 @@
           <a:bodyPr wrap="square" lIns="0" tIns="0" rIns="0" bIns="0" rtlCol="0" anchor="ctr"/>
           <a:lstStyle/>
           <a:p>
-            <a:pPr indent="0" marL="0">
+            <a:pPr marL="0" indent="0">
               <a:buNone/>
             </a:pPr>
             <a:r>
@@ -20427,7 +21175,7 @@
           <a:bodyPr wrap="square" lIns="0" tIns="0" rIns="0" bIns="0" rtlCol="0" anchor="ctr"/>
           <a:lstStyle/>
           <a:p>
-            <a:pPr indent="0" marL="0">
+            <a:pPr marL="0" indent="0">
               <a:buNone/>
             </a:pPr>
             <a:r>
@@ -20469,6 +21217,13 @@
             <a:prstDash val="solid"/>
           </a:ln>
         </p:spPr>
+        <p:txBody>
+          <a:bodyPr/>
+          <a:lstStyle/>
+          <a:p>
+            <a:endParaRPr lang="zh-TW" altLang="en-US"/>
+          </a:p>
+        </p:txBody>
       </p:sp>
       <p:sp>
         <p:nvSpPr>
@@ -20494,6 +21249,13 @@
             <a:prstDash val="solid"/>
           </a:ln>
         </p:spPr>
+        <p:txBody>
+          <a:bodyPr/>
+          <a:lstStyle/>
+          <a:p>
+            <a:endParaRPr lang="zh-TW" altLang="en-US"/>
+          </a:p>
+        </p:txBody>
       </p:sp>
       <p:sp>
         <p:nvSpPr>
@@ -20516,7 +21278,7 @@
           <a:bodyPr wrap="square" lIns="0" tIns="0" rIns="0" bIns="0" rtlCol="0" anchor="ctr"/>
           <a:lstStyle/>
           <a:p>
-            <a:pPr indent="0" marL="0">
+            <a:pPr marL="0" indent="0">
               <a:buNone/>
             </a:pPr>
             <a:r>
@@ -20555,7 +21317,7 @@
           <a:bodyPr wrap="square" lIns="0" tIns="0" rIns="0" bIns="0" rtlCol="0" anchor="ctr"/>
           <a:lstStyle/>
           <a:p>
-            <a:pPr indent="0" marL="0">
+            <a:pPr marL="0" indent="0">
               <a:buNone/>
             </a:pPr>
             <a:r>
@@ -20594,7 +21356,7 @@
           <a:bodyPr wrap="square" lIns="0" tIns="0" rIns="0" bIns="0" rtlCol="0" anchor="ctr"/>
           <a:lstStyle/>
           <a:p>
-            <a:pPr indent="0" marL="0">
+            <a:pPr marL="0" indent="0">
               <a:buNone/>
             </a:pPr>
             <a:r>
@@ -20710,6 +21472,13 @@
             <a:prstDash val="solid"/>
           </a:ln>
         </p:spPr>
+        <p:txBody>
+          <a:bodyPr/>
+          <a:lstStyle/>
+          <a:p>
+            <a:endParaRPr lang="zh-TW" altLang="en-US"/>
+          </a:p>
+        </p:txBody>
       </p:sp>
       <p:sp>
         <p:nvSpPr>
@@ -20732,7 +21501,7 @@
           <a:bodyPr wrap="square" lIns="0" tIns="0" rIns="0" bIns="0" rtlCol="0" anchor="ctr"/>
           <a:lstStyle/>
           <a:p>
-            <a:pPr indent="0" marL="0">
+            <a:pPr marL="0" indent="0">
               <a:buNone/>
             </a:pPr>
             <a:r>
@@ -20771,7 +21540,7 @@
           <a:bodyPr wrap="square" lIns="0" tIns="0" rIns="0" bIns="0" rtlCol="0" anchor="ctr"/>
           <a:lstStyle/>
           <a:p>
-            <a:pPr indent="0" marL="0">
+            <a:pPr marL="0" indent="0">
               <a:buNone/>
             </a:pPr>
             <a:r>
@@ -20813,6 +21582,13 @@
             <a:prstDash val="solid"/>
           </a:ln>
         </p:spPr>
+        <p:txBody>
+          <a:bodyPr/>
+          <a:lstStyle/>
+          <a:p>
+            <a:endParaRPr lang="zh-TW" altLang="en-US"/>
+          </a:p>
+        </p:txBody>
       </p:sp>
       <p:sp>
         <p:nvSpPr>
@@ -20838,6 +21614,13 @@
             <a:prstDash val="solid"/>
           </a:ln>
         </p:spPr>
+        <p:txBody>
+          <a:bodyPr/>
+          <a:lstStyle/>
+          <a:p>
+            <a:endParaRPr lang="zh-TW" altLang="en-US"/>
+          </a:p>
+        </p:txBody>
       </p:sp>
       <p:sp>
         <p:nvSpPr>
@@ -20860,7 +21643,7 @@
           <a:bodyPr wrap="square" lIns="0" tIns="0" rIns="0" bIns="0" rtlCol="0" anchor="ctr"/>
           <a:lstStyle/>
           <a:p>
-            <a:pPr indent="0" marL="0">
+            <a:pPr marL="0" indent="0">
               <a:buNone/>
             </a:pPr>
             <a:r>
@@ -20899,7 +21682,7 @@
           <a:bodyPr wrap="square" lIns="0" tIns="0" rIns="0" bIns="0" rtlCol="0" anchor="ctr"/>
           <a:lstStyle/>
           <a:p>
-            <a:pPr indent="0" marL="0">
+            <a:pPr marL="0" indent="0">
               <a:buNone/>
             </a:pPr>
             <a:r>
@@ -20938,7 +21721,7 @@
           <a:bodyPr wrap="square" lIns="0" tIns="0" rIns="0" bIns="0" rtlCol="0" anchor="ctr"/>
           <a:lstStyle/>
           <a:p>
-            <a:pPr indent="0" marL="0">
+            <a:pPr marL="0" indent="0">
               <a:buNone/>
             </a:pPr>
             <a:r>
@@ -21054,6 +21837,13 @@
             <a:prstDash val="solid"/>
           </a:ln>
         </p:spPr>
+        <p:txBody>
+          <a:bodyPr/>
+          <a:lstStyle/>
+          <a:p>
+            <a:endParaRPr lang="zh-TW" altLang="en-US"/>
+          </a:p>
+        </p:txBody>
       </p:sp>
       <p:sp>
         <p:nvSpPr>
@@ -21076,7 +21866,7 @@
           <a:bodyPr wrap="square" lIns="0" tIns="0" rIns="0" bIns="0" rtlCol="0" anchor="ctr"/>
           <a:lstStyle/>
           <a:p>
-            <a:pPr indent="0" marL="0">
+            <a:pPr marL="0" indent="0">
               <a:buNone/>
             </a:pPr>
             <a:r>
@@ -21115,7 +21905,7 @@
           <a:bodyPr wrap="square" lIns="0" tIns="0" rIns="0" bIns="0" rtlCol="0" anchor="ctr"/>
           <a:lstStyle/>
           <a:p>
-            <a:pPr indent="0" marL="0">
+            <a:pPr marL="0" indent="0">
               <a:buNone/>
             </a:pPr>
             <a:r>
@@ -21154,7 +21944,7 @@
           <a:bodyPr wrap="square" lIns="0" tIns="0" rIns="0" bIns="0" rtlCol="0" anchor="ctr"/>
           <a:lstStyle/>
           <a:p>
-            <a:pPr algn="ctr" indent="0" marL="0">
+            <a:pPr marL="0" indent="0" algn="ctr">
               <a:buNone/>
             </a:pPr>
             <a:r>
@@ -21188,6 +21978,7 @@
         <a:solidFill>
           <a:srgbClr val="FFFFFF"/>
         </a:solidFill>
+        <a:effectLst/>
       </p:bgPr>
     </p:bg>
     <p:spTree>
@@ -21228,6 +22019,13 @@
             <a:prstDash val="solid"/>
           </a:ln>
         </p:spPr>
+        <p:txBody>
+          <a:bodyPr/>
+          <a:lstStyle/>
+          <a:p>
+            <a:endParaRPr lang="zh-TW" altLang="en-US"/>
+          </a:p>
+        </p:txBody>
       </p:sp>
       <p:sp>
         <p:nvSpPr>
@@ -21250,7 +22048,7 @@
           <a:bodyPr wrap="square" lIns="0" tIns="0" rIns="0" bIns="0" rtlCol="0" anchor="t"/>
           <a:lstStyle/>
           <a:p>
-            <a:pPr indent="0" marL="0">
+            <a:pPr marL="0" indent="0">
               <a:buNone/>
             </a:pPr>
             <a:r>
@@ -21289,7 +22087,7 @@
           <a:bodyPr wrap="square" lIns="0" tIns="0" rIns="0" bIns="0" rtlCol="0" anchor="t"/>
           <a:lstStyle/>
           <a:p>
-            <a:pPr indent="0" marL="0">
+            <a:pPr marL="0" indent="0">
               <a:buNone/>
             </a:pPr>
             <a:r>
@@ -21328,7 +22126,7 @@
           <a:bodyPr wrap="square" lIns="0" tIns="0" rIns="0" bIns="0" rtlCol="0" anchor="ctr"/>
           <a:lstStyle/>
           <a:p>
-            <a:pPr indent="0" marL="0">
+            <a:pPr marL="0" indent="0">
               <a:buNone/>
             </a:pPr>
             <a:r>
@@ -21367,7 +22165,7 @@
           <a:bodyPr wrap="square" lIns="0" tIns="0" rIns="0" bIns="0" rtlCol="0" anchor="ctr"/>
           <a:lstStyle/>
           <a:p>
-            <a:pPr algn="r" indent="0" marL="0">
+            <a:pPr marL="0" indent="0" algn="r">
               <a:buNone/>
             </a:pPr>
             <a:r>
@@ -21406,7 +22204,7 @@
           <a:bodyPr wrap="square" lIns="0" tIns="0" rIns="0" bIns="0" rtlCol="0" anchor="ctr"/>
           <a:lstStyle/>
           <a:p>
-            <a:pPr algn="r" indent="0" marL="0">
+            <a:pPr marL="0" indent="0" algn="r">
               <a:buNone/>
             </a:pPr>
             <a:r>
@@ -21448,6 +22246,13 @@
             <a:prstDash val="solid"/>
           </a:ln>
         </p:spPr>
+        <p:txBody>
+          <a:bodyPr/>
+          <a:lstStyle/>
+          <a:p>
+            <a:endParaRPr lang="zh-TW" altLang="en-US"/>
+          </a:p>
+        </p:txBody>
       </p:sp>
       <p:sp>
         <p:nvSpPr>
@@ -21473,6 +22278,13 @@
             <a:prstDash val="solid"/>
           </a:ln>
         </p:spPr>
+        <p:txBody>
+          <a:bodyPr/>
+          <a:lstStyle/>
+          <a:p>
+            <a:endParaRPr lang="zh-TW" altLang="en-US"/>
+          </a:p>
+        </p:txBody>
       </p:sp>
       <p:sp>
         <p:nvSpPr>
@@ -21495,7 +22307,7 @@
           <a:bodyPr wrap="square" lIns="0" tIns="0" rIns="0" bIns="0" rtlCol="0" anchor="ctr"/>
           <a:lstStyle/>
           <a:p>
-            <a:pPr indent="0" marL="0">
+            <a:pPr marL="0" indent="0">
               <a:buNone/>
             </a:pPr>
             <a:r>
@@ -21534,7 +22346,7 @@
           <a:bodyPr wrap="square" lIns="0" tIns="0" rIns="0" bIns="0" rtlCol="0" anchor="ctr"/>
           <a:lstStyle/>
           <a:p>
-            <a:pPr indent="0" marL="0">
+            <a:pPr marL="0" indent="0">
               <a:buNone/>
             </a:pPr>
             <a:r>
@@ -21573,7 +22385,7 @@
           <a:bodyPr wrap="square" lIns="0" tIns="0" rIns="0" bIns="0" rtlCol="0" anchor="ctr"/>
           <a:lstStyle/>
           <a:p>
-            <a:pPr indent="0" marL="0">
+            <a:pPr marL="0" indent="0">
               <a:buNone/>
             </a:pPr>
             <a:r>
@@ -21707,6 +22519,13 @@
             <a:prstDash val="solid"/>
           </a:ln>
         </p:spPr>
+        <p:txBody>
+          <a:bodyPr/>
+          <a:lstStyle/>
+          <a:p>
+            <a:endParaRPr lang="zh-TW" altLang="en-US"/>
+          </a:p>
+        </p:txBody>
       </p:sp>
       <p:sp>
         <p:nvSpPr>
@@ -21729,7 +22548,7 @@
           <a:bodyPr wrap="square" lIns="0" tIns="0" rIns="0" bIns="0" rtlCol="0" anchor="ctr"/>
           <a:lstStyle/>
           <a:p>
-            <a:pPr indent="0" marL="0">
+            <a:pPr marL="0" indent="0">
               <a:buNone/>
             </a:pPr>
             <a:r>
@@ -21771,6 +22590,13 @@
             <a:prstDash val="solid"/>
           </a:ln>
         </p:spPr>
+        <p:txBody>
+          <a:bodyPr/>
+          <a:lstStyle/>
+          <a:p>
+            <a:endParaRPr lang="zh-TW" altLang="en-US"/>
+          </a:p>
+        </p:txBody>
       </p:sp>
       <p:sp>
         <p:nvSpPr>
@@ -21796,6 +22622,13 @@
             <a:prstDash val="solid"/>
           </a:ln>
         </p:spPr>
+        <p:txBody>
+          <a:bodyPr/>
+          <a:lstStyle/>
+          <a:p>
+            <a:endParaRPr lang="zh-TW" altLang="en-US"/>
+          </a:p>
+        </p:txBody>
       </p:sp>
       <p:sp>
         <p:nvSpPr>
@@ -21818,7 +22651,7 @@
           <a:bodyPr wrap="square" lIns="0" tIns="0" rIns="0" bIns="0" rtlCol="0" anchor="ctr"/>
           <a:lstStyle/>
           <a:p>
-            <a:pPr indent="0" marL="0">
+            <a:pPr marL="0" indent="0">
               <a:buNone/>
             </a:pPr>
             <a:r>
@@ -21857,7 +22690,7 @@
           <a:bodyPr wrap="square" lIns="0" tIns="0" rIns="0" bIns="0" rtlCol="0" anchor="ctr"/>
           <a:lstStyle/>
           <a:p>
-            <a:pPr indent="0" marL="0">
+            <a:pPr marL="0" indent="0">
               <a:buNone/>
             </a:pPr>
             <a:r>
@@ -21896,7 +22729,7 @@
           <a:bodyPr wrap="square" lIns="0" tIns="0" rIns="0" bIns="0" rtlCol="0" anchor="ctr"/>
           <a:lstStyle/>
           <a:p>
-            <a:pPr indent="0" marL="0">
+            <a:pPr marL="0" indent="0">
               <a:buNone/>
             </a:pPr>
             <a:r>
@@ -22030,6 +22863,13 @@
             <a:prstDash val="solid"/>
           </a:ln>
         </p:spPr>
+        <p:txBody>
+          <a:bodyPr/>
+          <a:lstStyle/>
+          <a:p>
+            <a:endParaRPr lang="zh-TW" altLang="en-US"/>
+          </a:p>
+        </p:txBody>
       </p:sp>
       <p:sp>
         <p:nvSpPr>
@@ -22052,7 +22892,7 @@
           <a:bodyPr wrap="square" lIns="0" tIns="0" rIns="0" bIns="0" rtlCol="0" anchor="ctr"/>
           <a:lstStyle/>
           <a:p>
-            <a:pPr indent="0" marL="0">
+            <a:pPr marL="0" indent="0">
               <a:buNone/>
             </a:pPr>
             <a:r>
@@ -22094,6 +22934,13 @@
             <a:prstDash val="solid"/>
           </a:ln>
         </p:spPr>
+        <p:txBody>
+          <a:bodyPr/>
+          <a:lstStyle/>
+          <a:p>
+            <a:endParaRPr lang="zh-TW" altLang="en-US"/>
+          </a:p>
+        </p:txBody>
       </p:sp>
       <p:sp>
         <p:nvSpPr>
@@ -22119,6 +22966,13 @@
             <a:prstDash val="solid"/>
           </a:ln>
         </p:spPr>
+        <p:txBody>
+          <a:bodyPr/>
+          <a:lstStyle/>
+          <a:p>
+            <a:endParaRPr lang="zh-TW" altLang="en-US"/>
+          </a:p>
+        </p:txBody>
       </p:sp>
       <p:sp>
         <p:nvSpPr>
@@ -22141,7 +22995,7 @@
           <a:bodyPr wrap="square" lIns="0" tIns="0" rIns="0" bIns="0" rtlCol="0" anchor="ctr"/>
           <a:lstStyle/>
           <a:p>
-            <a:pPr indent="0" marL="0">
+            <a:pPr marL="0" indent="0">
               <a:buNone/>
             </a:pPr>
             <a:r>
@@ -22180,7 +23034,7 @@
           <a:bodyPr wrap="square" lIns="0" tIns="0" rIns="0" bIns="0" rtlCol="0" anchor="ctr"/>
           <a:lstStyle/>
           <a:p>
-            <a:pPr indent="0" marL="0">
+            <a:pPr marL="0" indent="0">
               <a:buNone/>
             </a:pPr>
             <a:r>
@@ -22219,7 +23073,7 @@
           <a:bodyPr wrap="square" lIns="0" tIns="0" rIns="0" bIns="0" rtlCol="0" anchor="ctr"/>
           <a:lstStyle/>
           <a:p>
-            <a:pPr indent="0" marL="0">
+            <a:pPr marL="0" indent="0">
               <a:buNone/>
             </a:pPr>
             <a:r>
@@ -22353,6 +23207,13 @@
             <a:prstDash val="solid"/>
           </a:ln>
         </p:spPr>
+        <p:txBody>
+          <a:bodyPr/>
+          <a:lstStyle/>
+          <a:p>
+            <a:endParaRPr lang="zh-TW" altLang="en-US"/>
+          </a:p>
+        </p:txBody>
       </p:sp>
       <p:sp>
         <p:nvSpPr>
@@ -22375,7 +23236,7 @@
           <a:bodyPr wrap="square" lIns="0" tIns="0" rIns="0" bIns="0" rtlCol="0" anchor="ctr"/>
           <a:lstStyle/>
           <a:p>
-            <a:pPr indent="0" marL="0">
+            <a:pPr marL="0" indent="0">
               <a:buNone/>
             </a:pPr>
             <a:r>
@@ -22414,7 +23275,7 @@
           <a:bodyPr wrap="square" lIns="0" tIns="0" rIns="0" bIns="0" rtlCol="0" anchor="ctr"/>
           <a:lstStyle/>
           <a:p>
-            <a:pPr indent="0" marL="0">
+            <a:pPr marL="0" indent="0">
               <a:buNone/>
             </a:pPr>
             <a:r>
@@ -22448,6 +23309,7 @@
         <a:solidFill>
           <a:srgbClr val="FFFFFF"/>
         </a:solidFill>
+        <a:effectLst/>
       </p:bgPr>
     </p:bg>
     <p:spTree>
@@ -22488,6 +23350,13 @@
             <a:prstDash val="solid"/>
           </a:ln>
         </p:spPr>
+        <p:txBody>
+          <a:bodyPr/>
+          <a:lstStyle/>
+          <a:p>
+            <a:endParaRPr lang="zh-TW" altLang="en-US"/>
+          </a:p>
+        </p:txBody>
       </p:sp>
       <p:sp>
         <p:nvSpPr>
@@ -22510,9 +23379,20 @@
           <a:bodyPr wrap="square" lIns="0" tIns="0" rIns="0" bIns="0" rtlCol="0" anchor="t"/>
           <a:lstStyle/>
           <a:p>
-            <a:pPr indent="0" marL="0">
-              <a:buNone/>
-            </a:pPr>
+            <a:pPr marL="0" indent="0">
+              <a:buNone/>
+            </a:pPr>
+            <a:r>
+              <a:rPr lang="en-US" sz="2800" b="1" dirty="0" err="1">
+                <a:solidFill>
+                  <a:srgbClr val="8A7AD2"/>
+                </a:solidFill>
+                <a:latin typeface="Microsoft JhengHei" pitchFamily="34" charset="0"/>
+                <a:ea typeface="Microsoft JhengHei" pitchFamily="34" charset="-122"/>
+                <a:cs typeface="Microsoft JhengHei" pitchFamily="34" charset="-120"/>
+              </a:rPr>
+              <a:t>門市銷售預測與巡店建議</a:t>
+            </a:r>
             <a:r>
               <a:rPr lang="en-US" sz="2800" b="1" dirty="0">
                 <a:solidFill>
@@ -22522,7 +23402,7 @@
                 <a:ea typeface="Microsoft JhengHei" pitchFamily="34" charset="-122"/>
                 <a:cs typeface="Microsoft JhengHei" pitchFamily="34" charset="-120"/>
               </a:rPr>
-              <a:t>題目 22  門市銷售預測與巡店建議  ｜  場景 × 資料 × 輸出</a:t>
+              <a:t>  ｜  場景 × 資料 × 輸出</a:t>
             </a:r>
             <a:endParaRPr lang="en-US" sz="2800" dirty="0"/>
           </a:p>
@@ -22549,7 +23429,7 @@
           <a:bodyPr wrap="square" lIns="0" tIns="0" rIns="0" bIns="0" rtlCol="0" anchor="t"/>
           <a:lstStyle/>
           <a:p>
-            <a:pPr indent="0" marL="0">
+            <a:pPr marL="0" indent="0">
               <a:buNone/>
             </a:pPr>
             <a:r>
@@ -22588,7 +23468,7 @@
           <a:bodyPr wrap="square" lIns="0" tIns="0" rIns="0" bIns="0" rtlCol="0" anchor="ctr"/>
           <a:lstStyle/>
           <a:p>
-            <a:pPr indent="0" marL="0">
+            <a:pPr marL="0" indent="0">
               <a:buNone/>
             </a:pPr>
             <a:r>
@@ -22627,7 +23507,7 @@
           <a:bodyPr wrap="square" lIns="0" tIns="0" rIns="0" bIns="0" rtlCol="0" anchor="ctr"/>
           <a:lstStyle/>
           <a:p>
-            <a:pPr algn="r" indent="0" marL="0">
+            <a:pPr marL="0" indent="0" algn="r">
               <a:buNone/>
             </a:pPr>
             <a:r>
@@ -22666,7 +23546,7 @@
           <a:bodyPr wrap="square" lIns="0" tIns="0" rIns="0" bIns="0" rtlCol="0" anchor="ctr"/>
           <a:lstStyle/>
           <a:p>
-            <a:pPr algn="r" indent="0" marL="0">
+            <a:pPr marL="0" indent="0" algn="r">
               <a:buNone/>
             </a:pPr>
             <a:r>
@@ -22708,6 +23588,13 @@
             <a:prstDash val="solid"/>
           </a:ln>
         </p:spPr>
+        <p:txBody>
+          <a:bodyPr/>
+          <a:lstStyle/>
+          <a:p>
+            <a:endParaRPr lang="zh-TW" altLang="en-US"/>
+          </a:p>
+        </p:txBody>
       </p:sp>
       <p:sp>
         <p:nvSpPr>
@@ -22733,6 +23620,13 @@
             <a:prstDash val="solid"/>
           </a:ln>
         </p:spPr>
+        <p:txBody>
+          <a:bodyPr/>
+          <a:lstStyle/>
+          <a:p>
+            <a:endParaRPr lang="zh-TW" altLang="en-US"/>
+          </a:p>
+        </p:txBody>
       </p:sp>
       <p:sp>
         <p:nvSpPr>
@@ -22755,7 +23649,7 @@
           <a:bodyPr wrap="square" lIns="0" tIns="0" rIns="0" bIns="0" rtlCol="0" anchor="ctr"/>
           <a:lstStyle/>
           <a:p>
-            <a:pPr indent="0" marL="0">
+            <a:pPr marL="0" indent="0">
               <a:buNone/>
             </a:pPr>
             <a:r>
@@ -22794,7 +23688,7 @@
           <a:bodyPr wrap="square" lIns="0" tIns="0" rIns="0" bIns="0" rtlCol="0" anchor="ctr"/>
           <a:lstStyle/>
           <a:p>
-            <a:pPr indent="0" marL="0">
+            <a:pPr marL="0" indent="0">
               <a:buNone/>
             </a:pPr>
             <a:r>
@@ -22811,13 +23705,13 @@
             <a:endParaRPr lang="en-US" sz="1150" dirty="0"/>
           </a:p>
           <a:p>
-            <a:pPr indent="0" marL="0">
+            <a:pPr marL="0" indent="0">
               <a:buNone/>
             </a:pPr>
             <a:endParaRPr lang="en-US" sz="1150" dirty="0"/>
           </a:p>
           <a:p>
-            <a:pPr indent="0" marL="0">
+            <a:pPr marL="0" indent="0">
               <a:buNone/>
             </a:pPr>
             <a:r>
@@ -22834,13 +23728,13 @@
             <a:endParaRPr lang="en-US" sz="1150" dirty="0"/>
           </a:p>
           <a:p>
-            <a:pPr indent="0" marL="0">
+            <a:pPr marL="0" indent="0">
               <a:buNone/>
             </a:pPr>
             <a:endParaRPr lang="en-US" sz="1150" dirty="0"/>
           </a:p>
           <a:p>
-            <a:pPr indent="0" marL="0">
+            <a:pPr marL="0" indent="0">
               <a:buNone/>
             </a:pPr>
             <a:r>
@@ -22882,6 +23776,13 @@
             <a:prstDash val="solid"/>
           </a:ln>
         </p:spPr>
+        <p:txBody>
+          <a:bodyPr/>
+          <a:lstStyle/>
+          <a:p>
+            <a:endParaRPr lang="zh-TW" altLang="en-US"/>
+          </a:p>
+        </p:txBody>
       </p:sp>
       <p:sp>
         <p:nvSpPr>
@@ -22907,6 +23808,13 @@
             <a:prstDash val="solid"/>
           </a:ln>
         </p:spPr>
+        <p:txBody>
+          <a:bodyPr/>
+          <a:lstStyle/>
+          <a:p>
+            <a:endParaRPr lang="zh-TW" altLang="en-US"/>
+          </a:p>
+        </p:txBody>
       </p:sp>
       <p:sp>
         <p:nvSpPr>
@@ -22929,7 +23837,7 @@
           <a:bodyPr wrap="square" lIns="0" tIns="0" rIns="0" bIns="0" rtlCol="0" anchor="ctr"/>
           <a:lstStyle/>
           <a:p>
-            <a:pPr indent="0" marL="0">
+            <a:pPr marL="0" indent="0">
               <a:buNone/>
             </a:pPr>
             <a:r>
@@ -23101,6 +24009,13 @@
             <a:prstDash val="solid"/>
           </a:ln>
         </p:spPr>
+        <p:txBody>
+          <a:bodyPr/>
+          <a:lstStyle/>
+          <a:p>
+            <a:endParaRPr lang="zh-TW" altLang="en-US"/>
+          </a:p>
+        </p:txBody>
       </p:sp>
       <p:sp>
         <p:nvSpPr>
@@ -23126,6 +24041,13 @@
             <a:prstDash val="solid"/>
           </a:ln>
         </p:spPr>
+        <p:txBody>
+          <a:bodyPr/>
+          <a:lstStyle/>
+          <a:p>
+            <a:endParaRPr lang="zh-TW" altLang="en-US"/>
+          </a:p>
+        </p:txBody>
       </p:sp>
       <p:sp>
         <p:nvSpPr>
@@ -23148,7 +24070,7 @@
           <a:bodyPr wrap="square" lIns="0" tIns="0" rIns="0" bIns="0" rtlCol="0" anchor="ctr"/>
           <a:lstStyle/>
           <a:p>
-            <a:pPr indent="0" marL="0">
+            <a:pPr marL="0" indent="0">
               <a:buNone/>
             </a:pPr>
             <a:r>
@@ -23187,7 +24109,7 @@
           <a:bodyPr wrap="square" lIns="0" tIns="0" rIns="0" bIns="0" rtlCol="0" anchor="ctr"/>
           <a:lstStyle/>
           <a:p>
-            <a:pPr indent="0" marL="0">
+            <a:pPr marL="0" indent="0">
               <a:buNone/>
             </a:pPr>
             <a:r>
@@ -23351,6 +24273,7 @@
         <a:solidFill>
           <a:srgbClr val="FFFFFF"/>
         </a:solidFill>
+        <a:effectLst/>
       </p:bgPr>
     </p:bg>
     <p:spTree>
@@ -23391,6 +24314,13 @@
             <a:prstDash val="solid"/>
           </a:ln>
         </p:spPr>
+        <p:txBody>
+          <a:bodyPr/>
+          <a:lstStyle/>
+          <a:p>
+            <a:endParaRPr lang="zh-TW" altLang="en-US"/>
+          </a:p>
+        </p:txBody>
       </p:sp>
       <p:sp>
         <p:nvSpPr>
@@ -23413,9 +24343,20 @@
           <a:bodyPr wrap="square" lIns="0" tIns="0" rIns="0" bIns="0" rtlCol="0" anchor="t"/>
           <a:lstStyle/>
           <a:p>
-            <a:pPr indent="0" marL="0">
-              <a:buNone/>
-            </a:pPr>
+            <a:pPr marL="0" indent="0">
+              <a:buNone/>
+            </a:pPr>
+            <a:r>
+              <a:rPr lang="en-US" sz="2800" b="1" dirty="0" err="1">
+                <a:solidFill>
+                  <a:srgbClr val="8A7AD2"/>
+                </a:solidFill>
+                <a:latin typeface="Microsoft JhengHei" pitchFamily="34" charset="0"/>
+                <a:ea typeface="Microsoft JhengHei" pitchFamily="34" charset="-122"/>
+                <a:cs typeface="Microsoft JhengHei" pitchFamily="34" charset="-120"/>
+              </a:rPr>
+              <a:t>門市銷售預測與巡店建議</a:t>
+            </a:r>
             <a:r>
               <a:rPr lang="en-US" sz="2800" b="1" dirty="0">
                 <a:solidFill>
@@ -23425,7 +24366,7 @@
                 <a:ea typeface="Microsoft JhengHei" pitchFamily="34" charset="-122"/>
                 <a:cs typeface="Microsoft JhengHei" pitchFamily="34" charset="-120"/>
               </a:rPr>
-              <a:t>題目 22  門市銷售預測與巡店建議  ｜  任務步驟（Phase 1 至 Phase 7）</a:t>
+              <a:t>  ｜  任務步驟（Phase 1 至 Phase 7）</a:t>
             </a:r>
             <a:endParaRPr lang="en-US" sz="2800" dirty="0"/>
           </a:p>
@@ -23452,7 +24393,7 @@
           <a:bodyPr wrap="square" lIns="0" tIns="0" rIns="0" bIns="0" rtlCol="0" anchor="t"/>
           <a:lstStyle/>
           <a:p>
-            <a:pPr indent="0" marL="0">
+            <a:pPr marL="0" indent="0">
               <a:buNone/>
             </a:pPr>
             <a:r>
@@ -23491,7 +24432,7 @@
           <a:bodyPr wrap="square" lIns="0" tIns="0" rIns="0" bIns="0" rtlCol="0" anchor="ctr"/>
           <a:lstStyle/>
           <a:p>
-            <a:pPr indent="0" marL="0">
+            <a:pPr marL="0" indent="0">
               <a:buNone/>
             </a:pPr>
             <a:r>
@@ -23530,7 +24471,7 @@
           <a:bodyPr wrap="square" lIns="0" tIns="0" rIns="0" bIns="0" rtlCol="0" anchor="ctr"/>
           <a:lstStyle/>
           <a:p>
-            <a:pPr algn="r" indent="0" marL="0">
+            <a:pPr marL="0" indent="0" algn="r">
               <a:buNone/>
             </a:pPr>
             <a:r>
@@ -23569,7 +24510,7 @@
           <a:bodyPr wrap="square" lIns="0" tIns="0" rIns="0" bIns="0" rtlCol="0" anchor="ctr"/>
           <a:lstStyle/>
           <a:p>
-            <a:pPr algn="r" indent="0" marL="0">
+            <a:pPr marL="0" indent="0" algn="r">
               <a:buNone/>
             </a:pPr>
             <a:r>
@@ -23611,6 +24552,13 @@
             <a:prstDash val="solid"/>
           </a:ln>
         </p:spPr>
+        <p:txBody>
+          <a:bodyPr/>
+          <a:lstStyle/>
+          <a:p>
+            <a:endParaRPr lang="zh-TW" altLang="en-US"/>
+          </a:p>
+        </p:txBody>
       </p:sp>
       <p:sp>
         <p:nvSpPr>
@@ -23636,6 +24584,13 @@
             <a:prstDash val="solid"/>
           </a:ln>
         </p:spPr>
+        <p:txBody>
+          <a:bodyPr/>
+          <a:lstStyle/>
+          <a:p>
+            <a:endParaRPr lang="zh-TW" altLang="en-US"/>
+          </a:p>
+        </p:txBody>
       </p:sp>
       <p:sp>
         <p:nvSpPr>
@@ -23658,7 +24613,7 @@
           <a:bodyPr wrap="square" lIns="0" tIns="0" rIns="0" bIns="0" rtlCol="0" anchor="ctr"/>
           <a:lstStyle/>
           <a:p>
-            <a:pPr algn="ctr" indent="0" marL="0">
+            <a:pPr marL="0" indent="0" algn="ctr">
               <a:buNone/>
             </a:pPr>
             <a:r>
@@ -23697,7 +24652,7 @@
           <a:bodyPr wrap="square" lIns="0" tIns="0" rIns="0" bIns="0" rtlCol="0" anchor="ctr"/>
           <a:lstStyle/>
           <a:p>
-            <a:pPr algn="ctr" indent="0" marL="0">
+            <a:pPr marL="0" indent="0" algn="ctr">
               <a:buNone/>
             </a:pPr>
             <a:r>
@@ -23736,7 +24691,7 @@
           <a:bodyPr wrap="square" lIns="0" tIns="0" rIns="0" bIns="0" rtlCol="0" anchor="t"/>
           <a:lstStyle/>
           <a:p>
-            <a:pPr indent="0" marL="0">
+            <a:pPr marL="0" indent="0">
               <a:buNone/>
             </a:pPr>
             <a:r>
@@ -23777,6 +24732,13 @@
             <a:tailEnd type="triangle"/>
           </a:ln>
         </p:spPr>
+        <p:txBody>
+          <a:bodyPr/>
+          <a:lstStyle/>
+          <a:p>
+            <a:endParaRPr lang="zh-TW" altLang="en-US"/>
+          </a:p>
+        </p:txBody>
       </p:sp>
       <p:sp>
         <p:nvSpPr>
@@ -23802,6 +24764,13 @@
             <a:prstDash val="solid"/>
           </a:ln>
         </p:spPr>
+        <p:txBody>
+          <a:bodyPr/>
+          <a:lstStyle/>
+          <a:p>
+            <a:endParaRPr lang="zh-TW" altLang="en-US"/>
+          </a:p>
+        </p:txBody>
       </p:sp>
       <p:sp>
         <p:nvSpPr>
@@ -23827,6 +24796,13 @@
             <a:prstDash val="solid"/>
           </a:ln>
         </p:spPr>
+        <p:txBody>
+          <a:bodyPr/>
+          <a:lstStyle/>
+          <a:p>
+            <a:endParaRPr lang="zh-TW" altLang="en-US"/>
+          </a:p>
+        </p:txBody>
       </p:sp>
       <p:sp>
         <p:nvSpPr>
@@ -23849,7 +24825,7 @@
           <a:bodyPr wrap="square" lIns="0" tIns="0" rIns="0" bIns="0" rtlCol="0" anchor="ctr"/>
           <a:lstStyle/>
           <a:p>
-            <a:pPr algn="ctr" indent="0" marL="0">
+            <a:pPr marL="0" indent="0" algn="ctr">
               <a:buNone/>
             </a:pPr>
             <a:r>
@@ -23888,7 +24864,7 @@
           <a:bodyPr wrap="square" lIns="0" tIns="0" rIns="0" bIns="0" rtlCol="0" anchor="ctr"/>
           <a:lstStyle/>
           <a:p>
-            <a:pPr algn="ctr" indent="0" marL="0">
+            <a:pPr marL="0" indent="0" algn="ctr">
               <a:buNone/>
             </a:pPr>
             <a:r>
@@ -23927,7 +24903,7 @@
           <a:bodyPr wrap="square" lIns="0" tIns="0" rIns="0" bIns="0" rtlCol="0" anchor="t"/>
           <a:lstStyle/>
           <a:p>
-            <a:pPr indent="0" marL="0">
+            <a:pPr marL="0" indent="0">
               <a:buNone/>
             </a:pPr>
             <a:r>
@@ -23966,7 +24942,7 @@
           <a:bodyPr wrap="square" lIns="0" tIns="0" rIns="0" bIns="0" rtlCol="0" anchor="ctr"/>
           <a:lstStyle/>
           <a:p>
-            <a:pPr algn="ctr" indent="0" marL="0">
+            <a:pPr marL="0" indent="0" algn="ctr">
               <a:buNone/>
             </a:pPr>
             <a:r>
@@ -24007,6 +24983,13 @@
             <a:tailEnd type="triangle"/>
           </a:ln>
         </p:spPr>
+        <p:txBody>
+          <a:bodyPr/>
+          <a:lstStyle/>
+          <a:p>
+            <a:endParaRPr lang="zh-TW" altLang="en-US"/>
+          </a:p>
+        </p:txBody>
       </p:sp>
       <p:sp>
         <p:nvSpPr>
@@ -24032,6 +25015,13 @@
             <a:prstDash val="solid"/>
           </a:ln>
         </p:spPr>
+        <p:txBody>
+          <a:bodyPr/>
+          <a:lstStyle/>
+          <a:p>
+            <a:endParaRPr lang="zh-TW" altLang="en-US"/>
+          </a:p>
+        </p:txBody>
       </p:sp>
       <p:sp>
         <p:nvSpPr>
@@ -24057,6 +25047,13 @@
             <a:prstDash val="solid"/>
           </a:ln>
         </p:spPr>
+        <p:txBody>
+          <a:bodyPr/>
+          <a:lstStyle/>
+          <a:p>
+            <a:endParaRPr lang="zh-TW" altLang="en-US"/>
+          </a:p>
+        </p:txBody>
       </p:sp>
       <p:sp>
         <p:nvSpPr>
@@ -24079,7 +25076,7 @@
           <a:bodyPr wrap="square" lIns="0" tIns="0" rIns="0" bIns="0" rtlCol="0" anchor="ctr"/>
           <a:lstStyle/>
           <a:p>
-            <a:pPr algn="ctr" indent="0" marL="0">
+            <a:pPr marL="0" indent="0" algn="ctr">
               <a:buNone/>
             </a:pPr>
             <a:r>
@@ -24118,7 +25115,7 @@
           <a:bodyPr wrap="square" lIns="0" tIns="0" rIns="0" bIns="0" rtlCol="0" anchor="ctr"/>
           <a:lstStyle/>
           <a:p>
-            <a:pPr algn="ctr" indent="0" marL="0">
+            <a:pPr marL="0" indent="0" algn="ctr">
               <a:buNone/>
             </a:pPr>
             <a:r>
@@ -24157,7 +25154,7 @@
           <a:bodyPr wrap="square" lIns="0" tIns="0" rIns="0" bIns="0" rtlCol="0" anchor="t"/>
           <a:lstStyle/>
           <a:p>
-            <a:pPr indent="0" marL="0">
+            <a:pPr marL="0" indent="0">
               <a:buNone/>
             </a:pPr>
             <a:r>
@@ -24198,6 +25195,13 @@
             <a:tailEnd type="triangle"/>
           </a:ln>
         </p:spPr>
+        <p:txBody>
+          <a:bodyPr/>
+          <a:lstStyle/>
+          <a:p>
+            <a:endParaRPr lang="zh-TW" altLang="en-US"/>
+          </a:p>
+        </p:txBody>
       </p:sp>
       <p:sp>
         <p:nvSpPr>
@@ -24223,6 +25227,13 @@
             <a:prstDash val="solid"/>
           </a:ln>
         </p:spPr>
+        <p:txBody>
+          <a:bodyPr/>
+          <a:lstStyle/>
+          <a:p>
+            <a:endParaRPr lang="zh-TW" altLang="en-US"/>
+          </a:p>
+        </p:txBody>
       </p:sp>
       <p:sp>
         <p:nvSpPr>
@@ -24248,6 +25259,13 @@
             <a:prstDash val="solid"/>
           </a:ln>
         </p:spPr>
+        <p:txBody>
+          <a:bodyPr/>
+          <a:lstStyle/>
+          <a:p>
+            <a:endParaRPr lang="zh-TW" altLang="en-US"/>
+          </a:p>
+        </p:txBody>
       </p:sp>
       <p:sp>
         <p:nvSpPr>
@@ -24270,7 +25288,7 @@
           <a:bodyPr wrap="square" lIns="0" tIns="0" rIns="0" bIns="0" rtlCol="0" anchor="ctr"/>
           <a:lstStyle/>
           <a:p>
-            <a:pPr algn="ctr" indent="0" marL="0">
+            <a:pPr marL="0" indent="0" algn="ctr">
               <a:buNone/>
             </a:pPr>
             <a:r>
@@ -24309,7 +25327,7 @@
           <a:bodyPr wrap="square" lIns="0" tIns="0" rIns="0" bIns="0" rtlCol="0" anchor="ctr"/>
           <a:lstStyle/>
           <a:p>
-            <a:pPr algn="ctr" indent="0" marL="0">
+            <a:pPr marL="0" indent="0" algn="ctr">
               <a:buNone/>
             </a:pPr>
             <a:r>
@@ -24348,7 +25366,7 @@
           <a:bodyPr wrap="square" lIns="0" tIns="0" rIns="0" bIns="0" rtlCol="0" anchor="t"/>
           <a:lstStyle/>
           <a:p>
-            <a:pPr indent="0" marL="0">
+            <a:pPr marL="0" indent="0">
               <a:buNone/>
             </a:pPr>
             <a:r>
@@ -24387,7 +25405,7 @@
           <a:bodyPr wrap="square" lIns="0" tIns="0" rIns="0" bIns="0" rtlCol="0" anchor="ctr"/>
           <a:lstStyle/>
           <a:p>
-            <a:pPr algn="ctr" indent="0" marL="0">
+            <a:pPr marL="0" indent="0" algn="ctr">
               <a:buNone/>
             </a:pPr>
             <a:r>
@@ -24428,6 +25446,13 @@
             <a:tailEnd type="triangle"/>
           </a:ln>
         </p:spPr>
+        <p:txBody>
+          <a:bodyPr/>
+          <a:lstStyle/>
+          <a:p>
+            <a:endParaRPr lang="zh-TW" altLang="en-US"/>
+          </a:p>
+        </p:txBody>
       </p:sp>
       <p:sp>
         <p:nvSpPr>
@@ -24453,6 +25478,13 @@
             <a:prstDash val="solid"/>
           </a:ln>
         </p:spPr>
+        <p:txBody>
+          <a:bodyPr/>
+          <a:lstStyle/>
+          <a:p>
+            <a:endParaRPr lang="zh-TW" altLang="en-US"/>
+          </a:p>
+        </p:txBody>
       </p:sp>
       <p:sp>
         <p:nvSpPr>
@@ -24478,6 +25510,13 @@
             <a:prstDash val="solid"/>
           </a:ln>
         </p:spPr>
+        <p:txBody>
+          <a:bodyPr/>
+          <a:lstStyle/>
+          <a:p>
+            <a:endParaRPr lang="zh-TW" altLang="en-US"/>
+          </a:p>
+        </p:txBody>
       </p:sp>
       <p:sp>
         <p:nvSpPr>
@@ -24500,7 +25539,7 @@
           <a:bodyPr wrap="square" lIns="0" tIns="0" rIns="0" bIns="0" rtlCol="0" anchor="ctr"/>
           <a:lstStyle/>
           <a:p>
-            <a:pPr algn="ctr" indent="0" marL="0">
+            <a:pPr marL="0" indent="0" algn="ctr">
               <a:buNone/>
             </a:pPr>
             <a:r>
@@ -24539,7 +25578,7 @@
           <a:bodyPr wrap="square" lIns="0" tIns="0" rIns="0" bIns="0" rtlCol="0" anchor="ctr"/>
           <a:lstStyle/>
           <a:p>
-            <a:pPr algn="ctr" indent="0" marL="0">
+            <a:pPr marL="0" indent="0" algn="ctr">
               <a:buNone/>
             </a:pPr>
             <a:r>
@@ -24578,7 +25617,7 @@
           <a:bodyPr wrap="square" lIns="0" tIns="0" rIns="0" bIns="0" rtlCol="0" anchor="t"/>
           <a:lstStyle/>
           <a:p>
-            <a:pPr indent="0" marL="0">
+            <a:pPr marL="0" indent="0">
               <a:buNone/>
             </a:pPr>
             <a:r>
@@ -24617,7 +25656,7 @@
           <a:bodyPr wrap="square" lIns="0" tIns="0" rIns="0" bIns="0" rtlCol="0" anchor="ctr"/>
           <a:lstStyle/>
           <a:p>
-            <a:pPr algn="ctr" indent="0" marL="0">
+            <a:pPr marL="0" indent="0" algn="ctr">
               <a:buNone/>
             </a:pPr>
             <a:r>
@@ -24658,6 +25697,13 @@
             <a:tailEnd type="triangle"/>
           </a:ln>
         </p:spPr>
+        <p:txBody>
+          <a:bodyPr/>
+          <a:lstStyle/>
+          <a:p>
+            <a:endParaRPr lang="zh-TW" altLang="en-US"/>
+          </a:p>
+        </p:txBody>
       </p:sp>
       <p:sp>
         <p:nvSpPr>
@@ -24683,6 +25729,13 @@
             <a:prstDash val="solid"/>
           </a:ln>
         </p:spPr>
+        <p:txBody>
+          <a:bodyPr/>
+          <a:lstStyle/>
+          <a:p>
+            <a:endParaRPr lang="zh-TW" altLang="en-US"/>
+          </a:p>
+        </p:txBody>
       </p:sp>
       <p:sp>
         <p:nvSpPr>
@@ -24708,6 +25761,13 @@
             <a:prstDash val="solid"/>
           </a:ln>
         </p:spPr>
+        <p:txBody>
+          <a:bodyPr/>
+          <a:lstStyle/>
+          <a:p>
+            <a:endParaRPr lang="zh-TW" altLang="en-US"/>
+          </a:p>
+        </p:txBody>
       </p:sp>
       <p:sp>
         <p:nvSpPr>
@@ -24730,7 +25790,7 @@
           <a:bodyPr wrap="square" lIns="0" tIns="0" rIns="0" bIns="0" rtlCol="0" anchor="ctr"/>
           <a:lstStyle/>
           <a:p>
-            <a:pPr algn="ctr" indent="0" marL="0">
+            <a:pPr marL="0" indent="0" algn="ctr">
               <a:buNone/>
             </a:pPr>
             <a:r>
@@ -24769,7 +25829,7 @@
           <a:bodyPr wrap="square" lIns="0" tIns="0" rIns="0" bIns="0" rtlCol="0" anchor="ctr"/>
           <a:lstStyle/>
           <a:p>
-            <a:pPr algn="ctr" indent="0" marL="0">
+            <a:pPr marL="0" indent="0" algn="ctr">
               <a:buNone/>
             </a:pPr>
             <a:r>
@@ -24808,7 +25868,7 @@
           <a:bodyPr wrap="square" lIns="0" tIns="0" rIns="0" bIns="0" rtlCol="0" anchor="t"/>
           <a:lstStyle/>
           <a:p>
-            <a:pPr indent="0" marL="0">
+            <a:pPr marL="0" indent="0">
               <a:buNone/>
             </a:pPr>
             <a:r>
@@ -24847,7 +25907,7 @@
           <a:bodyPr wrap="square" lIns="0" tIns="0" rIns="0" bIns="0" rtlCol="0" anchor="ctr"/>
           <a:lstStyle/>
           <a:p>
-            <a:pPr algn="ctr" indent="0" marL="0">
+            <a:pPr marL="0" indent="0" algn="ctr">
               <a:buNone/>
             </a:pPr>
             <a:r>
@@ -24888,6 +25948,13 @@
             <a:tailEnd type="triangle"/>
           </a:ln>
         </p:spPr>
+        <p:txBody>
+          <a:bodyPr/>
+          <a:lstStyle/>
+          <a:p>
+            <a:endParaRPr lang="zh-TW" altLang="en-US"/>
+          </a:p>
+        </p:txBody>
       </p:sp>
       <p:sp>
         <p:nvSpPr>
@@ -24913,6 +25980,13 @@
             <a:prstDash val="solid"/>
           </a:ln>
         </p:spPr>
+        <p:txBody>
+          <a:bodyPr/>
+          <a:lstStyle/>
+          <a:p>
+            <a:endParaRPr lang="zh-TW" altLang="en-US"/>
+          </a:p>
+        </p:txBody>
       </p:sp>
       <p:sp>
         <p:nvSpPr>
@@ -24938,6 +26012,13 @@
             <a:prstDash val="solid"/>
           </a:ln>
         </p:spPr>
+        <p:txBody>
+          <a:bodyPr/>
+          <a:lstStyle/>
+          <a:p>
+            <a:endParaRPr lang="zh-TW" altLang="en-US"/>
+          </a:p>
+        </p:txBody>
       </p:sp>
       <p:sp>
         <p:nvSpPr>
@@ -24960,7 +26041,7 @@
           <a:bodyPr wrap="square" lIns="0" tIns="0" rIns="0" bIns="0" rtlCol="0" anchor="ctr"/>
           <a:lstStyle/>
           <a:p>
-            <a:pPr algn="ctr" indent="0" marL="0">
+            <a:pPr marL="0" indent="0" algn="ctr">
               <a:buNone/>
             </a:pPr>
             <a:r>
@@ -24999,7 +26080,7 @@
           <a:bodyPr wrap="square" lIns="0" tIns="0" rIns="0" bIns="0" rtlCol="0" anchor="ctr"/>
           <a:lstStyle/>
           <a:p>
-            <a:pPr algn="ctr" indent="0" marL="0">
+            <a:pPr marL="0" indent="0" algn="ctr">
               <a:buNone/>
             </a:pPr>
             <a:r>
@@ -25038,7 +26119,7 @@
           <a:bodyPr wrap="square" lIns="0" tIns="0" rIns="0" bIns="0" rtlCol="0" anchor="t"/>
           <a:lstStyle/>
           <a:p>
-            <a:pPr indent="0" marL="0">
+            <a:pPr marL="0" indent="0">
               <a:buNone/>
             </a:pPr>
             <a:r>
@@ -25077,7 +26158,7 @@
           <a:bodyPr wrap="square" lIns="0" tIns="0" rIns="0" bIns="0" rtlCol="0" anchor="ctr"/>
           <a:lstStyle/>
           <a:p>
-            <a:pPr indent="0" marL="0">
+            <a:pPr marL="0" indent="0">
               <a:buNone/>
             </a:pPr>
             <a:r>
@@ -25116,7 +26197,7 @@
           <a:bodyPr wrap="square" lIns="0" tIns="0" rIns="0" bIns="0" rtlCol="0" anchor="ctr"/>
           <a:lstStyle/>
           <a:p>
-            <a:pPr indent="0" marL="0">
+            <a:pPr marL="0" indent="0">
               <a:buNone/>
             </a:pPr>
             <a:r>
@@ -25435,4 +26516,319 @@
     </a:ext>
   </a:extLst>
 </a:theme>
+</file>
+
+<file path=ppt/theme/theme2.xml><?xml version="1.0" encoding="utf-8"?>
+<a:theme xmlns:a="http://schemas.openxmlformats.org/drawingml/2006/main" name="Office 佈景主題">
+  <a:themeElements>
+    <a:clrScheme name="Office">
+      <a:dk1>
+        <a:sysClr val="windowText" lastClr="000000"/>
+      </a:dk1>
+      <a:lt1>
+        <a:sysClr val="window" lastClr="FFFFFF"/>
+      </a:lt1>
+      <a:dk2>
+        <a:srgbClr val="0E2841"/>
+      </a:dk2>
+      <a:lt2>
+        <a:srgbClr val="E8E8E8"/>
+      </a:lt2>
+      <a:accent1>
+        <a:srgbClr val="156082"/>
+      </a:accent1>
+      <a:accent2>
+        <a:srgbClr val="E97132"/>
+      </a:accent2>
+      <a:accent3>
+        <a:srgbClr val="196B24"/>
+      </a:accent3>
+      <a:accent4>
+        <a:srgbClr val="0F9ED5"/>
+      </a:accent4>
+      <a:accent5>
+        <a:srgbClr val="A02B93"/>
+      </a:accent5>
+      <a:accent6>
+        <a:srgbClr val="4EA72E"/>
+      </a:accent6>
+      <a:hlink>
+        <a:srgbClr val="467886"/>
+      </a:hlink>
+      <a:folHlink>
+        <a:srgbClr val="96607D"/>
+      </a:folHlink>
+    </a:clrScheme>
+    <a:fontScheme name="Office">
+      <a:majorFont>
+        <a:latin typeface="Aptos Display" panose="02110004020202020204"/>
+        <a:ea typeface=""/>
+        <a:cs typeface=""/>
+        <a:font script="Jpan" typeface="游ゴシック Light"/>
+        <a:font script="Hang" typeface="맑은 고딕"/>
+        <a:font script="Hans" typeface="等线 Light"/>
+        <a:font script="Hant" typeface="新細明體"/>
+        <a:font script="Arab" typeface="Times New Roman"/>
+        <a:font script="Hebr" typeface="Times New Roman"/>
+        <a:font script="Thai" typeface="Angsana New"/>
+        <a:font script="Ethi" typeface="Nyala"/>
+        <a:font script="Beng" typeface="Vrinda"/>
+        <a:font script="Gujr" typeface="Shruti"/>
+        <a:font script="Khmr" typeface="MoolBoran"/>
+        <a:font script="Knda" typeface="Tunga"/>
+        <a:font script="Guru" typeface="Raavi"/>
+        <a:font script="Cans" typeface="Euphemia"/>
+        <a:font script="Cher" typeface="Plantagenet Cherokee"/>
+        <a:font script="Yiii" typeface="Microsoft Yi Baiti"/>
+        <a:font script="Tibt" typeface="Microsoft Himalaya"/>
+        <a:font script="Thaa" typeface="MV Boli"/>
+        <a:font script="Deva" typeface="Mangal"/>
+        <a:font script="Telu" typeface="Gautami"/>
+        <a:font script="Taml" typeface="Latha"/>
+        <a:font script="Syrc" typeface="Estrangelo Edessa"/>
+        <a:font script="Orya" typeface="Kalinga"/>
+        <a:font script="Mlym" typeface="Kartika"/>
+        <a:font script="Laoo" typeface="DokChampa"/>
+        <a:font script="Sinh" typeface="Iskoola Pota"/>
+        <a:font script="Mong" typeface="Mongolian Baiti"/>
+        <a:font script="Viet" typeface="Times New Roman"/>
+        <a:font script="Uigh" typeface="Microsoft Uighur"/>
+        <a:font script="Geor" typeface="Sylfaen"/>
+        <a:font script="Armn" typeface="Arial"/>
+        <a:font script="Bugi" typeface="Leelawadee UI"/>
+        <a:font script="Bopo" typeface="Microsoft JhengHei"/>
+        <a:font script="Java" typeface="Javanese Text"/>
+        <a:font script="Lisu" typeface="Segoe UI"/>
+        <a:font script="Mymr" typeface="Myanmar Text"/>
+        <a:font script="Nkoo" typeface="Ebrima"/>
+        <a:font script="Olck" typeface="Nirmala UI"/>
+        <a:font script="Osma" typeface="Ebrima"/>
+        <a:font script="Phag" typeface="Phagspa"/>
+        <a:font script="Syrn" typeface="Estrangelo Edessa"/>
+        <a:font script="Syrj" typeface="Estrangelo Edessa"/>
+        <a:font script="Syre" typeface="Estrangelo Edessa"/>
+        <a:font script="Sora" typeface="Nirmala UI"/>
+        <a:font script="Tale" typeface="Microsoft Tai Le"/>
+        <a:font script="Talu" typeface="Microsoft New Tai Lue"/>
+        <a:font script="Tfng" typeface="Ebrima"/>
+      </a:majorFont>
+      <a:minorFont>
+        <a:latin typeface="Aptos" panose="02110004020202020204"/>
+        <a:ea typeface=""/>
+        <a:cs typeface=""/>
+        <a:font script="Jpan" typeface="游ゴシック"/>
+        <a:font script="Hang" typeface="맑은 고딕"/>
+        <a:font script="Hans" typeface="等线"/>
+        <a:font script="Hant" typeface="新細明體"/>
+        <a:font script="Arab" typeface="Arial"/>
+        <a:font script="Hebr" typeface="Arial"/>
+        <a:font script="Thai" typeface="Cordia New"/>
+        <a:font script="Ethi" typeface="Nyala"/>
+        <a:font script="Beng" typeface="Vrinda"/>
+        <a:font script="Gujr" typeface="Shruti"/>
+        <a:font script="Khmr" typeface="DaunPenh"/>
+        <a:font script="Knda" typeface="Tunga"/>
+        <a:font script="Guru" typeface="Raavi"/>
+        <a:font script="Cans" typeface="Euphemia"/>
+        <a:font script="Cher" typeface="Plantagenet Cherokee"/>
+        <a:font script="Yiii" typeface="Microsoft Yi Baiti"/>
+        <a:font script="Tibt" typeface="Microsoft Himalaya"/>
+        <a:font script="Thaa" typeface="MV Boli"/>
+        <a:font script="Deva" typeface="Mangal"/>
+        <a:font script="Telu" typeface="Gautami"/>
+        <a:font script="Taml" typeface="Latha"/>
+        <a:font script="Syrc" typeface="Estrangelo Edessa"/>
+        <a:font script="Orya" typeface="Kalinga"/>
+        <a:font script="Mlym" typeface="Kartika"/>
+        <a:font script="Laoo" typeface="DokChampa"/>
+        <a:font script="Sinh" typeface="Iskoola Pota"/>
+        <a:font script="Mong" typeface="Mongolian Baiti"/>
+        <a:font script="Viet" typeface="Arial"/>
+        <a:font script="Uigh" typeface="Microsoft Uighur"/>
+        <a:font script="Geor" typeface="Sylfaen"/>
+        <a:font script="Armn" typeface="Arial"/>
+        <a:font script="Bugi" typeface="Leelawadee UI"/>
+        <a:font script="Bopo" typeface="Microsoft JhengHei"/>
+        <a:font script="Java" typeface="Javanese Text"/>
+        <a:font script="Lisu" typeface="Segoe UI"/>
+        <a:font script="Mymr" typeface="Myanmar Text"/>
+        <a:font script="Nkoo" typeface="Ebrima"/>
+        <a:font script="Olck" typeface="Nirmala UI"/>
+        <a:font script="Osma" typeface="Ebrima"/>
+        <a:font script="Phag" typeface="Phagspa"/>
+        <a:font script="Syrn" typeface="Estrangelo Edessa"/>
+        <a:font script="Syrj" typeface="Estrangelo Edessa"/>
+        <a:font script="Syre" typeface="Estrangelo Edessa"/>
+        <a:font script="Sora" typeface="Nirmala UI"/>
+        <a:font script="Tale" typeface="Microsoft Tai Le"/>
+        <a:font script="Talu" typeface="Microsoft New Tai Lue"/>
+        <a:font script="Tfng" typeface="Ebrima"/>
+      </a:minorFont>
+    </a:fontScheme>
+    <a:fmtScheme name="Office">
+      <a:fillStyleLst>
+        <a:solidFill>
+          <a:schemeClr val="phClr"/>
+        </a:solidFill>
+        <a:gradFill rotWithShape="1">
+          <a:gsLst>
+            <a:gs pos="0">
+              <a:schemeClr val="phClr">
+                <a:lumMod val="110000"/>
+                <a:satMod val="105000"/>
+                <a:tint val="67000"/>
+              </a:schemeClr>
+            </a:gs>
+            <a:gs pos="50000">
+              <a:schemeClr val="phClr">
+                <a:lumMod val="105000"/>
+                <a:satMod val="103000"/>
+                <a:tint val="73000"/>
+              </a:schemeClr>
+            </a:gs>
+            <a:gs pos="100000">
+              <a:schemeClr val="phClr">
+                <a:lumMod val="105000"/>
+                <a:satMod val="109000"/>
+                <a:tint val="81000"/>
+              </a:schemeClr>
+            </a:gs>
+          </a:gsLst>
+          <a:lin ang="5400000" scaled="0"/>
+        </a:gradFill>
+        <a:gradFill rotWithShape="1">
+          <a:gsLst>
+            <a:gs pos="0">
+              <a:schemeClr val="phClr">
+                <a:satMod val="103000"/>
+                <a:lumMod val="102000"/>
+                <a:tint val="94000"/>
+              </a:schemeClr>
+            </a:gs>
+            <a:gs pos="50000">
+              <a:schemeClr val="phClr">
+                <a:satMod val="110000"/>
+                <a:lumMod val="100000"/>
+                <a:shade val="100000"/>
+              </a:schemeClr>
+            </a:gs>
+            <a:gs pos="100000">
+              <a:schemeClr val="phClr">
+                <a:lumMod val="99000"/>
+                <a:satMod val="120000"/>
+                <a:shade val="78000"/>
+              </a:schemeClr>
+            </a:gs>
+          </a:gsLst>
+          <a:lin ang="5400000" scaled="0"/>
+        </a:gradFill>
+      </a:fillStyleLst>
+      <a:lnStyleLst>
+        <a:ln w="12700" cap="flat" cmpd="sng" algn="ctr">
+          <a:solidFill>
+            <a:schemeClr val="phClr"/>
+          </a:solidFill>
+          <a:prstDash val="solid"/>
+          <a:miter lim="800000"/>
+        </a:ln>
+        <a:ln w="19050" cap="flat" cmpd="sng" algn="ctr">
+          <a:solidFill>
+            <a:schemeClr val="phClr"/>
+          </a:solidFill>
+          <a:prstDash val="solid"/>
+          <a:miter lim="800000"/>
+        </a:ln>
+        <a:ln w="25400" cap="flat" cmpd="sng" algn="ctr">
+          <a:solidFill>
+            <a:schemeClr val="phClr"/>
+          </a:solidFill>
+          <a:prstDash val="solid"/>
+          <a:miter lim="800000"/>
+        </a:ln>
+      </a:lnStyleLst>
+      <a:effectStyleLst>
+        <a:effectStyle>
+          <a:effectLst/>
+        </a:effectStyle>
+        <a:effectStyle>
+          <a:effectLst/>
+        </a:effectStyle>
+        <a:effectStyle>
+          <a:effectLst>
+            <a:outerShdw blurRad="57150" dist="19050" dir="5400000" algn="ctr" rotWithShape="0">
+              <a:srgbClr val="000000">
+                <a:alpha val="63000"/>
+              </a:srgbClr>
+            </a:outerShdw>
+          </a:effectLst>
+        </a:effectStyle>
+      </a:effectStyleLst>
+      <a:bgFillStyleLst>
+        <a:solidFill>
+          <a:schemeClr val="phClr"/>
+        </a:solidFill>
+        <a:solidFill>
+          <a:schemeClr val="phClr">
+            <a:tint val="95000"/>
+            <a:satMod val="170000"/>
+          </a:schemeClr>
+        </a:solidFill>
+        <a:gradFill rotWithShape="1">
+          <a:gsLst>
+            <a:gs pos="0">
+              <a:schemeClr val="phClr">
+                <a:tint val="93000"/>
+                <a:satMod val="150000"/>
+                <a:shade val="98000"/>
+                <a:lumMod val="102000"/>
+              </a:schemeClr>
+            </a:gs>
+            <a:gs pos="50000">
+              <a:schemeClr val="phClr">
+                <a:tint val="98000"/>
+                <a:satMod val="130000"/>
+                <a:shade val="90000"/>
+                <a:lumMod val="103000"/>
+              </a:schemeClr>
+            </a:gs>
+            <a:gs pos="100000">
+              <a:schemeClr val="phClr">
+                <a:shade val="63000"/>
+                <a:satMod val="120000"/>
+              </a:schemeClr>
+            </a:gs>
+          </a:gsLst>
+          <a:lin ang="5400000" scaled="0"/>
+        </a:gradFill>
+      </a:bgFillStyleLst>
+    </a:fmtScheme>
+  </a:themeElements>
+  <a:objectDefaults>
+    <a:lnDef>
+      <a:spPr/>
+      <a:bodyPr/>
+      <a:lstStyle/>
+      <a:style>
+        <a:lnRef idx="2">
+          <a:schemeClr val="accent1"/>
+        </a:lnRef>
+        <a:fillRef idx="0">
+          <a:schemeClr val="accent1"/>
+        </a:fillRef>
+        <a:effectRef idx="1">
+          <a:schemeClr val="accent1"/>
+        </a:effectRef>
+        <a:fontRef idx="minor">
+          <a:schemeClr val="tx1"/>
+        </a:fontRef>
+      </a:style>
+    </a:lnDef>
+  </a:objectDefaults>
+  <a:extraClrSchemeLst/>
+  <a:extLst>
+    <a:ext uri="{05A4C25C-085E-4340-85A3-A5531E510DB2}">
+      <thm15:themeFamily xmlns:thm15="http://schemas.microsoft.com/office/thememl/2012/main" name="Office Theme" id="{2E142A2C-CD16-42D6-873A-C26D2A0506FA}" vid="{1BDDFF52-6CD6-40A5-AB3C-68EB2F1E4D0A}"/>
+    </a:ext>
+  </a:extLst>
+</a:theme>
 </file>